--- a/deck/カンツギ_事業計画書_16枚版.pptx
+++ b/deck/カンツギ_事業計画書_16枚版.pptx
@@ -1190,9 +1190,9 @@
           <a:p>
             <a:r>
               <a:rPr lang="en-US" dirty="0"/>
-              <a:t>【0:00 - 0:35】
+              <a:t>【0:00 - 0:30】
 要約：表紙と構成
-株式会社カンツギです。勘を継ぐ、と書きます。割れた器を金で継ぐ金継ぎのように、途切れそうな現場の勘をデータで継ぐ会社です。今日は課題の5つの設問、事業の中身と理由、スタッフ、経営理念、経営計画、段階ごとの課題の順に、10分でお話しします。前提は、来年、豊富な自己資金で事業を立ち上げることです。最初の一歩は、6か月で1拠点を動かすことです。</a:t>
+株式会社カンツギの清俊紀です。カンツギは「勘を継ぐ」と書きます。割れた器を金で継ぐ金継ぎのように、途切れそうな現場の勘をデータで継ぐ、という意味を込めました。今日は課題の5つの設問の順に、10分でお話しします。前提は、来年、十分な自己資金で事業を立ち上げることです。最初の目標は、6か月で1拠点を立ち上げることです。</a:t>
             </a:r>
             <a:endParaRPr lang="en-US" dirty="0"/>
           </a:p>
@@ -1280,9 +1280,9 @@
           <a:p>
             <a:r>
               <a:rPr lang="en-US" dirty="0"/>
-              <a:t>【5:30 - 6:05】
-要約：お客様の得
-お客様の得です。グラスを掛けた班で、職長の日報と撮影が1日15分、施工管理者の写真整理が20分減ると、統計から出した時給で、10台で年約500万円。払う額は利用料とリースで約332万円なので、約1.5倍です。初年度は導入支援も含めて約13か月で回収。逆に言えば、1台1日23分減れば元が取れる。これを実証の合格ラインにします。</a:t>
+              <a:t>【5:35 - 6:05】
+要約：お客様の効果
+お客様の効果は、AIグラスを掛けた班の分だけで計算しています。職長の日報が1日15分、施工管理者の写真整理が20分減ると、10台で年約500万円です。お客様の支払いはリースを含めて約332万円なので、約1.5倍です。言い換えると、1台1日23分減れば元が取れます。この23分を、実証の合格ラインにします。</a:t>
             </a:r>
             <a:endParaRPr lang="en-US" dirty="0"/>
           </a:p>
@@ -1370,9 +1370,9 @@
           <a:p>
             <a:r>
               <a:rPr lang="en-US" dirty="0"/>
-              <a:t>【6:05 - 6:40】
-要約：当社の稼ぎ方
-当社の稼ぎ方です。基盤が月5万円、メガネ1台が月2万円で、10台なら年300万円。報告書の形に整えるところまで含みます。AIと保存の費用は1台月約6,000円で、引くと1拠点年216万円が残り、粗利率は72%。注意点は、全部をAIで解析すると1台月5万円かかり赤字になることです。だから解析は選んだ場面だけ。7年で見ると、獲得費用の約18倍が残ります。</a:t>
+              <a:t>【6:05 - 6:35】
+要約：当社の収益
+当社の収益は、基盤が月5万円、端末が1台月2万円で、10台なら年300万円です。AIと保存の費用は1台月約6,000円で、差し引くと1拠点で年216万円が残ります。粗利率は72%です。注意点は、全ての映像をAIで解析すると1台月5万円かかり、赤字になることです。なので、解析するのは選んだ場面だけにします。</a:t>
             </a:r>
             <a:endParaRPr lang="en-US" dirty="0"/>
           </a:p>
@@ -1460,9 +1460,9 @@
           <a:p>
             <a:r>
               <a:rPr lang="en-US" dirty="0"/>
-              <a:t>【6:40 - 7:15】
+              <a:t>【6:35 - 7:00】
 要約：年単位の計画と収支
-年単位の計画です。1年目は3社の試験導入、2年目に本契約、3年目は図面との照合と大手の事例、4年目は手元AR、5年目は教材化まで。5年目に81拠点、売上約2.7億円です。ただ正直に言うと、人を先に雇うので5年間は赤字で、5年目も約11百万円の赤字。損益分岐点まで、あと約6拠点分。社員1人あたり約4拠点が目安ですが、5年目は3.5です。</a:t>
+年単位の計画です。1年目は3社の試験導入、3年目は図面との照合、5年目は教材化まで進めます。5年目で81拠点、売上は約2.7億円です。ただし、人を先に採用するので5年間は赤字で、5年目も約1,100万円の赤字です。損益分岐点まで、あと約6拠点分が足りません。</a:t>
             </a:r>
             <a:endParaRPr lang="en-US" dirty="0"/>
           </a:p>
@@ -1550,9 +1550,9 @@
           <a:p>
             <a:r>
               <a:rPr lang="en-US" dirty="0"/>
-              <a:t>【7:15 - 7:50】
+              <a:t>【7:00 - 7:35】
 要約：資金と黒字化の条件
-資金は自己資金で約2.55億円。一度には入れません。実証に合格したら1年目に2億円、3年目に継続率と台数の線を越えたら5,000万円を足します。黒字の鍵は、拠点数より1拠点の台数です。15台に増やせれば、新規が計画の6割でも5年目に黒字。そして止まる線も先に決めます。実証で1台1日15分も減らなければ撤退、2年目末に平均12台に届かなければ採用を止めます。</a:t>
+資金は自己資金で約2.55億円です。一度には入れず、実証に合格したら1年目に2億円、3年目に継続率と台数の基準を満たしたら5,000万円を追加します。黒字化の条件は、拠点数より1拠点あたりの台数です。15台に増やせれば、新規が計画の6割でも5年目に黒字になります。撤退ラインも決めていて、実証で1台1日15分も減らなければ撤退します。</a:t>
             </a:r>
             <a:endParaRPr lang="en-US" dirty="0"/>
           </a:p>
@@ -1640,9 +1640,9 @@
           <a:p>
             <a:r>
               <a:rPr lang="en-US" dirty="0"/>
-              <a:t>【7:50 - 8:25】
-要約：10年で見ると
-では10年ならどうか。5年目までは変えずに延ばすと、10台のままでも6年目に黒字、8年目に5年分の赤字を取り戻します。10年目の営業利益は約190百万円、15台なら約347百万円。去年のお客様が今年も払う積み上げ型なので、時間が味方になります。条件は6年目から採用のペースを落とすこと。値下げやAI費用の倍増では、自己資金の追加が要ります。</a:t>
+              <a:t>【7:35 - 8:10】
+要約：10年の見通し
+10年で見た場合です。5年目までの計画は変えずに延ばすと、10台のままでも6年目に黒字になり、8年目に5年間の赤字を回収します。10年目の営業利益は約1.9億円です。利用料が毎年積み上がる形なので、6年目以降は利益が伸びます。条件は、6年目から採用のペースを落とすことです。値下げやAI費用が2倍になった場合は、現金が一時的に足りなくなります。</a:t>
             </a:r>
             <a:endParaRPr lang="en-US" dirty="0"/>
           </a:p>
@@ -1730,9 +1730,9 @@
           <a:p>
             <a:r>
               <a:rPr lang="en-US" dirty="0"/>
-              <a:t>【8:25 - 9:00】
+              <a:t>【8:10 - 8:45】
 要約：段階ごとの課題
-段階ごとの課題です。準備期は効果が出るか、導入期は売れるか続くか、成長期は台数と人、成熟期は大手との競争です。自分で見つけた弱いところもあります。普段使いのグラスは録画と電池に限りがあり、現場には弱い。300万円はまだ誰にも確かめていない。10台では5年で黒字にならない。そして最大のリスクは私自身です。どれも、確かめ方と直し方を決めています。</a:t>
+段階ごとの課題です。準備期は効果が出るか、導入期は売れるか、成長期は台数と採用、成熟期は大手との競合です。計画を見直して見つけた弱いところもあります。AIグラスは録画時間と電池に制約があること。300万円という価格を、まだお客様に確認できていないこと。10台のままでは5年で黒字にならないこと。そして、私自身が律速になるリスクです。どれも確かめ方を決めています。</a:t>
             </a:r>
             <a:endParaRPr lang="en-US" dirty="0"/>
           </a:p>
@@ -1820,9 +1820,9 @@
           <a:p>
             <a:r>
               <a:rPr lang="en-US" dirty="0"/>
-              <a:t>【9:00 - 9:35】
+              <a:t>【8:45 - 9:25】
 要約：準備期と、最後に
-最初の6か月は約500万円で、試作品と1拠点の実証をします。最後に私の願いです。10年続ければ、書類に使っていた約137万時間が、現場と若手の指導に戻ります。利益は目的ではなく、続けるための条件。配当は求めず、共感する仲間と育てます。ただし止まる線は守ります。日本の現場の勘を、次の担い手へ。最初の一歩として、6か月で1拠点を動かします。ありがとうございました。</a:t>
+最初の6か月は約500万円で、試作品をつくり、1拠点で実証します。最後に、この事業への思いです。10年続けば、書類に使っていた約137万時間が、現場の仕事と若手の指導に戻る計算です。私にとって利益は、事業を続けるための条件です。配当は求めず、共感してくれる会社や職人の方と一緒に育てたいと考えています。ただし、撤退ラインは守ります。まずは6か月で1拠点を立ち上げます。ありがとうございました。</a:t>
             </a:r>
             <a:endParaRPr lang="en-US" dirty="0"/>
           </a:p>
@@ -1910,9 +1910,9 @@
           <a:p>
             <a:r>
               <a:rPr lang="en-US" dirty="0"/>
-              <a:t>【0:35 - 1:15】
-要約：事業と、選んだ理由
-何をするか。職長や施工管理者が、普段のメガネと同じ軽さのAIグラスを掛けて働くだけで、作業を記録し、写真台帳と日報を作り、図面と照合し、若手の教材にします。施工管理アプリとの違いは、人が撮って入力しないことです。お客様は関東の中堅の電気工事会社で、1拠点10台で年300万円。選んだ理由は三つ。払う理由がある市場、使える技術、そして施工管理5年で、ベテランの判断が退職とともに消えるのを見てきた自分です。</a:t>
+              <a:t>【0:30 - 1:15】
+要約：事業概要と、選んだ理由
+結論から言うと、職長がAIグラスを掛けて作業するだけで、写真台帳と日報ができ、図面と照合し、若手の教材にもなるサービスです。お客様は関東の中堅の電気工事会社で、1拠点10台で年300万円です。この事業を選んだ理由は3つあります。1つ目は、人手不足と残業規制で、人を増やしても解決できないこと。2つ目は、映像を理解するAIと軽いAIグラスが実用レベルになったこと。3つ目は、私自身が地中送電線の現場で、ベテランの判断が手順書に残らないまま退職で消えるのを見てきたことです。</a:t>
             </a:r>
             <a:endParaRPr lang="en-US" dirty="0"/>
           </a:p>
@@ -2000,9 +2000,9 @@
           <a:p>
             <a:r>
               <a:rPr lang="en-US" dirty="0"/>
-              <a:t>【1:15 - 1:50】
+              <a:t>【1:15 - 1:55】
 要約：背景と課題
-困っている人は三人います。推進するDX担当、使う施工管理者と電工、お金を出す工事部長です。建設業は55歳以上が36.7%、2024年からは残業に上限があり、書類と育成に回す人がいません。熟練者が抜けると、若手が寸法や順番を間違え、やり直しが増えます。手戻りは建設全体で年約1.5兆円、電気工事だけで約2,400億円と見積もっています。勘の喪失は、お金の問題です。</a:t>
+困っているのは三者です。推進するDX担当、使う施工管理者と電工、費用を出す工事部長です。数字で言うと、建設業で働く人の36.7%が55歳以上で、29歳以下は11.7%しかいません。2024年からは、残業も原則月45時間までになりました。熟練者が辞めると、若手が寸法や順番を間違えて、手戻りが増えます。手戻りは建設全体で年約1.5兆円、電気工事だけで約2,400億円と見積もっています。</a:t>
             </a:r>
             <a:endParaRPr lang="en-US" dirty="0"/>
           </a:p>
@@ -2090,9 +2090,9 @@
           <a:p>
             <a:r>
               <a:rPr lang="en-US" dirty="0"/>
-              <a:t>【1:50 - 2:30】
+              <a:t>【1:55 - 2:35】
 要約：解決策とデモ
-これがデモの画面です。若手の作業を記録し、半導電層が図面より8ミリ短いことを見つけ、遠隔の熟練者の「テープ基準で測り直す」という判断も記録します。写真は手順ごとに報告書へ自動で入り、作業者が報告書に使う時間はゼロです。渡す先は、若手、管理者、次の担い手の三つ。真似されにくさは、記録が貯まるほど強くなること、意味づけは施工経験者にしかできないこと、電気工事の型を先に揃えることです。</a:t>
+解決策はデモで説明します。若手の作業を記録して、半導電層が図面より8mm短いことを見つけます。遠隔のベテランが「テープ基準で測り直す」と指示し、その判断も記録します。写真は手順ごとに報告書へ入るので、作業者が報告書に使う時間はゼロです。他社がすぐに真似できない理由は3つです。記録は使うほど貯まること。映像のどこが大事かは、施工経験者にしか判断できないこと。電気工事の型を先に揃えることです。</a:t>
             </a:r>
             <a:endParaRPr lang="en-US" dirty="0"/>
           </a:p>
@@ -2180,9 +2180,9 @@
           <a:p>
             <a:r>
               <a:rPr lang="en-US" dirty="0"/>
-              <a:t>【2:30 - 3:05】
+              <a:t>【2:35 - 3:10】
 要約：使い方と端末
-使い方です。メガネは全員には配らず、1班に1台、職長が掛けます。1支店で10台。撮るのは作業エリアだけで、休憩や移動は撮りません。録画はメガネに残し、大事な場面だけをAIに送ります。端末は記録用のAIグラス8台と、図面を手元に映す表示付き2台。粉じんの多い現場は産業用も選べます。グラスは試験導入ではレンタル、本契約からはお客様名義のリースで、手続きは当社が代行します。</a:t>
+使い方は、1班に1台、職長がAIグラスを掛けるだけです。電工全員には配りません。1拠点で10台、撮るのは作業エリアだけです。録画はAIグラスに残し、作業の区切りや「ここ撮って」という声が入った場面だけをAIに送ります。端末は記録用が8台、図面を手元に表示する用が2台です。粉じんの多い現場では産業用も選べます。AIグラスはお客様名義のリースで、手続きは当社が代行します。</a:t>
             </a:r>
             <a:endParaRPr lang="en-US" dirty="0"/>
           </a:p>
@@ -2270,9 +2270,9 @@
           <a:p>
             <a:r>
               <a:rPr lang="en-US" dirty="0"/>
-              <a:t>【3:05 - 3:45】
+              <a:t>【3:10 - 3:50】
 要約：競合と差別化
-競合です。施工管理アプリは、人が撮って入力する器です。一方、日立グループはほぼ同じ方向です。ビル保守のAI Safetyと、日立パワーソリューションズの受変電の点検AI。ただ日立は、自社の保守契約にAIを組み込んで稼ぐ形で、AIは品質と原価のための道具です。技術と規模では勝てないので、領域をずらします。安全と保守では競わず、中堅の電気工事会社の施工の書類と技能継承を、月額で。日立が来たら、提携も選びます。</a:t>
+競合は2種類です。1つ目は施工管理アプリで、人が撮って入力する前提です。2つ目は日立グループで、方向はほぼ同じです。ビル保守のAI Safetyと、日立パワーソリューションズの受変電設備の点検AIがあります。ただ、日立は自社の保守契約の中でAIを使う形です。技術と規模では勝てないので、対象を中堅の電気工事会社の施工に絞り、書類と技能継承を月額で提供します。日立が同じ領域に来た場合は、提携も選択肢に入れます。</a:t>
             </a:r>
             <a:endParaRPr lang="en-US" dirty="0"/>
           </a:p>
@@ -2360,9 +2360,9 @@
           <a:p>
             <a:r>
               <a:rPr lang="en-US" dirty="0"/>
-              <a:t>【3:45 - 4:20】
+              <a:t>【3:50 - 4:30】
 要約：スタッフ
-一緒に働く人です。5年目に23人。核は三つの役割です。映像AIとデータ基盤をつくるエンジニア。電気工事の施工管理10年以上で、映像のどこが大事かに印を付ける現場監修。そして、お客様の現場に入り、各社の書類の形に合わせて設定する導入コンサルタントです。この設定は外注せず社内で行い、型として製品に戻します。私の役割は、最初の営業と現場監修の統括、理念と判断の基準づくりです。</a:t>
+5年目に23人の体制にします。中心は3つの役割です。映像AIをつくるエンジニア。電気工事の施工管理を10年以上経験し、映像のどこが大事かを判断する現場監修。そして、お客様ごとの書類の形を設定する導入コンサルタントです。この設定は外注しません。外注するとノウハウが社外に残るので、社内で設定して製品に戻します。私の役割は、最初の営業と現場監修の統括、そして判断基準をつくることです。</a:t>
             </a:r>
             <a:endParaRPr lang="en-US" dirty="0"/>
           </a:p>
@@ -2450,9 +2450,9 @@
           <a:p>
             <a:r>
               <a:rPr lang="en-US" dirty="0"/>
-              <a:t>【4:20 - 4:55】
+              <a:t>【4:30 - 5:00】
 要約：経営理念
-経営理念は、現場の勘を、次の担い手へ。熟練者の判断をデータで継ぎ、人が減っても日本の現場の品質を守ることが使命です。大切にすることは三つ。現場を主役に、入力を増やさない。勘に敬意を、記録は本人の同意で、誰の技術かを残す。数字で約束、効果を毎月見せる。ホームページでは、現場で働く方に、これは監視ではなく、あなたの技術を残す仕組みだと最初に伝えます。</a:t>
+経営理念は「現場の勘を、次の担い手へ」です。大切にすることは3つです。1つ目は、現場を主役にして、入力の手間を増やさないこと。2つ目は、記録は本人の同意を取り、誰の技術かを残すこと。3つ目は、効果を毎月数字で見せることです。特に現場の方には、これは監視ではなく、自分の技術を残す仕組みだと伝えたいと考えています。</a:t>
             </a:r>
             <a:endParaRPr lang="en-US" dirty="0"/>
           </a:p>
@@ -2540,9 +2540,9 @@
           <a:p>
             <a:r>
               <a:rPr lang="en-US" dirty="0"/>
-              <a:t>【4:55 - 5:30】
+              <a:t>【5:00 - 5:35】
 要約：市場とターゲット
-市場です。電気工事と電気通信工事の中堅以上、約3,100社に、1拠点年300万円を掛けて、ターゲット市場は約141億円です。最初は関東の中堅735社のうち、書類が多く手戻りが痛い約180社に絞ります。業界団体の勉強会、展示会、グラスの販売店から会い、3か月の有償試験導入から本契約へ進みます。5年で約85拠点、解約を引いて81拠点。市場の約1.7%です。</a:t>
+市場規模は、電気工事と電気通信工事の中堅以上、約3,100社に、1拠点年300万円を掛けて約141億円です。最初は関東の中堅735社のうち、電力会社や官公庁の工事が多く、書類の量が多い約180社に絞ります。業界団体の勉強会や展示会で会い、3か月の有償試験導入から本契約に進めます。5年で約85拠点、解約を引いて81拠点の計画です。</a:t>
             </a:r>
             <a:endParaRPr lang="en-US" dirty="0"/>
           </a:p>
@@ -3299,7 +3299,7 @@
                 <a:ea typeface="Meiryo" pitchFamily="34" charset="-122"/>
                 <a:cs typeface="Meiryo" pitchFamily="34" charset="-120"/>
               </a:rPr>
-              <a:t>株式会社カンツギ（事業計画）</a:t>
+              <a:t>株式会社カンツギ</a:t>
             </a:r>
             <a:endParaRPr lang="en-US" sz="1100" dirty="0"/>
           </a:p>
@@ -3383,7 +3383,7 @@
                 <a:ea typeface="Meiryo" pitchFamily="34" charset="-122"/>
                 <a:cs typeface="Meiryo" pitchFamily="34" charset="-120"/>
               </a:rPr>
-              <a:t>発表者：＿＿＿＿＿＿</a:t>
+              <a:t>発表者：清 俊紀</a:t>
             </a:r>
             <a:endParaRPr lang="en-US" sz="1000" dirty="0"/>
           </a:p>
@@ -3509,7 +3509,7 @@
                 <a:ea typeface="Meiryo" pitchFamily="34" charset="-122"/>
                 <a:cs typeface="Meiryo" pitchFamily="34" charset="-120"/>
               </a:rPr>
-              <a:t>普段のメガネと同じ軽さのAIグラスで熟練者の作業を記録し、報告を自動にし、次の担い手とAIの教材にする</a:t>
+              <a:t>AIグラスで熟練者の作業を記録し、書類づくりと若手の育成を自動化する</a:t>
             </a:r>
             <a:endParaRPr lang="en-US" sz="1050" dirty="0"/>
           </a:p>
@@ -3762,7 +3762,7 @@
                           <a:ea typeface="Meiryo" pitchFamily="34" charset="-122"/>
                           <a:cs typeface="Meiryo" pitchFamily="34" charset="-120"/>
                         </a:rPr>
-                        <a:t>AIグラスで作業を記録し、書類と育成を自動に。勘が消えるのを止めたい</a:t>
+                        <a:t>AIグラスで作業を記録し、書類と育成を自動化する。現場で勘が消えるのを止めたい</a:t>
                       </a:r>
                       <a:endParaRPr lang="en-US" sz="950" dirty="0">
                         <a:latin typeface="Meiryo" charset="0"/>
@@ -3914,7 +3914,7 @@
                           <a:ea typeface="Meiryo" pitchFamily="34" charset="-122"/>
                           <a:cs typeface="Meiryo" pitchFamily="34" charset="-120"/>
                         </a:rPr>
-                        <a:t>5年目23人。現場監修とコンサル部隊を社内に持つ</a:t>
+                        <a:t>5年目23人。現場監修と導入コンサルタントを社内に置く</a:t>
                       </a:r>
                       <a:endParaRPr lang="en-US" sz="950" dirty="0">
                         <a:latin typeface="Meiryo" charset="0"/>
@@ -4066,7 +4066,7 @@
                           <a:ea typeface="Meiryo" pitchFamily="34" charset="-122"/>
                           <a:cs typeface="Meiryo" pitchFamily="34" charset="-120"/>
                         </a:rPr>
-                        <a:t>現場の勘を、次の担い手へ。監視ではなく、技術を残す</a:t>
+                        <a:t>現場の勘を、次の担い手へ。記録は監視ではなく、技術を残すため</a:t>
                       </a:r>
                       <a:endParaRPr lang="en-US" sz="950" dirty="0">
                         <a:latin typeface="Meiryo" charset="0"/>
@@ -4218,7 +4218,7 @@
                           <a:ea typeface="Meiryo" pitchFamily="34" charset="-122"/>
                           <a:cs typeface="Meiryo" pitchFamily="34" charset="-120"/>
                         </a:rPr>
-                        <a:t>年300万円／拠点。5年は赤字、10年なら6年目に黒字。15台で5年目</a:t>
+                        <a:t>1拠点年300万円。5年間は赤字、10年なら6年目に黒字。15台なら5年目</a:t>
                       </a:r>
                       <a:endParaRPr lang="en-US" sz="950" dirty="0">
                         <a:latin typeface="Meiryo" charset="0"/>
@@ -4370,7 +4370,7 @@
                           <a:ea typeface="Meiryo" pitchFamily="34" charset="-122"/>
                           <a:cs typeface="Meiryo" pitchFamily="34" charset="-120"/>
                         </a:rPr>
-                        <a:t>効果→売れるか→台数と人→大手。弱点も自分で示す</a:t>
+                        <a:t>効果 → 販売と定着 → 台数と採用 → 大手との競合</a:t>
                       </a:r>
                       <a:endParaRPr lang="en-US" sz="950" dirty="0">
                         <a:latin typeface="Meiryo" charset="0"/>
@@ -4565,7 +4565,7 @@
                 <a:ea typeface="Meiryo" pitchFamily="34" charset="-122"/>
                 <a:cs typeface="Meiryo" pitchFamily="34" charset="-120"/>
               </a:rPr>
-              <a:t>最初の一歩：</a:t>
+              <a:t>最初の目標：</a:t>
             </a:r>
             <a:pPr algn="l" indent="0" marL="0">
               <a:lnSpc>
@@ -4585,7 +4585,7 @@
                 <a:ea typeface="Meiryo" pitchFamily="34" charset="-122"/>
                 <a:cs typeface="Meiryo" pitchFamily="34" charset="-120"/>
               </a:rPr>
-              <a:t>6か月で1拠点を動かす。合格ラインは「1台1日23分の削減」</a:t>
+              <a:t>6か月で1拠点を立ち上げる。合格ラインは1台1日23分の削減</a:t>
             </a:r>
             <a:endParaRPr lang="en-US" sz="950" dirty="0"/>
           </a:p>
@@ -4669,7 +4669,7 @@
                 <a:ea typeface="Meiryo" pitchFamily="34" charset="-122"/>
                 <a:cs typeface="Meiryo" pitchFamily="34" charset="-120"/>
               </a:rPr>
-              <a:t>お客様の得 ─ 1拠点10台で年約500万円。払う額の約1.5倍</a:t>
+              <a:t>お客様の効果：1拠点10台で年約500万円。支払いの約1.5倍</a:t>
             </a:r>
             <a:endParaRPr lang="en-US" sz="2000" dirty="0"/>
           </a:p>
@@ -4711,7 +4711,7 @@
                 <a:ea typeface="Meiryo" pitchFamily="34" charset="-122"/>
                 <a:cs typeface="Meiryo" pitchFamily="34" charset="-120"/>
               </a:rPr>
-              <a:t>得をするのはグラスを掛けた班だけ。確かな部分（書類と写真整理の時間）だけを計画に入れる</a:t>
+              <a:t>効果はAIグラスを掛けた班の分だけ数える。計画に入れるのは書類と写真整理の時間だけ</a:t>
             </a:r>
             <a:endParaRPr lang="en-US" sz="1200" dirty="0"/>
           </a:p>
@@ -4903,7 +4903,7 @@
                 <a:ea typeface="Meiryo" pitchFamily="34" charset="-122"/>
                 <a:cs typeface="Meiryo" pitchFamily="34" charset="-120"/>
               </a:rPr>
-              <a:t>お客様の得（書類）</a:t>
+              <a:t>効果（書類の時間）</a:t>
             </a:r>
             <a:endParaRPr lang="en-US" sz="950" dirty="0"/>
           </a:p>
@@ -5007,7 +5007,7 @@
                 <a:ea typeface="Meiryo" pitchFamily="34" charset="-122"/>
                 <a:cs typeface="Meiryo" pitchFamily="34" charset="-120"/>
               </a:rPr>
-              <a:t>お客様が払う額</a:t>
+              <a:t>お客様の支払い</a:t>
             </a:r>
             <a:endParaRPr lang="en-US" sz="950" dirty="0"/>
           </a:p>
@@ -5111,7 +5111,7 @@
                 <a:ea typeface="Meiryo" pitchFamily="34" charset="-122"/>
                 <a:cs typeface="Meiryo" pitchFamily="34" charset="-120"/>
               </a:rPr>
-              <a:t>手戻りも減れば</a:t>
+              <a:t>手戻り削減を含む場合</a:t>
             </a:r>
             <a:endParaRPr lang="en-US" sz="950" dirty="0"/>
           </a:p>
@@ -5215,7 +5215,7 @@
                 <a:ea typeface="Meiryo" pitchFamily="34" charset="-122"/>
                 <a:cs typeface="Meiryo" pitchFamily="34" charset="-120"/>
               </a:rPr>
-              <a:t>払う額＝利用料300万円＋グラスのリース約32万円。手戻り＝完成工事高30億円×2%×対象工種30%×削減20%（上振れ・計画外）</a:t>
+              <a:t>支払い＝利用料300万円＋AIグラスのリース約32万円。手戻り＝完成工事高30億円×2%×対象工種30%×削減20%（上振れ・計画外）</a:t>
             </a:r>
             <a:endParaRPr lang="en-US" sz="850" dirty="0"/>
           </a:p>
@@ -5487,7 +5487,7 @@
                           <a:ea typeface="Meiryo" pitchFamily="34" charset="-122"/>
                           <a:cs typeface="Meiryo" pitchFamily="34" charset="-120"/>
                         </a:rPr>
-                        <a:t>初年度に払う額（＋導入支援200）</a:t>
+                        <a:t>初年度の支払い（導入支援200を含む）</a:t>
                       </a:r>
                       <a:endParaRPr lang="en-US" sz="950" dirty="0">
                         <a:latin typeface="Meiryo" charset="0"/>
@@ -5691,7 +5691,7 @@
                           <a:ea typeface="Meiryo" pitchFamily="34" charset="-122"/>
                           <a:cs typeface="Meiryo" pitchFamily="34" charset="-120"/>
                         </a:rPr>
-                        <a:t>2年目からの毎年の差</a:t>
+                        <a:t>2年目以降の差（毎年）</a:t>
                       </a:r>
                       <a:endParaRPr lang="en-US" sz="950" dirty="0">
                         <a:latin typeface="Meiryo" charset="0"/>
@@ -5793,7 +5793,7 @@
                           <a:ea typeface="Meiryo" pitchFamily="34" charset="-122"/>
                           <a:cs typeface="Meiryo" pitchFamily="34" charset="-120"/>
                         </a:rPr>
-                        <a:t>手戻りも入れた倍率</a:t>
+                        <a:t>手戻り削減を含む倍率</a:t>
                       </a:r>
                       <a:endParaRPr lang="en-US" sz="950" dirty="0">
                         <a:latin typeface="Meiryo" charset="0"/>
@@ -5959,7 +5959,7 @@
                 <a:ea typeface="Meiryo" pitchFamily="34" charset="-122"/>
                 <a:cs typeface="Meiryo" pitchFamily="34" charset="-120"/>
               </a:rPr>
-              <a:t>他の仕事と混ざって測れないので金額にせず、独り立ちまでの月数・付き添い時間・やり直し件数で測る</a:t>
+              <a:t>他の業務と切り分けられないので金額にはしない。独り立ちまでの月数・付き添い時間・やり直し件数で測る</a:t>
             </a:r>
             <a:endParaRPr lang="en-US" sz="950" dirty="0"/>
           </a:p>
@@ -6133,7 +6133,7 @@
                 <a:ea typeface="Meiryo" pitchFamily="34" charset="-122"/>
                 <a:cs typeface="Meiryo" pitchFamily="34" charset="-120"/>
               </a:rPr>
-              <a:t>当社の稼ぎ方 ─ 1拠点の粗利は年216万円</a:t>
+              <a:t>当社の収益：1拠点の粗利は年216万円</a:t>
             </a:r>
             <a:endParaRPr lang="en-US" sz="2000" dirty="0"/>
           </a:p>
@@ -6175,7 +6175,7 @@
                 <a:ea typeface="Meiryo" pitchFamily="34" charset="-122"/>
                 <a:cs typeface="Meiryo" pitchFamily="34" charset="-120"/>
               </a:rPr>
-              <a:t>会社の基盤＋端末の台数で払う。報告書の形に整えるところまで利用料に含む。グラス本体はお客様のリース</a:t>
+              <a:t>基盤＋端末の台数で課金。報告書の書式に整えるところまで利用料に含む。AIグラスはお客様のリース</a:t>
             </a:r>
             <a:endParaRPr lang="en-US" sz="1200" dirty="0"/>
           </a:p>
@@ -7977,7 +7977,7 @@
                 <a:ea typeface="Meiryo" pitchFamily="34" charset="-122"/>
                 <a:cs typeface="Meiryo" pitchFamily="34" charset="-120"/>
               </a:rPr>
-              <a:t>崩れるのは台数より使い方</a:t>
+              <a:t>注意点：粗利率を崩すのは台数ではなく使い方</a:t>
             </a:r>
             <a:pPr algn="l" indent="0" marL="0">
               <a:lnSpc>
@@ -8009,7 +8009,7 @@
                 <a:ea typeface="Meiryo" pitchFamily="34" charset="-122"/>
                 <a:cs typeface="Meiryo" pitchFamily="34" charset="-120"/>
               </a:rPr>
-              <a:t>全編をクラウドで毎秒解析すると1台月約5万円で値段を超える。だから録画は端末に残し、解析は選んだ場面だけ。場面の選び方は 決まり → 汎用AI → 現場監修の印で学習した自社AI の3段階</a:t>
+              <a:t>全ての映像をクラウドで毎秒解析すると1台月約5万円かかり、価格を超える。録画は端末に残し、解析は選んだ場面だけにする。場面の選び方は、ルール → 汎用AI → 現場監修の印で学習した自社AIの3段階</a:t>
             </a:r>
             <a:endParaRPr lang="en-US" sz="1000" dirty="0"/>
           </a:p>
@@ -8183,7 +8183,7 @@
                 <a:ea typeface="Meiryo" pitchFamily="34" charset="-122"/>
                 <a:cs typeface="Meiryo" pitchFamily="34" charset="-120"/>
               </a:rPr>
-              <a:t>年単位の計画と収支 ─ 5年は赤字。5年目は分岐点の94%</a:t>
+              <a:t>年単位の計画と収支：5年間は赤字。5年目は分岐点の94%</a:t>
             </a:r>
             <a:endParaRPr lang="en-US" sz="2000" dirty="0"/>
           </a:p>
@@ -8225,7 +8225,7 @@
                 <a:ea typeface="Meiryo" pitchFamily="34" charset="-122"/>
                 <a:cs typeface="Meiryo" pitchFamily="34" charset="-120"/>
               </a:rPr>
-              <a:t>人を先に雇うので5年間は赤字。隠さずに示し、黒字の条件（p.13）と10年の姿（p.14）につなぐ</a:t>
+              <a:t>人を先に採用するため5年間は赤字。黒字化の条件はp.13、10年の見通しはp.14</a:t>
             </a:r>
             <a:endParaRPr lang="en-US" sz="1200" dirty="0"/>
           </a:p>
@@ -12143,7 +12143,7 @@
                 <a:ea typeface="Meiryo" pitchFamily="34" charset="-122"/>
                 <a:cs typeface="Meiryo" pitchFamily="34" charset="-120"/>
               </a:rPr>
-              <a:t>資金と黒字化の条件 ─ 鍵は1拠点の台数</a:t>
+              <a:t>資金と黒字化の条件：黒字化は1拠点の台数で決まる</a:t>
             </a:r>
             <a:endParaRPr lang="en-US" sz="2000" dirty="0"/>
           </a:p>
@@ -12185,7 +12185,7 @@
                 <a:ea typeface="Meiryo" pitchFamily="34" charset="-122"/>
                 <a:cs typeface="Meiryo" pitchFamily="34" charset="-120"/>
               </a:rPr>
-              <a:t>自己資金2.55億円を段階投入。資金が豊富でも一度に使わない。進む・直す・止まるの線を先に引く</a:t>
+              <a:t>自己資金2.55億円を段階的に投入する。進む・直す・止まるの判断基準を先に決める</a:t>
             </a:r>
             <a:endParaRPr lang="en-US" sz="1200" dirty="0"/>
           </a:p>
@@ -13790,7 +13790,7 @@
                 <a:ea typeface="Meiryo" pitchFamily="34" charset="-122"/>
                 <a:cs typeface="Meiryo" pitchFamily="34" charset="-120"/>
               </a:rPr>
-              <a:t>進む・直す・止まるの線</a:t>
+              <a:t>進む・直す・止まるの判断基準</a:t>
             </a:r>
             <a:endParaRPr lang="en-US" sz="1100" dirty="0"/>
           </a:p>
@@ -14646,7 +14646,7 @@
                 <a:ea typeface="Meiryo" pitchFamily="34" charset="-122"/>
                 <a:cs typeface="Meiryo" pitchFamily="34" charset="-120"/>
               </a:rPr>
-              <a:t>黒字の鍵は拠点数より、1拠点の台数</a:t>
+              <a:t>黒字化の条件は、拠点数より1拠点の台数</a:t>
             </a:r>
             <a:pPr algn="l" indent="0" marL="0">
               <a:lnSpc>
@@ -14701,7 +14701,7 @@
                 <a:ea typeface="Meiryo" pitchFamily="34" charset="-122"/>
                 <a:cs typeface="Meiryo" pitchFamily="34" charset="-120"/>
               </a:rPr>
-              <a:t>だから「平均12台」を2年目末の線に置く</a:t>
+              <a:t>そのため、2年目末に「平均12台」を判断基準に置く</a:t>
             </a:r>
             <a:endParaRPr lang="en-US" sz="900" dirty="0"/>
           </a:p>
@@ -14875,7 +14875,7 @@
                 <a:ea typeface="Meiryo" pitchFamily="34" charset="-122"/>
                 <a:cs typeface="Meiryo" pitchFamily="34" charset="-120"/>
               </a:rPr>
-              <a:t>10年で見ると ─ 10台でも6年目に黒字、8年目に回収</a:t>
+              <a:t>10年の見通し：10台でも6年目に黒字、8年目に累積を回収</a:t>
             </a:r>
             <a:endParaRPr lang="en-US" sz="2000" dirty="0"/>
           </a:p>
@@ -14917,7 +14917,7 @@
                 <a:ea typeface="Meiryo" pitchFamily="34" charset="-122"/>
                 <a:cs typeface="Meiryo" pitchFamily="34" charset="-120"/>
               </a:rPr>
-              <a:t>5年目までの計画は変えずに、6〜10年目を同じ式で延ばした。条件は6年目から採用のペースを落とすこと</a:t>
+              <a:t>5年目までの計画は変えずに、6〜10年目を同じ式で延長。条件は6年目から採用のペースを落とすこと</a:t>
             </a:r>
             <a:endParaRPr lang="en-US" sz="1200" dirty="0"/>
           </a:p>
@@ -16081,7 +16081,7 @@
                 <a:ea typeface="Meiryo" pitchFamily="34" charset="-122"/>
                 <a:cs typeface="Meiryo" pitchFamily="34" charset="-120"/>
               </a:rPr>
-              <a:t>前提を崩しても10年で黒字か</a:t>
+              <a:t>前提が崩れても10年で黒字になるか</a:t>
             </a:r>
             <a:endParaRPr lang="en-US" sz="1100" dirty="0"/>
           </a:p>
@@ -17414,7 +17414,7 @@
                 <a:ea typeface="Meiryo" pitchFamily="34" charset="-122"/>
                 <a:cs typeface="Meiryo" pitchFamily="34" charset="-120"/>
               </a:rPr>
-              <a:t>読み方</a:t>
+              <a:t>ポイント</a:t>
             </a:r>
             <a:pPr algn="l" indent="0" marL="0">
               <a:lnSpc>
@@ -17446,7 +17446,7 @@
                 <a:ea typeface="Meiryo" pitchFamily="34" charset="-122"/>
                 <a:cs typeface="Meiryo" pitchFamily="34" charset="-120"/>
               </a:rPr>
-              <a:t>積み上げ型なので、6年目から黒字が厚くなる。10年目の営業利益は約190百万円（15台なら約347百万円）</a:t>
+              <a:t>利用料は毎年積み上がるため、6年目以降は利益が伸びる。10年目の営業利益は約190百万円（15台なら約347百万円）</a:t>
             </a:r>
             <a:endParaRPr lang="en-US" sz="900" dirty="0"/>
           </a:p>
@@ -17469,7 +17469,7 @@
                 <a:ea typeface="Meiryo" pitchFamily="34" charset="-122"/>
                 <a:cs typeface="Meiryo" pitchFamily="34" charset="-120"/>
               </a:rPr>
-              <a:t>値下げとAI費用2倍では現金がいったんマイナス。自己資金の追加が要る</a:t>
+              <a:t>値下げやAI費用2倍の場合は、現金が一時的にマイナスになり、自己資金の追加が必要</a:t>
             </a:r>
             <a:endParaRPr lang="en-US" sz="900" dirty="0"/>
           </a:p>
@@ -17643,7 +17643,7 @@
                 <a:ea typeface="Meiryo" pitchFamily="34" charset="-122"/>
                 <a:cs typeface="Meiryo" pitchFamily="34" charset="-120"/>
               </a:rPr>
-              <a:t>段階ごとの課題と、自分で見つけた弱いところ</a:t>
+              <a:t>段階ごとの課題と、計画の弱いところ</a:t>
             </a:r>
             <a:endParaRPr lang="en-US" sz="2000" dirty="0"/>
           </a:p>
@@ -17685,7 +17685,7 @@
                 <a:ea typeface="Meiryo" pitchFamily="34" charset="-122"/>
                 <a:cs typeface="Meiryo" pitchFamily="34" charset="-120"/>
               </a:rPr>
-              <a:t>各段階の一番の課題と打ち手。計画を疑って見つけた弱点は、確かめ方とセットで示す</a:t>
+              <a:t>各段階の一番の課題と打ち手。計画を見直して見つけた弱点は、確かめ方とセットで示す</a:t>
             </a:r>
             <a:endParaRPr lang="en-US" sz="1200" dirty="0"/>
           </a:p>
@@ -19446,7 +19446,7 @@
                 <a:ea typeface="Meiryo" pitchFamily="34" charset="-122"/>
                 <a:cs typeface="Meiryo" pitchFamily="34" charset="-120"/>
               </a:rPr>
-              <a:t>準備期の6か月と、最後に ─ 儲けより、残したいもの</a:t>
+              <a:t>準備期の6か月と、最後に</a:t>
             </a:r>
             <a:endParaRPr lang="en-US" sz="2000" dirty="0"/>
           </a:p>
@@ -19488,7 +19488,7 @@
                 <a:ea typeface="Meiryo" pitchFamily="34" charset="-122"/>
                 <a:cs typeface="Meiryo" pitchFamily="34" charset="-120"/>
               </a:rPr>
-              <a:t>最初の課題「効果が出るか」を確かめる。黒字は目的ではなく、続けるための条件</a:t>
+              <a:t>最初に確かめるのは「効果が出るか」。利益は目的ではなく、事業を続けるための条件</a:t>
             </a:r>
             <a:endParaRPr lang="en-US" sz="1200" dirty="0"/>
           </a:p>
@@ -20154,7 +20154,7 @@
                 <a:ea typeface="Meiryo" pitchFamily="34" charset="-122"/>
                 <a:cs typeface="Meiryo" pitchFamily="34" charset="-120"/>
               </a:rPr>
-              <a:t>試作品：記録→写真の自動抽出→報告書</a:t>
+              <a:t>試作品：記録 → 写真の自動抽出 → 報告書</a:t>
             </a:r>
             <a:endParaRPr lang="en-US" sz="900" dirty="0"/>
           </a:p>
@@ -20258,7 +20258,7 @@
                 <a:ea typeface="Meiryo" pitchFamily="34" charset="-122"/>
                 <a:cs typeface="Meiryo" pitchFamily="34" charset="-120"/>
               </a:rPr>
-              <a:t>1拠点で実証：1台1日23分減ったか、グラスで1日記録できるか</a:t>
+              <a:t>1拠点で実証：1台1日23分減ったか、AIグラスで1日記録できるか</a:t>
             </a:r>
             <a:endParaRPr lang="en-US" sz="900" dirty="0"/>
           </a:p>
@@ -20362,7 +20362,7 @@
                 <a:ea typeface="Meiryo" pitchFamily="34" charset="-122"/>
                 <a:cs typeface="Meiryo" pitchFamily="34" charset="-120"/>
               </a:rPr>
-              <a:t>有償試験導入3拠点の契約。合格なら2億円を入れて採用開始</a:t>
+              <a:t>有償試験導入3拠点の契約。合格したら2億円を入れて採用を始める</a:t>
             </a:r>
             <a:endParaRPr lang="en-US" sz="900" dirty="0"/>
           </a:p>
@@ -20503,7 +20503,7 @@
                 <a:ea typeface="Meiryo" pitchFamily="34" charset="-122"/>
                 <a:cs typeface="Meiryo" pitchFamily="34" charset="-120"/>
               </a:rPr>
-              <a:t>創業者としての姿勢（社会起業家として）</a:t>
+              <a:t>事業への向き合い方（社会起業家として）</a:t>
             </a:r>
             <a:endParaRPr lang="en-US" sz="1100" dirty="0"/>
           </a:p>
@@ -20607,7 +20607,7 @@
                 <a:ea typeface="Meiryo" pitchFamily="34" charset="-122"/>
                 <a:cs typeface="Meiryo" pitchFamily="34" charset="-120"/>
               </a:rPr>
-              <a:t>利益は目的ではなく、続けるための条件</a:t>
+              <a:t>利益は、事業を続けるための条件</a:t>
             </a:r>
             <a:pPr algn="l" indent="0" marL="0">
               <a:lnSpc>
@@ -20624,7 +20624,7 @@
                 <a:ea typeface="Meiryo" pitchFamily="34" charset="-122"/>
                 <a:cs typeface="Meiryo" pitchFamily="34" charset="-120"/>
               </a:rPr>
-              <a:t>　配当は求めず、現場の支援と開発に戻す</a:t>
+              <a:t>　配当は求めず、現場支援と開発に回す</a:t>
             </a:r>
             <a:endParaRPr lang="en-US" sz="950" dirty="0"/>
           </a:p>
@@ -20728,7 +20728,7 @@
                 <a:ea typeface="Meiryo" pitchFamily="34" charset="-122"/>
                 <a:cs typeface="Meiryo" pitchFamily="34" charset="-120"/>
               </a:rPr>
-              <a:t>自己資金は、見返りを求めない投資</a:t>
+              <a:t>自己資金は見返りを求めずに出す</a:t>
             </a:r>
             <a:pPr algn="l" indent="0" marL="0">
               <a:lnSpc>
@@ -20745,7 +20745,7 @@
                 <a:ea typeface="Meiryo" pitchFamily="34" charset="-122"/>
                 <a:cs typeface="Meiryo" pitchFamily="34" charset="-120"/>
               </a:rPr>
-              <a:t>　共感する工事会社・職人・業界団体と一緒に育てる</a:t>
+              <a:t>　共感してくれる工事会社・職人・業界団体と一緒に育てる</a:t>
             </a:r>
             <a:endParaRPr lang="en-US" sz="950" dirty="0"/>
           </a:p>
@@ -20849,7 +20849,7 @@
                 <a:ea typeface="Meiryo" pitchFamily="34" charset="-122"/>
                 <a:cs typeface="Meiryo" pitchFamily="34" charset="-120"/>
               </a:rPr>
-              <a:t>技能の教材は、業界の財産に</a:t>
+              <a:t>教材の一部は業界に無償で公開する</a:t>
             </a:r>
             <a:pPr algn="l" indent="0" marL="0">
               <a:lnSpc>
@@ -20866,7 +20866,7 @@
                 <a:ea typeface="Meiryo" pitchFamily="34" charset="-122"/>
                 <a:cs typeface="Meiryo" pitchFamily="34" charset="-120"/>
               </a:rPr>
-              <a:t>　一部を業界団体と学校に無償で公開する</a:t>
+              <a:t>　業界団体や学校で使えるようにする</a:t>
             </a:r>
             <a:endParaRPr lang="en-US" sz="950" dirty="0"/>
           </a:p>
@@ -20970,7 +20970,7 @@
                 <a:ea typeface="Meiryo" pitchFamily="34" charset="-122"/>
                 <a:cs typeface="Meiryo" pitchFamily="34" charset="-120"/>
               </a:rPr>
-              <a:t>それでも、止まる線は守る</a:t>
+              <a:t>撤退ラインは守る</a:t>
             </a:r>
             <a:pPr algn="l" indent="0" marL="0">
               <a:lnSpc>
@@ -20987,7 +20987,7 @@
                 <a:ea typeface="Meiryo" pitchFamily="34" charset="-122"/>
                 <a:cs typeface="Meiryo" pitchFamily="34" charset="-120"/>
               </a:rPr>
-              <a:t>　資金は有限。続けられる形を探し続ける</a:t>
+              <a:t>　資金には限りがある。続けられる形を探し続ける</a:t>
             </a:r>
             <a:endParaRPr lang="en-US" sz="950" dirty="0"/>
           </a:p>
@@ -21052,7 +21052,7 @@
                 <a:ea typeface="Meiryo" pitchFamily="34" charset="-122"/>
                 <a:cs typeface="Meiryo" pitchFamily="34" charset="-120"/>
               </a:rPr>
-              <a:t>日本の品質を支えてきた現場の勘を、人に依存しない形で次の担い手へ。</a:t>
+              <a:t>日本の現場の勘を、人に依存しない形で次の担い手へ残したい。</a:t>
             </a:r>
             <a:endParaRPr lang="en-US" sz="1400" dirty="0"/>
           </a:p>
@@ -21075,7 +21075,7 @@
                 <a:ea typeface="Meiryo" pitchFamily="34" charset="-122"/>
                 <a:cs typeface="Meiryo" pitchFamily="34" charset="-120"/>
               </a:rPr>
-              <a:t>私の資金と時間は、そのための種です。最初の一歩として、6か月で最初の1拠点を動かします。</a:t>
+              <a:t>最初の目標は、6か月で1拠点を立ち上げることです。</a:t>
             </a:r>
             <a:endParaRPr lang="en-US" sz="1400" dirty="0"/>
           </a:p>
@@ -21249,7 +21249,7 @@
                 <a:ea typeface="Meiryo" pitchFamily="34" charset="-122"/>
                 <a:cs typeface="Meiryo" pitchFamily="34" charset="-120"/>
               </a:rPr>
-              <a:t>事業と選んだ理由 ─ 記録して、書類と育成を自動に</a:t>
+              <a:t>事業概要：AIグラスで記録し、書類と育成を自動化する</a:t>
             </a:r>
             <a:endParaRPr lang="en-US" sz="2000" dirty="0"/>
           </a:p>
@@ -21291,7 +21291,7 @@
                 <a:ea typeface="Meiryo" pitchFamily="34" charset="-122"/>
                 <a:cs typeface="Meiryo" pitchFamily="34" charset="-120"/>
               </a:rPr>
-              <a:t>AIグラスを掛けて作業するだけ。報告書・図面との照合・教材までを一続きで届ける</a:t>
+              <a:t>職長がAIグラスを掛けて作業するだけで、写真台帳・日報・図面との照合・若手の教材までつくる</a:t>
             </a:r>
             <a:endParaRPr lang="en-US" sz="1200" dirty="0"/>
           </a:p>
@@ -21353,7 +21353,7 @@
                 <a:ea typeface="Meiryo" pitchFamily="34" charset="-122"/>
                 <a:cs typeface="Meiryo" pitchFamily="34" charset="-120"/>
               </a:rPr>
-              <a:t>何のビジネス？</a:t>
+              <a:t>何をするか</a:t>
             </a:r>
             <a:endParaRPr lang="en-US" sz="1150" dirty="0"/>
           </a:p>
@@ -21395,7 +21395,7 @@
                 <a:ea typeface="Meiryo" pitchFamily="34" charset="-122"/>
                 <a:cs typeface="Meiryo" pitchFamily="34" charset="-120"/>
               </a:rPr>
-              <a:t>職長・施工管理者がAIグラスを掛けるだけで、一人称の動画と会話を記録。AIが写真台帳・日報を作り、図面と照合し、教材にする</a:t>
+              <a:t>職長・施工管理者がAIグラスを掛けて作業するだけで、一人称の動画と会話を記録する。AIが写真台帳・日報をつくり、図面と照合し、教材にする</a:t>
             </a:r>
             <a:endParaRPr lang="en-US" sz="950" dirty="0"/>
           </a:p>
@@ -21457,7 +21457,7 @@
                 <a:ea typeface="Meiryo" pitchFamily="34" charset="-122"/>
                 <a:cs typeface="Meiryo" pitchFamily="34" charset="-120"/>
               </a:rPr>
-              <a:t>既存との違い</a:t>
+              <a:t>既存サービスとの違い</a:t>
             </a:r>
             <a:endParaRPr lang="en-US" sz="1150" dirty="0"/>
           </a:p>
@@ -21499,7 +21499,7 @@
                 <a:ea typeface="Meiryo" pitchFamily="34" charset="-122"/>
                 <a:cs typeface="Meiryo" pitchFamily="34" charset="-120"/>
               </a:rPr>
-              <a:t>施工管理アプリは人が撮って入力する器。当社は自動で記録し「照合→報告→教材」まで一続き。施工経験者が中身を監修</a:t>
+              <a:t>施工管理アプリは人が撮って入力する前提。当社は自動で記録し、照合・報告・教材までまとめて行う。中身は施工経験者が監修する</a:t>
             </a:r>
             <a:endParaRPr lang="en-US" sz="950" dirty="0"/>
           </a:p>
@@ -21561,7 +21561,7 @@
                 <a:ea typeface="Meiryo" pitchFamily="34" charset="-122"/>
                 <a:cs typeface="Meiryo" pitchFamily="34" charset="-120"/>
               </a:rPr>
-              <a:t>誰の悩みを解く？</a:t>
+              <a:t>誰の悩みか</a:t>
             </a:r>
             <a:endParaRPr lang="en-US" sz="1150" dirty="0"/>
           </a:p>
@@ -21603,7 +21603,7 @@
                 <a:ea typeface="Meiryo" pitchFamily="34" charset="-122"/>
                 <a:cs typeface="Meiryo" pitchFamily="34" charset="-120"/>
               </a:rPr>
-              <a:t>関東の中堅電気工事会社。残業の上限と高齢化で、写真台帳・報告書と若手の育成に回す時間がない</a:t>
+              <a:t>関東の中堅電気工事会社。残業規制と高齢化で、写真台帳・報告書と若手の育成に回す時間がない</a:t>
             </a:r>
             <a:endParaRPr lang="en-US" sz="950" dirty="0"/>
           </a:p>
@@ -21707,7 +21707,7 @@
                 <a:ea typeface="Meiryo" pitchFamily="34" charset="-122"/>
                 <a:cs typeface="Meiryo" pitchFamily="34" charset="-120"/>
               </a:rPr>
-              <a:t>基盤 月5万円＋端末 月2万円×台数。10台で年300万円が毎年積み上がる。初年度だけ導入支援200万円</a:t>
+              <a:t>基盤 月5万円＋端末 月2万円×台数。10台で年300万円の利用料を毎年いただく。初年度のみ導入支援200万円</a:t>
             </a:r>
             <a:endParaRPr lang="en-US" sz="950" dirty="0"/>
           </a:p>
@@ -21853,7 +21853,7 @@
                 <a:ea typeface="Meiryo" pitchFamily="34" charset="-122"/>
                 <a:cs typeface="Meiryo" pitchFamily="34" charset="-120"/>
               </a:rPr>
-              <a:t>55歳以上36.7%・残業に上限。お金を払ってでも解きたい</a:t>
+              <a:t>55歳以上が36.7%、残業は月45時間まで。人を増やして解決できない</a:t>
             </a:r>
             <a:endParaRPr lang="en-US" sz="950" dirty="0"/>
           </a:p>
@@ -21957,7 +21957,7 @@
                 <a:ea typeface="Meiryo" pitchFamily="34" charset="-122"/>
                 <a:cs typeface="Meiryo" pitchFamily="34" charset="-120"/>
               </a:rPr>
-              <a:t>見て理解するAIと、約50gのAIグラスが実用に</a:t>
+              <a:t>映像を理解するAIと、約50gのAIグラスが実用レベルになった</a:t>
             </a:r>
             <a:endParaRPr lang="en-US" sz="950" dirty="0"/>
           </a:p>
@@ -22061,7 +22061,7 @@
                 <a:ea typeface="Meiryo" pitchFamily="34" charset="-122"/>
                 <a:cs typeface="Meiryo" pitchFamily="34" charset="-120"/>
               </a:rPr>
-              <a:t>地中送電線の施工管理5年。勘が退職で消えるのを見た。AIも自分で作れる</a:t>
+              <a:t>地中送電線の施工管理を5年。現場とAI実装の両方がわかる</a:t>
             </a:r>
             <a:endParaRPr lang="en-US" sz="950" dirty="0"/>
           </a:p>
@@ -22146,7 +22146,7 @@
                 <a:ea typeface="Meiryo" pitchFamily="34" charset="-122"/>
                 <a:cs typeface="Meiryo" pitchFamily="34" charset="-120"/>
               </a:rPr>
-              <a:t>　割れた器を金で継ぐ「金継ぎ」のように、途切れそうな現場の勘をデータで継ぐ。人が減っても、日本の現場の品質を落とさない</a:t>
+              <a:t>　地中送電の現場で、ベテランの判断が手順書に残らないまま退職で消えるのを見てきた。その判断をデータで残し、次の担い手に渡したい</a:t>
             </a:r>
             <a:endParaRPr lang="en-US" sz="1000" dirty="0"/>
           </a:p>
@@ -22320,7 +22320,7 @@
                 <a:ea typeface="Meiryo" pitchFamily="34" charset="-122"/>
                 <a:cs typeface="Meiryo" pitchFamily="34" charset="-120"/>
               </a:rPr>
-              <a:t>背景と課題 ─ 書類と育成に追われ、熟練者が辞めると止まる</a:t>
+              <a:t>背景と課題：熟練者が辞めると、現場が止まる</a:t>
             </a:r>
             <a:endParaRPr lang="en-US" sz="2000" dirty="0"/>
           </a:p>
@@ -22362,7 +22362,7 @@
                 <a:ea typeface="Meiryo" pitchFamily="34" charset="-122"/>
                 <a:cs typeface="Meiryo" pitchFamily="34" charset="-120"/>
               </a:rPr>
-              <a:t>AIは事務作業の支援から、作業者の「目と手」の支援へ。困っているのは三者</a:t>
+              <a:t>人手不足と残業規制で、書類と育成に回す時間がない。困っているのは次の三者</a:t>
             </a:r>
             <a:endParaRPr lang="en-US" sz="1200" dirty="0"/>
           </a:p>
@@ -23361,7 +23361,7 @@
                 <a:ea typeface="Meiryo" pitchFamily="34" charset="-122"/>
                 <a:cs typeface="Meiryo" pitchFamily="34" charset="-120"/>
               </a:rPr>
-              <a:t>勘が消えると、お金が消える：</a:t>
+              <a:t>熟練者が辞めた後に起きること：</a:t>
             </a:r>
             <a:pPr algn="l" indent="0" marL="0">
               <a:lnSpc>
@@ -23378,7 +23378,7 @@
                 <a:ea typeface="Meiryo" pitchFamily="34" charset="-122"/>
                 <a:cs typeface="Meiryo" pitchFamily="34" charset="-120"/>
               </a:rPr>
-              <a:t>熟練者が辞める → 若手が迷い間違える（寸法・基準点・重なり順）→ 手戻りと工期遅れ → 残業の上限で人を足せず、受けられる工事が減る</a:t>
+              <a:t>若手が寸法・基準点・重なり順を間違える → 手戻りと工期遅れが出る → 残業規制で人を足せず、受けられる工事が減る</a:t>
             </a:r>
             <a:endParaRPr lang="en-US" sz="1000" dirty="0"/>
           </a:p>
@@ -23552,7 +23552,7 @@
                 <a:ea typeface="Meiryo" pitchFamily="34" charset="-122"/>
                 <a:cs typeface="Meiryo" pitchFamily="34" charset="-120"/>
               </a:rPr>
-              <a:t>解決策 ─ 記録は自動。渡す先は三つ</a:t>
+              <a:t>解決策：作業を自動で記録し、3つの形で渡す</a:t>
             </a:r>
             <a:endParaRPr lang="en-US" sz="2000" dirty="0"/>
           </a:p>
@@ -23594,7 +23594,7 @@
                 <a:ea typeface="Meiryo" pitchFamily="34" charset="-122"/>
                 <a:cs typeface="Meiryo" pitchFamily="34" charset="-120"/>
               </a:rPr>
-              <a:t>デモ：架空のケーブル接続工事。若手の作業を記録し、8mmの差異を検出、報告書と教材までつながる</a:t>
+              <a:t>デモ（架空のケーブル接続工事）：若手の作業を記録し、図面との8mmの差を見つけ、報告書と教材にする</a:t>
             </a:r>
             <a:endParaRPr lang="en-US" sz="1200" dirty="0"/>
           </a:p>
@@ -23972,7 +23972,7 @@
                 <a:ea typeface="Meiryo" pitchFamily="34" charset="-122"/>
                 <a:cs typeface="Meiryo" pitchFamily="34" charset="-120"/>
               </a:rPr>
-              <a:t>渡す先は三つ</a:t>
+              <a:t>渡す先は3つ</a:t>
             </a:r>
             <a:endParaRPr lang="en-US" sz="1100" dirty="0"/>
           </a:p>
@@ -24283,7 +24283,7 @@
                 <a:ea typeface="Meiryo" pitchFamily="34" charset="-122"/>
                 <a:cs typeface="Meiryo" pitchFamily="34" charset="-120"/>
               </a:rPr>
-              <a:t>真似されにくい3つの仕組み</a:t>
+              <a:t>他社がすぐに真似できない理由（3つ）</a:t>
             </a:r>
             <a:pPr algn="l" indent="0" marL="0">
               <a:lnSpc>
@@ -24315,7 +24315,7 @@
                 <a:ea typeface="Meiryo" pitchFamily="34" charset="-122"/>
                 <a:cs typeface="Meiryo" pitchFamily="34" charset="-120"/>
               </a:rPr>
-              <a:t>1. 記録が貯まるほど強くなる</a:t>
+              <a:t>1. 記録は使うほど貯まる</a:t>
             </a:r>
             <a:endParaRPr lang="en-US" sz="950" dirty="0"/>
           </a:p>
@@ -24338,7 +24338,7 @@
                 <a:ea typeface="Meiryo" pitchFamily="34" charset="-122"/>
                 <a:cs typeface="Meiryo" pitchFamily="34" charset="-120"/>
               </a:rPr>
-              <a:t>図面に現れない現場処置の記録は、後発に移せない</a:t>
+              <a:t>図面に残らない現場処置の記録は、後から来た会社に移せない</a:t>
             </a:r>
             <a:endParaRPr lang="en-US" sz="950" dirty="0"/>
           </a:p>
@@ -24361,7 +24361,7 @@
                 <a:ea typeface="Meiryo" pitchFamily="34" charset="-122"/>
                 <a:cs typeface="Meiryo" pitchFamily="34" charset="-120"/>
               </a:rPr>
-              <a:t>2. 意味づけは施工経験者にしかできない</a:t>
+              <a:t>2. 大事な場面の判断は施工経験者にしかできない</a:t>
             </a:r>
             <a:endParaRPr lang="en-US" sz="950" dirty="0"/>
           </a:p>
@@ -24384,7 +24384,7 @@
                 <a:ea typeface="Meiryo" pitchFamily="34" charset="-122"/>
                 <a:cs typeface="Meiryo" pitchFamily="34" charset="-120"/>
               </a:rPr>
-              <a:t>映像のどこが大事かを現場監修が印を付け、AIが育つ</a:t>
+              <a:t>現場監修が映像に印を付け、その印でAIを学習させる</a:t>
             </a:r>
             <a:endParaRPr lang="en-US" sz="950" dirty="0"/>
           </a:p>
@@ -24407,7 +24407,7 @@
                 <a:ea typeface="Meiryo" pitchFamily="34" charset="-122"/>
                 <a:cs typeface="Meiryo" pitchFamily="34" charset="-120"/>
               </a:rPr>
-              <a:t>3. 電気工事の型を業界で先に揃える</a:t>
+              <a:t>3. 電気工事の型を先に揃える</a:t>
             </a:r>
             <a:endParaRPr lang="en-US" sz="950" dirty="0"/>
           </a:p>
@@ -24430,7 +24430,7 @@
                 <a:ea typeface="Meiryo" pitchFamily="34" charset="-122"/>
                 <a:cs typeface="Meiryo" pitchFamily="34" charset="-120"/>
               </a:rPr>
-              <a:t>工種ごとの手順と、発注者ごとの報告書の型</a:t>
+              <a:t>工種ごとの手順と、発注者ごとの報告書の書式</a:t>
             </a:r>
             <a:endParaRPr lang="en-US" sz="950" dirty="0"/>
           </a:p>
@@ -24604,7 +24604,7 @@
                 <a:ea typeface="Meiryo" pitchFamily="34" charset="-122"/>
                 <a:cs typeface="Meiryo" pitchFamily="34" charset="-120"/>
               </a:rPr>
-              <a:t>使い方と端末 ─ 1班に1台、職長がAIグラスを掛ける</a:t>
+              <a:t>使い方と端末：1班に1台、職長がAIグラスを掛ける</a:t>
             </a:r>
             <a:endParaRPr lang="en-US" sz="2000" dirty="0"/>
           </a:p>
@@ -24646,7 +24646,7 @@
                 <a:ea typeface="Meiryo" pitchFamily="34" charset="-122"/>
                 <a:cs typeface="Meiryo" pitchFamily="34" charset="-120"/>
               </a:rPr>
-              <a:t>グラスは作らず市販品を選ぶ。誰が・どこで・何台・何を撮るかを先に決める</a:t>
+              <a:t>端末は作らず市販品を使う。誰が・何台・どこで・何を撮るかを最初に決める</a:t>
             </a:r>
             <a:endParaRPr lang="en-US" sz="1200" dirty="0"/>
           </a:p>
@@ -25980,7 +25980,7 @@
                 <a:ea typeface="Meiryo" pitchFamily="34" charset="-122"/>
                 <a:cs typeface="Meiryo" pitchFamily="34" charset="-120"/>
               </a:rPr>
-              <a:t>当社が作るもの：</a:t>
+              <a:t>当社がつくるもの：</a:t>
             </a:r>
             <a:pPr algn="l" indent="0" marL="0">
               <a:lnSpc>
@@ -26000,7 +26000,7 @@
                 <a:ea typeface="Meiryo" pitchFamily="34" charset="-122"/>
                 <a:cs typeface="Meiryo" pitchFamily="34" charset="-120"/>
               </a:rPr>
-              <a:t>アプリ・AI・データ基盤。グラス本体は作らず、進化したら乗り換える</a:t>
+              <a:t>アプリ・AI・データ基盤。AIグラス本体はつくらず、性能が上がったら乗り換える</a:t>
             </a:r>
             <a:endParaRPr lang="en-US" sz="950" dirty="0"/>
           </a:p>
@@ -26174,7 +26174,7 @@
                 <a:ea typeface="Meiryo" pitchFamily="34" charset="-122"/>
                 <a:cs typeface="Meiryo" pitchFamily="34" charset="-120"/>
               </a:rPr>
-              <a:t>競合と差別化 ─ 日立と同じ方向。だから領域をずらす</a:t>
+              <a:t>競合と差別化：日立と方向は同じ。対象を施工と中堅に絞る</a:t>
             </a:r>
             <a:endParaRPr lang="en-US" sz="2000" dirty="0"/>
           </a:p>
@@ -26216,7 +26216,7 @@
                 <a:ea typeface="Meiryo" pitchFamily="34" charset="-122"/>
                 <a:cs typeface="Meiryo" pitchFamily="34" charset="-120"/>
               </a:rPr>
-              <a:t>施工管理アプリは人が入力する器。日立は自社の保守契約にAIを組み込んで稼ぐ。当社は中堅の施工を月額で</a:t>
+              <a:t>施工管理アプリは人が入力する前提。日立は自社の保守契約にAIを組み込む。当社は中堅の施工を月額で</a:t>
             </a:r>
             <a:endParaRPr lang="en-US" sz="1200" dirty="0"/>
           </a:p>
@@ -28393,7 +28393,7 @@
                 <a:ea typeface="Meiryo" pitchFamily="34" charset="-122"/>
                 <a:cs typeface="Meiryo" pitchFamily="34" charset="-120"/>
               </a:rPr>
-              <a:t>差別化戦略</a:t>
+              <a:t>差別化の方針</a:t>
             </a:r>
             <a:pPr algn="l" indent="0" marL="0">
               <a:lnSpc>
@@ -28425,7 +28425,7 @@
                 <a:ea typeface="Meiryo" pitchFamily="34" charset="-122"/>
                 <a:cs typeface="Meiryo" pitchFamily="34" charset="-120"/>
               </a:rPr>
-              <a:t>① 安全と保守では競わない（日立の土俵）</a:t>
+              <a:t>① 安全・保守の領域では競わない</a:t>
             </a:r>
             <a:endParaRPr lang="en-US" sz="900" dirty="0"/>
           </a:p>
@@ -28471,7 +28471,7 @@
                 <a:ea typeface="Meiryo" pitchFamily="34" charset="-122"/>
                 <a:cs typeface="Meiryo" pitchFamily="34" charset="-120"/>
               </a:rPr>
-              <a:t>③ 電気工事の工種の型と教材を、業界共通で先に揃える</a:t>
+              <a:t>③ 電気工事の工種ごとの型と教材を先に揃える</a:t>
             </a:r>
             <a:endParaRPr lang="en-US" sz="900" dirty="0"/>
           </a:p>
@@ -28494,7 +28494,7 @@
                 <a:ea typeface="Meiryo" pitchFamily="34" charset="-122"/>
                 <a:cs typeface="Meiryo" pitchFamily="34" charset="-120"/>
               </a:rPr>
-              <a:t>日立が来たら：</a:t>
+              <a:t>日立が同じ領域に来た場合：</a:t>
             </a:r>
             <a:pPr algn="l" indent="0" marL="0">
               <a:lnSpc>
@@ -28514,7 +28514,7 @@
                 <a:ea typeface="Meiryo" pitchFamily="34" charset="-122"/>
                 <a:cs typeface="Meiryo" pitchFamily="34" charset="-120"/>
               </a:rPr>
-              <a:t>競わず提携も選ぶ。勝負の窓は2〜3年</a:t>
+              <a:t>提携も選択肢に入れる。2〜3年で型とデータを先に揃える</a:t>
             </a:r>
             <a:endParaRPr lang="en-US" sz="900" dirty="0"/>
           </a:p>
@@ -28688,7 +28688,7 @@
                 <a:ea typeface="Meiryo" pitchFamily="34" charset="-122"/>
                 <a:cs typeface="Meiryo" pitchFamily="34" charset="-120"/>
               </a:rPr>
-              <a:t>スタッフ ─ 5年目23人。現場監修とコンサルを内製</a:t>
+              <a:t>スタッフ：5年目23人。現場監修とコンサルを社内に置く</a:t>
             </a:r>
             <a:endParaRPr lang="en-US" sz="2000" dirty="0"/>
           </a:p>
@@ -28730,7 +28730,7 @@
                 <a:ea typeface="Meiryo" pitchFamily="34" charset="-122"/>
                 <a:cs typeface="Meiryo" pitchFamily="34" charset="-120"/>
               </a:rPr>
-              <a:t>人数・特性・任せる役割、そして自分の役割。帳票の設定は外部に委託せず、社内に知見を貯める</a:t>
+              <a:t>役割ごとの人数・求める特性・私の役割。各社の帳票の設定は外注せず、ノウハウを社内に貯める</a:t>
             </a:r>
             <a:endParaRPr lang="en-US" sz="1200" dirty="0"/>
           </a:p>
@@ -28949,7 +28949,7 @@
                 <a:ea typeface="Meiryo" pitchFamily="34" charset="-122"/>
                 <a:cs typeface="Meiryo" pitchFamily="34" charset="-120"/>
               </a:rPr>
-              <a:t>私の役割：最初の営業・現場監修の統括・理念と判断の基準づくり</a:t>
+              <a:t>私の役割：最初の営業・現場監修の統括・判断基準づくり</a:t>
             </a:r>
             <a:endParaRPr lang="en-US" sz="950" dirty="0"/>
           </a:p>
@@ -30861,7 +30861,7 @@
                 <a:ea typeface="Meiryo" pitchFamily="34" charset="-122"/>
                 <a:cs typeface="Meiryo" pitchFamily="34" charset="-120"/>
               </a:rPr>
-              <a:t>コンサル部隊を社内に持つ理由：</a:t>
+              <a:t>導入コンサルタントを社内に置く理由：</a:t>
             </a:r>
             <a:pPr algn="l" indent="0" marL="0">
               <a:lnSpc>
@@ -30878,7 +30878,7 @@
                 <a:ea typeface="Meiryo" pitchFamily="34" charset="-122"/>
                 <a:cs typeface="Meiryo" pitchFamily="34" charset="-120"/>
               </a:rPr>
-              <a:t>各社の帳票や連携の設定を外部に任せると、知見が社外に残る。社内で行い、型として製品に戻す</a:t>
+              <a:t>各社の帳票や連携の設定を外注すると、ノウハウが社外に残る。社内で設定し、型として製品に戻す</a:t>
             </a:r>
             <a:endParaRPr lang="en-US" sz="950" dirty="0"/>
           </a:p>
@@ -31052,7 +31052,7 @@
                 <a:ea typeface="Meiryo" pitchFamily="34" charset="-122"/>
                 <a:cs typeface="Meiryo" pitchFamily="34" charset="-120"/>
               </a:rPr>
-              <a:t>経営理念 ─ 現場の勘を、次の担い手へ。</a:t>
+              <a:t>経営理念：現場の勘を、次の担い手へ。</a:t>
             </a:r>
             <a:endParaRPr lang="en-US" sz="2000" dirty="0"/>
           </a:p>
@@ -31094,7 +31094,7 @@
                 <a:ea typeface="Meiryo" pitchFamily="34" charset="-122"/>
                 <a:cs typeface="Meiryo" pitchFamily="34" charset="-120"/>
               </a:rPr>
-              <a:t>ホームページで多くの人に伝える内容：使命 → 大切にすること → 一人ひとりへの約束</a:t>
+              <a:t>ホームページで伝える内容：使命・大切にすること・それぞれへの約束</a:t>
             </a:r>
             <a:endParaRPr lang="en-US" sz="1200" dirty="0"/>
           </a:p>
@@ -32365,7 +32365,7 @@
                 <a:ea typeface="Meiryo" pitchFamily="34" charset="-122"/>
                 <a:cs typeface="Meiryo" pitchFamily="34" charset="-120"/>
               </a:rPr>
-              <a:t>市場とターゲット ─ 約141億円。最初は関東の中堅</a:t>
+              <a:t>市場とターゲット：約141億円。最初は関東の中堅に絞る</a:t>
             </a:r>
             <a:endParaRPr lang="en-US" sz="2000" dirty="0"/>
           </a:p>

--- a/deck/カンツギ_事業計画書_16枚版.pptx
+++ b/deck/カンツギ_事業計画書_16枚版.pptx
@@ -1732,7 +1732,7 @@
               <a:rPr lang="en-US" dirty="0"/>
               <a:t>【8:10 - 8:45】
 要約：段階ごとの課題
-段階ごとの課題です。準備期は効果が出るか、導入期は売れるか、成長期は台数と採用、成熟期は大手との競合です。計画を見直して見つけた弱いところもあります。AIグラスは録画時間と電池に制約があること。300万円という価格を、まだお客様に確認できていないこと。10台のままでは5年で黒字にならないこと。そして、私自身が律速になるリスクです。どれも確かめ方を決めています。</a:t>
+段階ごとの課題です。準備期は効果が出るか、導入期は売れるか、成長期は台数と採用、成熟期は大手との競合です。計画を見直して見つけた弱いところもあります。AIグラスは録画時間と電池に制約があること。300万円という価格を、まだお客様に確認できていないこと。10台のままでは5年で黒字にならないこと。そして、私自身がボトルネックになるリスクです。どれも確かめ方を決めています。</a:t>
             </a:r>
             <a:endParaRPr lang="en-US" dirty="0"/>
           </a:p>
@@ -1822,7 +1822,7 @@
               <a:rPr lang="en-US" dirty="0"/>
               <a:t>【8:45 - 9:25】
 要約：準備期と、最後に
-最初の6か月は約500万円で、試作品をつくり、1拠点で実証します。最後に、この事業への思いです。10年続けば、書類に使っていた約137万時間が、現場の仕事と若手の指導に戻る計算です。私にとって利益は、事業を続けるための条件です。配当は求めず、共感してくれる会社や職人の方と一緒に育てたいと考えています。ただし、撤退ラインは守ります。まずは6か月で1拠点を立ち上げます。ありがとうございました。</a:t>
+最初の6か月は約500万円で、試作品をつくり、1拠点で実証します。最後に、この事業への思いです。10年続けば、書類に使っていた約137万時間が、現場の仕事と若手の指導に戻る計算です。私にとって利益は、事業を続けるための条件です。配当は求めず、共感してくれる会社や職人の方と一緒に育てたいと考えています。ただし、撤退ラインは守ります。まずは6か月で1拠点を立ち上げます。以上で発表を終わります。ご清聴ありがとうございました。</a:t>
             </a:r>
             <a:endParaRPr lang="en-US" dirty="0"/>
           </a:p>
@@ -20266,7 +20266,7 @@
                           <a:ea typeface="BIZ UDPGothic" pitchFamily="34" charset="-122"/>
                           <a:cs typeface="BIZ UDPGothic" pitchFamily="34" charset="-120"/>
                         </a:rPr>
-                        <a:t>創業者が律速になる・前職との関係</a:t>
+                        <a:t>創業者がボトルネックになる・前職との関係</a:t>
                       </a:r>
                       <a:endParaRPr lang="en-US" sz="850" dirty="0">
                         <a:latin typeface="BIZ UDPGothic" charset="0"/>
@@ -22270,6 +22270,48 @@
       <p:sp>
         <p:nvSpPr>
           <p:cNvPr id="51" name="Text 48"/>
+          <p:cNvSpPr txBox="1"/>
+          <p:nvPr/>
+        </p:nvSpPr>
+        <p:spPr>
+          <a:xfrm>
+            <a:off x="5669280" y="4114800"/>
+            <a:ext cx="2971800" cy="292608"/>
+          </a:xfrm>
+          <a:prstGeom prst="rect">
+            <a:avLst/>
+          </a:prstGeom>
+          <a:noFill/>
+          <a:ln/>
+        </p:spPr>
+        <p:txBody>
+          <a:bodyPr wrap="square" lIns="0" tIns="0" rIns="0" bIns="0" rtlCol="0" anchor="ctr"/>
+          <a:lstStyle/>
+          <a:p>
+            <a:pPr algn="r" indent="0" marL="0">
+              <a:lnSpc>
+                <a:spcPct val="115000"/>
+              </a:lnSpc>
+              <a:buNone/>
+            </a:pPr>
+            <a:r>
+              <a:rPr lang="en-US" sz="1100" b="1" dirty="0">
+                <a:solidFill>
+                  <a:srgbClr val="F5C400"/>
+                </a:solidFill>
+                <a:latin typeface="BIZ UDPGothic" pitchFamily="34" charset="0"/>
+                <a:ea typeface="BIZ UDPGothic" pitchFamily="34" charset="-122"/>
+                <a:cs typeface="BIZ UDPGothic" pitchFamily="34" charset="-120"/>
+              </a:rPr>
+              <a:t>ご清聴ありがとうございました</a:t>
+            </a:r>
+            <a:endParaRPr lang="en-US" sz="1100" dirty="0"/>
+          </a:p>
+        </p:txBody>
+      </p:sp>
+      <p:sp>
+        <p:nvSpPr>
+          <p:cNvPr id="52" name="Text 49"/>
           <p:cNvSpPr txBox="1"/>
           <p:nvPr/>
         </p:nvSpPr>

--- a/deck/カンツギ_事業計画書_16枚版.pptx
+++ b/deck/カンツギ_事業計画書_16枚版.pptx
@@ -1190,9 +1190,9 @@
           <a:p>
             <a:r>
               <a:rPr lang="en-US" dirty="0"/>
-              <a:t>【0:00 - 0:30】
+              <a:t>【0:00 - 0:20】
 要約：表紙と構成
-株式会社カンツギです。カンツギは「勘を継ぐ」と書きます。割れた器を金で継ぐ金継ぎのように、途切れそうな現場の勘をデータで継ぐ、という意味を込めました。今日は課題の5つの設問の順に、10分でお話しします。前提は、来年、十分な自己資金で事業を立ち上げることです。最初の目標は、6か月で1拠点を立ち上げることです。</a:t>
+株式会社カンツギです。カンツギは「勘を継ぐ」と書きます。割れた器を金で継ぐ金継ぎのように、途切れそうな現場の勘をデータで継ぐ、という意味を込めました。課題の5つの設問の順に、10分でお話しします。</a:t>
             </a:r>
             <a:endParaRPr lang="en-US" dirty="0"/>
           </a:p>
@@ -1280,9 +1280,9 @@
           <a:p>
             <a:r>
               <a:rPr lang="en-US" dirty="0"/>
-              <a:t>【5:35 - 6:05】
+              <a:t>【5:45 - 6:15】
 要約：お客様の効果
-お客様の効果は、AIグラスを掛けた班の分だけで計算しています。職長の日報が1日15分、施工管理者の写真整理が20分減ると、10台で年約500万円です。お客様の支払いはリースを含めて約332万円なので、約1.5倍です。言い換えると、1台1日23分減れば元が取れます。この23分を、実証の合格ラインにします。</a:t>
+お客様の効果は、AIグラスを掛けた班の分だけで計算しています。職長の日報が1日15分、施工管理者の写真整理が20分減ると、10台で年約500万円です。お客様の支払いはリースを含めて約332万円なので、約1.5倍です。言い換えると、お客様が元を取るには、1台1日23分減れば足ります。この23分を、実証の合格ラインにします。</a:t>
             </a:r>
             <a:endParaRPr lang="en-US" dirty="0"/>
           </a:p>
@@ -1370,7 +1370,7 @@
           <a:p>
             <a:r>
               <a:rPr lang="en-US" dirty="0"/>
-              <a:t>【6:05 - 6:35】
+              <a:t>【6:15 - 6:45】
 要約：当社の収益
 当社の収益は、基盤が月5万円、端末が1台月2万円で、10台なら年300万円です。AIと保存の費用は1台月約6,000円で、差し引くと1拠点で年216万円が残ります。粗利率は72%です。注意点は、全ての映像をAIで解析すると1台月5万円かかり、赤字になることです。なので、解析するのは選んだ場面だけにします。</a:t>
             </a:r>
@@ -1460,7 +1460,7 @@
           <a:p>
             <a:r>
               <a:rPr lang="en-US" dirty="0"/>
-              <a:t>【6:35 - 7:00】
+              <a:t>【6:45 - 7:10】
 要約：年単位の計画と収支
 年単位の計画です。1年目は3社の試験導入、3年目は図面との照合、5年目は教材化まで進めます。5年目で81拠点、売上は約2.7億円です。ただし、人を先に採用するので5年間は赤字で、5年目も約1,100万円の赤字です。損益分岐点まで、あと約6拠点分が足りません。</a:t>
             </a:r>
@@ -1550,7 +1550,7 @@
           <a:p>
             <a:r>
               <a:rPr lang="en-US" dirty="0"/>
-              <a:t>【7:00 - 7:35】
+              <a:t>【7:10 - 7:45】
 要約：資金と黒字化の条件
 資金は自己資金で約2.55億円です。一度には入れず、実証に合格したら1年目に2億円、3年目に継続率と台数の基準を満たしたら5,000万円を追加します。黒字化の条件は、拠点数より1拠点あたりの台数です。15台に増やせれば、新規が計画の6割でも5年目に黒字になります。撤退ラインも決めていて、実証で1台1日15分も減らなければ撤退します。</a:t>
             </a:r>
@@ -1640,7 +1640,7 @@
           <a:p>
             <a:r>
               <a:rPr lang="en-US" dirty="0"/>
-              <a:t>【7:35 - 8:10】
+              <a:t>【7:45 - 8:20】
 要約：10年の見通し
 10年で見た場合です。5年目までの計画は変えずに延ばすと、10台のままでも6年目に黒字になり、8年目に5年間の赤字を回収します。10年目の営業利益は約1.9億円です。利用料が毎年積み上がる形なので、6年目以降は利益が伸びます。条件は、6年目から採用のペースを落とすことです。値下げやAI費用が2倍になった場合は、現金が一時的に足りなくなります。</a:t>
             </a:r>
@@ -1730,7 +1730,7 @@
           <a:p>
             <a:r>
               <a:rPr lang="en-US" dirty="0"/>
-              <a:t>【8:10 - 8:45】
+              <a:t>【8:20 - 8:55】
 要約：段階ごとの課題
 段階ごとの課題です。準備期は効果が出るか、導入期は売れるか、成長期は台数と採用、成熟期は大手との競合です。計画を見直して見つけた弱いところもあります。AIグラスは録画時間と電池に制約があること。300万円という価格を、まだお客様に確認できていないこと。10台のままでは5年で黒字にならないこと。そして、私自身がボトルネックになるリスクです。どれも確かめ方を決めています。</a:t>
             </a:r>
@@ -1820,9 +1820,9 @@
           <a:p>
             <a:r>
               <a:rPr lang="en-US" dirty="0"/>
-              <a:t>【8:45 - 9:25】
-要約：準備期と、最後に
-最初の6か月は約500万円で、試作品をつくり、1拠点で実証します。最後に、この事業への思いです。10年続けば、書類に使っていた約137万時間が、現場の仕事と若手の指導に戻る計算です。私にとって利益は、事業を続けるための条件です。配当は求めず、共感してくれる会社や職人の方と一緒に育てたいと考えています。ただし、撤退ラインは守ります。まずは6か月で1拠点を立ち上げます。以上で発表を終わります。ご清聴ありがとうございました。</a:t>
+              <a:t>【8:55 - 9:25】
+要約：準備期の6か月
+最後に、最初の6か月です。費用は約500万円で、試作品をつくり、1拠点で実証します。確かめるのは、1台1日23分減るかどうかです。減れば2億円を入れて採用を始め、15分も減らなければ撤退します。まずは6か月で1拠点を立ち上げます。以上で発表を終わります。ご清聴ありがとうございました。</a:t>
             </a:r>
             <a:endParaRPr lang="en-US" dirty="0"/>
           </a:p>
@@ -1910,9 +1910,9 @@
           <a:p>
             <a:r>
               <a:rPr lang="en-US" dirty="0"/>
-              <a:t>【0:30 - 1:15】
-要約：事業概要と、選んだ理由
-結論から言うと、職長がAIグラスを掛けて作業するだけで、写真台帳と日報ができ、図面と照合し、若手の教材にもなるサービスです。お客様は関東の中堅の電気工事会社で、1拠点10台で年300万円です。この事業を選んだ理由は3つあります。1つ目は、人手不足と残業規制で、人を増やしても解決できないこと。2つ目は、映像を理解するAIと軽いAIグラスが実用レベルになったこと。3つ目は、私自身が地中送電線の現場で、ベテランの判断が手順書に残らないまま退職で消えるのを見てきたことです。</a:t>
+              <a:t>【0:20 - 1:10】
+要約：事業と想い
+最初に、この事業をやる理由です。私は地中送電線の現場で、ベテランの判断が手順書に残らないまま、退職とともに消えていくのを見てきました。その判断をデータで残し、次の担い手に渡したい。これが出発点です。事業は、職長がAIグラスを掛けて作業するだけで、写真台帳と日報ができ、若手の教材にもなるサービスです。選んだ理由は3つです。人を増やしても解決できない人手不足。実用レベルになったAIとAIグラス。そして、現場とAIの実装の両方を経験してきた自分です。利益は目的ではなく、この事業を続けるための条件だと考えています。</a:t>
             </a:r>
             <a:endParaRPr lang="en-US" dirty="0"/>
           </a:p>
@@ -2000,9 +2000,9 @@
           <a:p>
             <a:r>
               <a:rPr lang="en-US" dirty="0"/>
-              <a:t>【1:15 - 1:55】
+              <a:t>【1:10 - 1:40】
 要約：背景と課題
-困っているのは三者です。推進するDX担当、使う施工管理者と電工、費用を出す工事部長です。数字で言うと、建設業で働く人の36.7%が55歳以上で、29歳以下は11.7%しかいません。2024年からは、残業も原則月45時間までになりました。熟練者が辞めると、若手が寸法や順番を間違えて、手戻りが増えます。手戻りは建設全体で年約1.5兆円、電気工事だけで約2,400億円と見積もっています。</a:t>
+背景です。建設業で働く人の36.7%が55歳以上で、29歳以下は11.7%しかいません。2024年からは、残業も原則月45時間までになりました。熟練者が辞めると、若手が寸法や順番を間違えて、手戻りが増えます。手戻りは建設全体で年約1.5兆円、電気工事だけで約2,400億円と見積もっています。</a:t>
             </a:r>
             <a:endParaRPr lang="en-US" dirty="0"/>
           </a:p>
@@ -2090,9 +2090,9 @@
           <a:p>
             <a:r>
               <a:rPr lang="en-US" dirty="0"/>
-              <a:t>【1:55 - 2:35】
-要約：解決策とデモ
-解決策はデモで説明します。若手の作業を記録して、半導電層が図面より8mm短いことを見つけます。遠隔のベテランが「テープ基準で測り直す」と指示し、その判断も記録します。写真は手順ごとに報告書へ入るので、作業者が報告書に使う時間はゼロです。他社がすぐに真似できない理由は3つです。記録は使うほど貯まること。映像のどこが大事かは、施工経験者にしか判断できないこと。電気工事の型を先に揃えることです。</a:t>
+              <a:t>【1:40 - 2:45】
+要約：解決策と図解
+解決策は、この図の3段階です。1つ目、職長がAIグラスを掛けて、いつも通り作業するだけで記録が残ります。車のドライブレコーダーに近いイメージです。2つ目、AIが大事な場面だけを選んで整理します。3つ目、それを3つの相手に渡します。若手にはその場で図面との違いを、管理者には写真台帳と日報を、次の担い手には教材を渡します。左下の例では、ケーブルの接続で図面より8mm短い所を見つけ、ベテランの「測り直せ」という判断ごと記録しています。電気工事を知らない方は、図面と違う所をその場で教えてくれる記録係、と考えてください。他社がすぐに真似できない理由は、記録が使うほど貯まることと、大事な場面を判断できるのは施工経験者だけであることです。</a:t>
             </a:r>
             <a:endParaRPr lang="en-US" dirty="0"/>
           </a:p>
@@ -2180,7 +2180,7 @@
           <a:p>
             <a:r>
               <a:rPr lang="en-US" dirty="0"/>
-              <a:t>【2:35 - 3:10】
+              <a:t>【2:45 - 3:20】
 要約：使い方と端末
 使い方は、1班に1台、職長がAIグラスを掛けるだけです。電工全員には配りません。1拠点で10台、撮るのは作業エリアだけです。録画はAIグラスに残し、作業の区切りや「ここ撮って」という声が入った場面だけをAIに送ります。端末は記録用が8台、図面を手元に表示する用が2台です。粉じんの多い現場では産業用も選べます。AIグラスはお客様名義のリースで、手続きは当社が代行します。</a:t>
             </a:r>
@@ -2270,7 +2270,7 @@
           <a:p>
             <a:r>
               <a:rPr lang="en-US" dirty="0"/>
-              <a:t>【3:10 - 3:50】
+              <a:t>【3:20 - 4:00】
 要約：競合と差別化
 競合は2種類です。1つ目は施工管理アプリで、人が撮って入力する前提です。2つ目は日立グループで、方向はほぼ同じです。ビル保守のAI Safetyと、日立パワーソリューションズの受変電設備の点検AIがあります。ただ、日立は自社の保守契約の中でAIを使う形です。技術と規模では勝てないので、対象を中堅の電気工事会社の施工に絞り、書類と技能継承を月額で提供します。日立が同じ領域に来た場合は、提携も選択肢に入れます。</a:t>
             </a:r>
@@ -2360,7 +2360,7 @@
           <a:p>
             <a:r>
               <a:rPr lang="en-US" dirty="0"/>
-              <a:t>【3:50 - 4:30】
+              <a:t>【4:00 - 4:40】
 要約：スタッフ
 5年目に23人の体制にします。中心は3つの役割です。映像AIをつくるエンジニア。電気工事の施工管理を10年以上経験し、映像のどこが大事かを判断する現場監修。そして、お客様ごとの書類の形を設定する導入コンサルタントです。この設定は外注しません。外注するとノウハウが社外に残るので、社内で設定して製品に戻します。私の役割は、最初の営業と現場監修の統括、そして判断基準をつくることです。</a:t>
             </a:r>
@@ -2450,9 +2450,9 @@
           <a:p>
             <a:r>
               <a:rPr lang="en-US" dirty="0"/>
-              <a:t>【4:30 - 5:00】
+              <a:t>【4:40 - 5:10】
 要約：経営理念
-経営理念は「現場の勘を、次の担い手へ」です。大切にすることは3つです。1つ目は、現場を主役にして、入力の手間を増やさないこと。2つ目は、記録は本人の同意を取り、誰の技術かを残すこと。3つ目は、効果を毎月数字で見せることです。特に現場の方には、これは監視ではなく、自分の技術を残す仕組みだと伝えたいと考えています。</a:t>
+経営理念は「現場の勘を次の担い手へ」です。大切にすることは3つです。1つ目は、現場を主役にして、入力の手間を増やさないこと。2つ目は、記録は本人の同意を取り、誰の技術かを残すこと。3つ目は、効果を毎月数字で見せることです。特に現場の方には、これは監視ではなく、自分の技術を残す仕組みだと伝えたいと考えています。</a:t>
             </a:r>
             <a:endParaRPr lang="en-US" dirty="0"/>
           </a:p>
@@ -2540,9 +2540,9 @@
           <a:p>
             <a:r>
               <a:rPr lang="en-US" dirty="0"/>
-              <a:t>【5:00 - 5:35】
+              <a:t>【5:10 - 5:45】
 要約：市場とターゲット
-市場規模は、電気工事と電気通信工事の中堅以上、約3,100社に、1拠点年300万円を掛けて約141億円です。最初は関東の中堅735社のうち、電力会社や官公庁の工事が多く、書類の量が多い約180社に絞ります。業界団体の勉強会や展示会で会い、3か月の有償試験導入から本契約に進めます。5年で約85拠点、解約を引いて81拠点の計画です。</a:t>
+市場規模は、電気工事と電気通信工事の中堅以上、約3,100社に年額を掛けて、約141億円と推定しています。社数は国の統計ですが、規模ごとの内訳は仮定を置いています。最初は関東の中堅のうち、電力会社や官公庁の工事が多く、書類の多い約180社に絞ります。業界団体の勉強会や展示会で会い、3か月の有償試験導入から本契約に進めます。5年で約85拠点、解約を引いて81拠点の計画です。</a:t>
             </a:r>
             <a:endParaRPr lang="en-US" dirty="0"/>
           </a:p>
@@ -2793,7 +2793,7 @@
                 <a:ea typeface="BIZ UDPGothic" pitchFamily="34" charset="-122"/>
                 <a:cs typeface="BIZ UDPGothic" pitchFamily="34" charset="-120"/>
               </a:rPr>
-              <a:t>現場の勘を、次の担い手へ。</a:t>
+              <a:t>現場の勘を次の担い手へ</a:t>
             </a:r>
             <a:endParaRPr lang="en-US" sz="800" dirty="0"/>
           </a:p>
@@ -3360,7 +3360,7 @@
                 <a:ea typeface="BIZ UDPGothic" pitchFamily="34" charset="-122"/>
                 <a:cs typeface="BIZ UDPGothic" pitchFamily="34" charset="-120"/>
               </a:rPr>
-              <a:t>現場の勘を、次の担い手へ。</a:t>
+              <a:t>現場の勘を次の担い手へ</a:t>
             </a:r>
             <a:endParaRPr lang="en-US" sz="2600" dirty="0"/>
           </a:p>
@@ -3982,7 +3982,7 @@
                           <a:ea typeface="BIZ UDPGothic" pitchFamily="34" charset="-122"/>
                           <a:cs typeface="BIZ UDPGothic" pitchFamily="34" charset="-120"/>
                         </a:rPr>
-                        <a:t>現場の勘を、次の担い手へ。記録は監視ではなく、技術を残すため</a:t>
+                        <a:t>現場の勘を次の担い手へ。記録は監視ではなく、技術を残すため</a:t>
                       </a:r>
                       <a:endParaRPr lang="en-US" sz="900" dirty="0">
                         <a:latin typeface="BIZ UDPGothic" charset="0"/>
@@ -5902,7 +5902,7 @@
                 <a:ea typeface="BIZ UDPGothic" pitchFamily="34" charset="-122"/>
                 <a:cs typeface="BIZ UDPGothic" pitchFamily="34" charset="-120"/>
               </a:rPr>
-              <a:t>元が取れる条件</a:t>
+              <a:t>お客様が元を取る条件</a:t>
             </a:r>
             <a:pPr algn="l" indent="0" marL="0">
               <a:lnSpc>
@@ -6211,7 +6211,7 @@
                           <a:ea typeface="BIZ UDPGothic" pitchFamily="34" charset="-122"/>
                           <a:cs typeface="BIZ UDPGothic" pitchFamily="34" charset="-120"/>
                         </a:rPr>
-                        <a:t>回収期間（初年度）</a:t>
+                        <a:t>初年度の支払いは効果の</a:t>
                       </a:r>
                       <a:endParaRPr lang="en-US" sz="950" dirty="0">
                         <a:latin typeface="BIZ UDPGothic" charset="0"/>
@@ -6261,7 +6261,7 @@
                           <a:ea typeface="BIZ UDPGothic" pitchFamily="34" charset="-122"/>
                           <a:cs typeface="BIZ UDPGothic" pitchFamily="34" charset="-120"/>
                         </a:rPr>
-                        <a:t>約13か月</a:t>
+                        <a:t>約13か月分</a:t>
                       </a:r>
                       <a:endParaRPr lang="en-US" sz="950" dirty="0">
                         <a:latin typeface="BIZ UDPGothic" charset="0"/>
@@ -20609,7 +20609,7 @@
                 <a:ea typeface="BIZ UDPGothic" pitchFamily="34" charset="-122"/>
                 <a:cs typeface="BIZ UDPGothic" pitchFamily="34" charset="-120"/>
               </a:rPr>
-              <a:t>準備期の6か月と、最後に</a:t>
+              <a:t>準備期の6か月：最初に確かめるのは効果が出るか</a:t>
             </a:r>
             <a:endParaRPr lang="en-US" sz="1850" dirty="0"/>
           </a:p>
@@ -20651,7 +20651,7 @@
                 <a:ea typeface="BIZ UDPGothic" pitchFamily="34" charset="-122"/>
                 <a:cs typeface="BIZ UDPGothic" pitchFamily="34" charset="-120"/>
               </a:rPr>
-              <a:t>最初に確かめるのは「効果が出るか」。利益は目的ではなく、事業を続けるための条件</a:t>
+              <a:t>費用は約500万円（自己資金）。合格ラインを越えたら次へ進み、越えなければ撤退する</a:t>
             </a:r>
             <a:endParaRPr lang="en-US" sz="1050" dirty="0"/>
           </a:p>
@@ -20710,7 +20710,7 @@
             <a:r>
               <a:rPr lang="en-US" sz="1100" b="1" dirty="0">
                 <a:solidFill>
-                  <a:srgbClr val="1F2933"/>
+                  <a:srgbClr val="1B365D"/>
                 </a:solidFill>
                 <a:latin typeface="BIZ UDPGothic" pitchFamily="34" charset="0"/>
                 <a:ea typeface="BIZ UDPGothic" pitchFamily="34" charset="-122"/>
@@ -21556,112 +21556,13 @@
       </p:sp>
       <p:sp>
         <p:nvSpPr>
-          <p:cNvPr id="34" name="Shape 31"/>
-          <p:cNvSpPr/>
-          <p:nvPr/>
-        </p:nvSpPr>
-        <p:spPr>
-          <a:xfrm>
-            <a:off x="4526280" y="1024128"/>
-            <a:ext cx="4251960" cy="914400"/>
-          </a:xfrm>
-          <a:prstGeom prst="rect">
-            <a:avLst/>
-          </a:prstGeom>
-          <a:solidFill>
-            <a:srgbClr val="EAF0F6"/>
-          </a:solidFill>
-          <a:ln/>
-        </p:spPr>
-      </p:sp>
-      <p:sp>
-        <p:nvSpPr>
-          <p:cNvPr id="35" name="Text 32"/>
+          <p:cNvPr id="34" name="Text 31"/>
           <p:cNvSpPr txBox="1"/>
           <p:nvPr/>
         </p:nvSpPr>
         <p:spPr>
           <a:xfrm>
-            <a:off x="4654296" y="1024128"/>
-            <a:ext cx="3995928" cy="914400"/>
-          </a:xfrm>
-          <a:prstGeom prst="rect">
-            <a:avLst/>
-          </a:prstGeom>
-          <a:noFill/>
-          <a:ln/>
-        </p:spPr>
-        <p:txBody>
-          <a:bodyPr wrap="square" lIns="0" tIns="0" rIns="0" bIns="0" rtlCol="0" anchor="ctr"/>
-          <a:lstStyle/>
-          <a:p>
-            <a:pPr algn="l" indent="0" marL="0">
-              <a:lnSpc>
-                <a:spcPct val="115000"/>
-              </a:lnSpc>
-              <a:buNone/>
-            </a:pPr>
-            <a:r>
-              <a:rPr lang="en-US" sz="950" dirty="0">
-                <a:solidFill>
-                  <a:srgbClr val="1F2933"/>
-                </a:solidFill>
-                <a:latin typeface="BIZ UDPGothic" pitchFamily="34" charset="0"/>
-                <a:ea typeface="BIZ UDPGothic" pitchFamily="34" charset="-122"/>
-                <a:cs typeface="BIZ UDPGothic" pitchFamily="34" charset="-120"/>
-              </a:rPr>
-              <a:t>10年で現場に戻る時間</a:t>
-            </a:r>
-            <a:endParaRPr lang="en-US" sz="1100" dirty="0"/>
-          </a:p>
-          <a:p>
-            <a:pPr algn="l" indent="0" marL="0">
-              <a:lnSpc>
-                <a:spcPct val="115000"/>
-              </a:lnSpc>
-              <a:buNone/>
-            </a:pPr>
-            <a:r>
-              <a:rPr lang="en-US" sz="2000" b="1" dirty="0">
-                <a:solidFill>
-                  <a:srgbClr val="2F6DB5"/>
-                </a:solidFill>
-                <a:latin typeface="BIZ UDPGothic" pitchFamily="34" charset="0"/>
-                <a:ea typeface="BIZ UDPGothic" pitchFamily="34" charset="-122"/>
-                <a:cs typeface="BIZ UDPGothic" pitchFamily="34" charset="-120"/>
-              </a:rPr>
-              <a:t>約137万時間</a:t>
-            </a:r>
-            <a:pPr algn="l" indent="0" marL="0">
-              <a:lnSpc>
-                <a:spcPct val="115000"/>
-              </a:lnSpc>
-              <a:buNone/>
-            </a:pPr>
-            <a:r>
-              <a:rPr lang="en-US" sz="900" dirty="0">
-                <a:solidFill>
-                  <a:srgbClr val="1F2933"/>
-                </a:solidFill>
-                <a:latin typeface="BIZ UDPGothic" pitchFamily="34" charset="0"/>
-                <a:ea typeface="BIZ UDPGothic" pitchFamily="34" charset="-122"/>
-                <a:cs typeface="BIZ UDPGothic" pitchFamily="34" charset="-120"/>
-              </a:rPr>
-              <a:t>　約49億円分の書類の時間</a:t>
-            </a:r>
-            <a:endParaRPr lang="en-US" sz="1100" dirty="0"/>
-          </a:p>
-        </p:txBody>
-      </p:sp>
-      <p:sp>
-        <p:nvSpPr>
-          <p:cNvPr id="36" name="Text 33"/>
-          <p:cNvSpPr txBox="1"/>
-          <p:nvPr/>
-        </p:nvSpPr>
-        <p:spPr>
-          <a:xfrm>
-            <a:off x="4526280" y="2011680"/>
+            <a:off x="4526280" y="1024128"/>
             <a:ext cx="4251960" cy="237744"/>
           </a:xfrm>
           <a:prstGeom prst="rect">
@@ -21683,27 +21584,507 @@
             <a:r>
               <a:rPr lang="en-US" sz="1100" b="1" dirty="0">
                 <a:solidFill>
-                  <a:srgbClr val="1F2933"/>
+                  <a:srgbClr val="1B365D"/>
                 </a:solidFill>
                 <a:latin typeface="BIZ UDPGothic" pitchFamily="34" charset="0"/>
                 <a:ea typeface="BIZ UDPGothic" pitchFamily="34" charset="-122"/>
                 <a:cs typeface="BIZ UDPGothic" pitchFamily="34" charset="-120"/>
               </a:rPr>
-              <a:t>事業への向き合い方（社会起業家として）</a:t>
+              <a:t>進むか止まるかの線（実証）</a:t>
             </a:r>
             <a:endParaRPr lang="en-US" sz="1100" dirty="0"/>
           </a:p>
         </p:txBody>
       </p:sp>
-      <p:sp>
-        <p:nvSpPr>
-          <p:cNvPr id="37" name="Shape 34"/>
+      <p:graphicFrame>
+        <p:nvGraphicFramePr>
+          <p:cNvPr id="17" name="gate16"/>
+          <p:cNvGraphicFramePr>
+            <a:graphicFrameLocks noGrp="1"/>
+          </p:cNvGraphicFramePr>
+          <p:nvPr>
+            <p:extLst>
+              <p:ext uri="{D42A27DB-BD31-4B8C-83A1-F6EECF244321}">
+                <p14:modId xmlns:p14="http://schemas.microsoft.com/office/powerpoint/2010/main" val="1579011935"/>
+              </p:ext>
+            </p:extLst>
+          </p:nvPr>
+        </p:nvGraphicFramePr>
+        <p:xfrm>
+          <a:off x="4526280" y="1298448"/>
+          <a:ext cx="4251960" cy="914400"/>
+        </p:xfrm>
+        <a:graphic>
+          <a:graphicData uri="http://schemas.openxmlformats.org/drawingml/2006/table">
+            <a:tbl>
+              <a:tblPr/>
+              <a:tblGrid>
+                <a:gridCol w="1234440"/>
+                <a:gridCol w="3017520"/>
+              </a:tblGrid>
+              <a:tr h="310896">
+                <a:tc>
+                  <a:txBody>
+                    <a:bodyPr/>
+                    <a:lstStyle/>
+                    <a:p>
+                      <a:pPr algn="l" indent="0" marL="0">
+                        <a:buNone/>
+                      </a:pPr>
+                      <a:r>
+                        <a:rPr lang="en-US" sz="950" b="1" dirty="0">
+                          <a:solidFill>
+                            <a:srgbClr val="FFFFFF"/>
+                          </a:solidFill>
+                          <a:latin typeface="BIZ UDPGothic" pitchFamily="34" charset="0"/>
+                          <a:ea typeface="BIZ UDPGothic" pitchFamily="34" charset="-122"/>
+                          <a:cs typeface="BIZ UDPGothic" pitchFamily="34" charset="-120"/>
+                        </a:rPr>
+                        <a:t>1台1日の削減</a:t>
+                      </a:r>
+                      <a:endParaRPr lang="en-US" sz="950" dirty="0">
+                        <a:latin typeface="BIZ UDPGothic" charset="0"/>
+                        <a:ea typeface="BIZ UDPGothic" charset="0"/>
+                        <a:cs typeface="BIZ UDPGothic" charset="0"/>
+                      </a:endParaRPr>
+                    </a:p>
+                  </a:txBody>
+                  <a:tcPr marL="54864" marR="54864" marT="18288" marB="18288" anchor="ctr">
+                    <a:lnL w="0" cap="flat" cmpd="sng" algn="ctr">
+                      <a:noFill/>
+                    </a:lnL>
+                    <a:lnR w="0" cap="flat" cmpd="sng" algn="ctr">
+                      <a:noFill/>
+                    </a:lnR>
+                    <a:lnT w="0" cap="flat" cmpd="sng" algn="ctr">
+                      <a:noFill/>
+                    </a:lnT>
+                    <a:lnB w="9525" cap="flat" cmpd="sng" algn="ctr">
+                      <a:solidFill>
+                        <a:srgbClr val="1B365D"/>
+                      </a:solidFill>
+                      <a:prstDash val="solid"/>
+                      <a:round/>
+                      <a:headEnd type="none" w="med" len="med"/>
+                      <a:tailEnd type="none" w="med" len="med"/>
+                    </a:lnB>
+                    <a:solidFill>
+                      <a:srgbClr val="1B365D"/>
+                    </a:solidFill>
+                  </a:tcPr>
+                </a:tc>
+                <a:tc>
+                  <a:txBody>
+                    <a:bodyPr/>
+                    <a:lstStyle/>
+                    <a:p>
+                      <a:pPr algn="l" indent="0" marL="0">
+                        <a:buNone/>
+                      </a:pPr>
+                      <a:r>
+                        <a:rPr lang="en-US" sz="950" b="1" dirty="0">
+                          <a:solidFill>
+                            <a:srgbClr val="FFFFFF"/>
+                          </a:solidFill>
+                          <a:latin typeface="BIZ UDPGothic" pitchFamily="34" charset="0"/>
+                          <a:ea typeface="BIZ UDPGothic" pitchFamily="34" charset="-122"/>
+                          <a:cs typeface="BIZ UDPGothic" pitchFamily="34" charset="-120"/>
+                        </a:rPr>
+                        <a:t>判断</a:t>
+                      </a:r>
+                      <a:endParaRPr lang="en-US" sz="950" dirty="0">
+                        <a:latin typeface="BIZ UDPGothic" charset="0"/>
+                        <a:ea typeface="BIZ UDPGothic" charset="0"/>
+                        <a:cs typeface="BIZ UDPGothic" charset="0"/>
+                      </a:endParaRPr>
+                    </a:p>
+                  </a:txBody>
+                  <a:tcPr marL="54864" marR="54864" marT="18288" marB="18288" anchor="ctr">
+                    <a:lnL w="0" cap="flat" cmpd="sng" algn="ctr">
+                      <a:noFill/>
+                    </a:lnL>
+                    <a:lnR w="0" cap="flat" cmpd="sng" algn="ctr">
+                      <a:noFill/>
+                    </a:lnR>
+                    <a:lnT w="0" cap="flat" cmpd="sng" algn="ctr">
+                      <a:noFill/>
+                    </a:lnT>
+                    <a:lnB w="9525" cap="flat" cmpd="sng" algn="ctr">
+                      <a:solidFill>
+                        <a:srgbClr val="1B365D"/>
+                      </a:solidFill>
+                      <a:prstDash val="solid"/>
+                      <a:round/>
+                      <a:headEnd type="none" w="med" len="med"/>
+                      <a:tailEnd type="none" w="med" len="med"/>
+                    </a:lnB>
+                    <a:solidFill>
+                      <a:srgbClr val="1B365D"/>
+                    </a:solidFill>
+                  </a:tcPr>
+                </a:tc>
+              </a:tr>
+              <a:tr h="310896">
+                <a:tc>
+                  <a:txBody>
+                    <a:bodyPr/>
+                    <a:lstStyle/>
+                    <a:p>
+                      <a:pPr algn="l" indent="0" marL="0">
+                        <a:buNone/>
+                      </a:pPr>
+                      <a:r>
+                        <a:rPr lang="en-US" sz="950" b="1" dirty="0">
+                          <a:solidFill>
+                            <a:srgbClr val="2E7D32"/>
+                          </a:solidFill>
+                          <a:latin typeface="BIZ UDPGothic" pitchFamily="34" charset="0"/>
+                          <a:ea typeface="BIZ UDPGothic" pitchFamily="34" charset="-122"/>
+                          <a:cs typeface="BIZ UDPGothic" pitchFamily="34" charset="-120"/>
+                        </a:rPr>
+                        <a:t>23分以上</a:t>
+                      </a:r>
+                      <a:endParaRPr lang="en-US" sz="950" dirty="0">
+                        <a:latin typeface="BIZ UDPGothic" charset="0"/>
+                        <a:ea typeface="BIZ UDPGothic" charset="0"/>
+                        <a:cs typeface="BIZ UDPGothic" charset="0"/>
+                      </a:endParaRPr>
+                    </a:p>
+                  </a:txBody>
+                  <a:tcPr marL="54864" marR="54864" marT="18288" marB="18288" anchor="ctr">
+                    <a:lnL w="0" cap="flat" cmpd="sng" algn="ctr">
+                      <a:noFill/>
+                    </a:lnL>
+                    <a:lnR w="0" cap="flat" cmpd="sng" algn="ctr">
+                      <a:noFill/>
+                    </a:lnR>
+                    <a:lnT w="0" cap="flat" cmpd="sng" algn="ctr">
+                      <a:noFill/>
+                    </a:lnT>
+                    <a:lnB w="9525" cap="flat" cmpd="sng" algn="ctr">
+                      <a:solidFill>
+                        <a:srgbClr val="B8C4D0"/>
+                      </a:solidFill>
+                      <a:prstDash val="solid"/>
+                      <a:round/>
+                      <a:headEnd type="none" w="med" len="med"/>
+                      <a:tailEnd type="none" w="med" len="med"/>
+                    </a:lnB>
+                    <a:solidFill>
+                      <a:srgbClr val="FFFFFF"/>
+                    </a:solidFill>
+                  </a:tcPr>
+                </a:tc>
+                <a:tc>
+                  <a:txBody>
+                    <a:bodyPr/>
+                    <a:lstStyle/>
+                    <a:p>
+                      <a:pPr algn="l" indent="0" marL="0">
+                        <a:buNone/>
+                      </a:pPr>
+                      <a:r>
+                        <a:rPr lang="en-US" sz="950" b="1" dirty="0">
+                          <a:solidFill>
+                            <a:srgbClr val="2E7D32"/>
+                          </a:solidFill>
+                          <a:latin typeface="BIZ UDPGothic" pitchFamily="34" charset="0"/>
+                          <a:ea typeface="BIZ UDPGothic" pitchFamily="34" charset="-122"/>
+                          <a:cs typeface="BIZ UDPGothic" pitchFamily="34" charset="-120"/>
+                        </a:rPr>
+                        <a:t>進む：2億円を入れて採用を始める</a:t>
+                      </a:r>
+                      <a:endParaRPr lang="en-US" sz="950" dirty="0">
+                        <a:latin typeface="BIZ UDPGothic" charset="0"/>
+                        <a:ea typeface="BIZ UDPGothic" charset="0"/>
+                        <a:cs typeface="BIZ UDPGothic" charset="0"/>
+                      </a:endParaRPr>
+                    </a:p>
+                  </a:txBody>
+                  <a:tcPr marL="54864" marR="54864" marT="18288" marB="18288" anchor="ctr">
+                    <a:lnL w="0" cap="flat" cmpd="sng" algn="ctr">
+                      <a:noFill/>
+                    </a:lnL>
+                    <a:lnR w="0" cap="flat" cmpd="sng" algn="ctr">
+                      <a:noFill/>
+                    </a:lnR>
+                    <a:lnT w="0" cap="flat" cmpd="sng" algn="ctr">
+                      <a:noFill/>
+                    </a:lnT>
+                    <a:lnB w="9525" cap="flat" cmpd="sng" algn="ctr">
+                      <a:solidFill>
+                        <a:srgbClr val="B8C4D0"/>
+                      </a:solidFill>
+                      <a:prstDash val="solid"/>
+                      <a:round/>
+                      <a:headEnd type="none" w="med" len="med"/>
+                      <a:tailEnd type="none" w="med" len="med"/>
+                    </a:lnB>
+                    <a:solidFill>
+                      <a:srgbClr val="FFFFFF"/>
+                    </a:solidFill>
+                  </a:tcPr>
+                </a:tc>
+              </a:tr>
+              <a:tr h="310896">
+                <a:tc>
+                  <a:txBody>
+                    <a:bodyPr/>
+                    <a:lstStyle/>
+                    <a:p>
+                      <a:pPr algn="l" indent="0" marL="0">
+                        <a:buNone/>
+                      </a:pPr>
+                      <a:r>
+                        <a:rPr lang="en-US" sz="950" dirty="0">
+                          <a:solidFill>
+                            <a:srgbClr val="1F2933"/>
+                          </a:solidFill>
+                          <a:latin typeface="BIZ UDPGothic" pitchFamily="34" charset="0"/>
+                          <a:ea typeface="BIZ UDPGothic" pitchFamily="34" charset="-122"/>
+                          <a:cs typeface="BIZ UDPGothic" pitchFamily="34" charset="-120"/>
+                        </a:rPr>
+                        <a:t>15〜23分</a:t>
+                      </a:r>
+                      <a:endParaRPr lang="en-US" sz="950" dirty="0">
+                        <a:latin typeface="BIZ UDPGothic" charset="0"/>
+                        <a:ea typeface="BIZ UDPGothic" charset="0"/>
+                        <a:cs typeface="BIZ UDPGothic" charset="0"/>
+                      </a:endParaRPr>
+                    </a:p>
+                  </a:txBody>
+                  <a:tcPr marL="54864" marR="54864" marT="18288" marB="18288" anchor="ctr">
+                    <a:lnL w="0" cap="flat" cmpd="sng" algn="ctr">
+                      <a:noFill/>
+                    </a:lnL>
+                    <a:lnR w="0" cap="flat" cmpd="sng" algn="ctr">
+                      <a:noFill/>
+                    </a:lnR>
+                    <a:lnT w="0" cap="flat" cmpd="sng" algn="ctr">
+                      <a:noFill/>
+                    </a:lnT>
+                    <a:lnB w="9525" cap="flat" cmpd="sng" algn="ctr">
+                      <a:solidFill>
+                        <a:srgbClr val="B8C4D0"/>
+                      </a:solidFill>
+                      <a:prstDash val="solid"/>
+                      <a:round/>
+                      <a:headEnd type="none" w="med" len="med"/>
+                      <a:tailEnd type="none" w="med" len="med"/>
+                    </a:lnB>
+                    <a:solidFill>
+                      <a:srgbClr val="FFF4C2"/>
+                    </a:solidFill>
+                  </a:tcPr>
+                </a:tc>
+                <a:tc>
+                  <a:txBody>
+                    <a:bodyPr/>
+                    <a:lstStyle/>
+                    <a:p>
+                      <a:pPr algn="l" indent="0" marL="0">
+                        <a:buNone/>
+                      </a:pPr>
+                      <a:r>
+                        <a:rPr lang="en-US" sz="950" dirty="0">
+                          <a:solidFill>
+                            <a:srgbClr val="1F2933"/>
+                          </a:solidFill>
+                          <a:latin typeface="BIZ UDPGothic" pitchFamily="34" charset="0"/>
+                          <a:ea typeface="BIZ UDPGothic" pitchFamily="34" charset="-122"/>
+                          <a:cs typeface="BIZ UDPGothic" pitchFamily="34" charset="-120"/>
+                        </a:rPr>
+                        <a:t>直す：機能を写真台帳に絞って測り直す</a:t>
+                      </a:r>
+                      <a:endParaRPr lang="en-US" sz="950" dirty="0">
+                        <a:latin typeface="BIZ UDPGothic" charset="0"/>
+                        <a:ea typeface="BIZ UDPGothic" charset="0"/>
+                        <a:cs typeface="BIZ UDPGothic" charset="0"/>
+                      </a:endParaRPr>
+                    </a:p>
+                  </a:txBody>
+                  <a:tcPr marL="54864" marR="54864" marT="18288" marB="18288" anchor="ctr">
+                    <a:lnL w="0" cap="flat" cmpd="sng" algn="ctr">
+                      <a:noFill/>
+                    </a:lnL>
+                    <a:lnR w="0" cap="flat" cmpd="sng" algn="ctr">
+                      <a:noFill/>
+                    </a:lnR>
+                    <a:lnT w="0" cap="flat" cmpd="sng" algn="ctr">
+                      <a:noFill/>
+                    </a:lnT>
+                    <a:lnB w="9525" cap="flat" cmpd="sng" algn="ctr">
+                      <a:solidFill>
+                        <a:srgbClr val="B8C4D0"/>
+                      </a:solidFill>
+                      <a:prstDash val="solid"/>
+                      <a:round/>
+                      <a:headEnd type="none" w="med" len="med"/>
+                      <a:tailEnd type="none" w="med" len="med"/>
+                    </a:lnB>
+                    <a:solidFill>
+                      <a:srgbClr val="FFF4C2"/>
+                    </a:solidFill>
+                  </a:tcPr>
+                </a:tc>
+              </a:tr>
+              <a:tr h="310896">
+                <a:tc>
+                  <a:txBody>
+                    <a:bodyPr/>
+                    <a:lstStyle/>
+                    <a:p>
+                      <a:pPr algn="l" indent="0" marL="0">
+                        <a:buNone/>
+                      </a:pPr>
+                      <a:r>
+                        <a:rPr lang="en-US" sz="950" b="1" dirty="0">
+                          <a:solidFill>
+                            <a:srgbClr val="C62828"/>
+                          </a:solidFill>
+                          <a:latin typeface="BIZ UDPGothic" pitchFamily="34" charset="0"/>
+                          <a:ea typeface="BIZ UDPGothic" pitchFamily="34" charset="-122"/>
+                          <a:cs typeface="BIZ UDPGothic" pitchFamily="34" charset="-120"/>
+                        </a:rPr>
+                        <a:t>15分未満</a:t>
+                      </a:r>
+                      <a:endParaRPr lang="en-US" sz="950" dirty="0">
+                        <a:latin typeface="BIZ UDPGothic" charset="0"/>
+                        <a:ea typeface="BIZ UDPGothic" charset="0"/>
+                        <a:cs typeface="BIZ UDPGothic" charset="0"/>
+                      </a:endParaRPr>
+                    </a:p>
+                  </a:txBody>
+                  <a:tcPr marL="54864" marR="54864" marT="18288" marB="18288" anchor="ctr">
+                    <a:lnL w="0" cap="flat" cmpd="sng" algn="ctr">
+                      <a:noFill/>
+                    </a:lnL>
+                    <a:lnR w="0" cap="flat" cmpd="sng" algn="ctr">
+                      <a:noFill/>
+                    </a:lnR>
+                    <a:lnT w="0" cap="flat" cmpd="sng" algn="ctr">
+                      <a:noFill/>
+                    </a:lnT>
+                    <a:lnB w="9525" cap="flat" cmpd="sng" algn="ctr">
+                      <a:solidFill>
+                        <a:srgbClr val="B8C4D0"/>
+                      </a:solidFill>
+                      <a:prstDash val="solid"/>
+                      <a:round/>
+                      <a:headEnd type="none" w="med" len="med"/>
+                      <a:tailEnd type="none" w="med" len="med"/>
+                    </a:lnB>
+                    <a:solidFill>
+                      <a:srgbClr val="FFFFFF"/>
+                    </a:solidFill>
+                  </a:tcPr>
+                </a:tc>
+                <a:tc>
+                  <a:txBody>
+                    <a:bodyPr/>
+                    <a:lstStyle/>
+                    <a:p>
+                      <a:pPr algn="l" indent="0" marL="0">
+                        <a:buNone/>
+                      </a:pPr>
+                      <a:r>
+                        <a:rPr lang="en-US" sz="950" b="1" dirty="0">
+                          <a:solidFill>
+                            <a:srgbClr val="C62828"/>
+                          </a:solidFill>
+                          <a:latin typeface="BIZ UDPGothic" pitchFamily="34" charset="0"/>
+                          <a:ea typeface="BIZ UDPGothic" pitchFamily="34" charset="-122"/>
+                          <a:cs typeface="BIZ UDPGothic" pitchFamily="34" charset="-120"/>
+                        </a:rPr>
+                        <a:t>止まる：撤退する</a:t>
+                      </a:r>
+                      <a:endParaRPr lang="en-US" sz="950" dirty="0">
+                        <a:latin typeface="BIZ UDPGothic" charset="0"/>
+                        <a:ea typeface="BIZ UDPGothic" charset="0"/>
+                        <a:cs typeface="BIZ UDPGothic" charset="0"/>
+                      </a:endParaRPr>
+                    </a:p>
+                  </a:txBody>
+                  <a:tcPr marL="54864" marR="54864" marT="18288" marB="18288" anchor="ctr">
+                    <a:lnL w="0" cap="flat" cmpd="sng" algn="ctr">
+                      <a:noFill/>
+                    </a:lnL>
+                    <a:lnR w="0" cap="flat" cmpd="sng" algn="ctr">
+                      <a:noFill/>
+                    </a:lnR>
+                    <a:lnT w="0" cap="flat" cmpd="sng" algn="ctr">
+                      <a:noFill/>
+                    </a:lnT>
+                    <a:lnB w="9525" cap="flat" cmpd="sng" algn="ctr">
+                      <a:solidFill>
+                        <a:srgbClr val="B8C4D0"/>
+                      </a:solidFill>
+                      <a:prstDash val="solid"/>
+                      <a:round/>
+                      <a:headEnd type="none" w="med" len="med"/>
+                      <a:tailEnd type="none" w="med" len="med"/>
+                    </a:lnB>
+                    <a:solidFill>
+                      <a:srgbClr val="FFFFFF"/>
+                    </a:solidFill>
+                  </a:tcPr>
+                </a:tc>
+              </a:tr>
+            </a:tbl>
+          </a:graphicData>
+        </a:graphic>
+      </p:graphicFrame>
+      <p:sp>
+        <p:nvSpPr>
+          <p:cNvPr id="36" name="Text 32"/>
+          <p:cNvSpPr txBox="1"/>
+          <p:nvPr/>
+        </p:nvSpPr>
+        <p:spPr>
+          <a:xfrm>
+            <a:off x="4526280" y="2670048"/>
+            <a:ext cx="4251960" cy="237744"/>
+          </a:xfrm>
+          <a:prstGeom prst="rect">
+            <a:avLst/>
+          </a:prstGeom>
+          <a:noFill/>
+          <a:ln/>
+        </p:spPr>
+        <p:txBody>
+          <a:bodyPr wrap="square" lIns="0" tIns="0" rIns="0" bIns="0" rtlCol="0" anchor="t"/>
+          <a:lstStyle/>
+          <a:p>
+            <a:pPr algn="l" indent="0" marL="0">
+              <a:lnSpc>
+                <a:spcPct val="115000"/>
+              </a:lnSpc>
+              <a:buNone/>
+            </a:pPr>
+            <a:r>
+              <a:rPr lang="en-US" sz="1100" b="1" dirty="0">
+                <a:solidFill>
+                  <a:srgbClr val="1B365D"/>
+                </a:solidFill>
+                <a:latin typeface="BIZ UDPGothic" pitchFamily="34" charset="0"/>
+                <a:ea typeface="BIZ UDPGothic" pitchFamily="34" charset="-122"/>
+                <a:cs typeface="BIZ UDPGothic" pitchFamily="34" charset="-120"/>
+              </a:rPr>
+              <a:t>事業への向き合い方</a:t>
+            </a:r>
+            <a:endParaRPr lang="en-US" sz="1100" dirty="0"/>
+          </a:p>
+        </p:txBody>
+      </p:sp>
+      <p:sp>
+        <p:nvSpPr>
+          <p:cNvPr id="37" name="Shape 33"/>
           <p:cNvSpPr/>
           <p:nvPr/>
         </p:nvSpPr>
         <p:spPr>
           <a:xfrm>
-            <a:off x="4526280" y="2331720"/>
+            <a:off x="4526280" y="2999232"/>
             <a:ext cx="274320" cy="274320"/>
           </a:xfrm>
           <a:prstGeom prst="rect">
@@ -21717,13 +22098,13 @@
       </p:sp>
       <p:sp>
         <p:nvSpPr>
-          <p:cNvPr id="38" name="Text 35"/>
+          <p:cNvPr id="38" name="Text 34"/>
           <p:cNvSpPr txBox="1"/>
           <p:nvPr/>
         </p:nvSpPr>
         <p:spPr>
           <a:xfrm>
-            <a:off x="4526280" y="2331720"/>
+            <a:off x="4526280" y="2999232"/>
             <a:ext cx="274320" cy="274320"/>
           </a:xfrm>
           <a:prstGeom prst="rect">
@@ -21759,256 +22140,14 @@
       </p:sp>
       <p:sp>
         <p:nvSpPr>
-          <p:cNvPr id="39" name="Text 36"/>
+          <p:cNvPr id="39" name="Text 35"/>
           <p:cNvSpPr txBox="1"/>
           <p:nvPr/>
         </p:nvSpPr>
         <p:spPr>
           <a:xfrm>
-            <a:off x="4873752" y="2286000"/>
-            <a:ext cx="3904488" cy="365760"/>
-          </a:xfrm>
-          <a:prstGeom prst="rect">
-            <a:avLst/>
-          </a:prstGeom>
-          <a:noFill/>
-          <a:ln/>
-        </p:spPr>
-        <p:txBody>
-          <a:bodyPr wrap="square" lIns="0" tIns="0" rIns="0" bIns="0" rtlCol="0" anchor="ctr"/>
-          <a:lstStyle/>
-          <a:p>
-            <a:pPr algn="l" indent="0" marL="0">
-              <a:lnSpc>
-                <a:spcPct val="115000"/>
-              </a:lnSpc>
-              <a:buNone/>
-            </a:pPr>
-            <a:r>
-              <a:rPr lang="en-US" sz="950" b="1" dirty="0">
-                <a:solidFill>
-                  <a:srgbClr val="1F2933"/>
-                </a:solidFill>
-                <a:latin typeface="BIZ UDPGothic" pitchFamily="34" charset="0"/>
-                <a:ea typeface="BIZ UDPGothic" pitchFamily="34" charset="-122"/>
-                <a:cs typeface="BIZ UDPGothic" pitchFamily="34" charset="-120"/>
-              </a:rPr>
-              <a:t>利益は、事業を続けるための条件</a:t>
-            </a:r>
-            <a:pPr algn="l" indent="0" marL="0">
-              <a:lnSpc>
-                <a:spcPct val="115000"/>
-              </a:lnSpc>
-              <a:buNone/>
-            </a:pPr>
-            <a:r>
-              <a:rPr lang="en-US" sz="850" dirty="0">
-                <a:solidFill>
-                  <a:srgbClr val="4A5563"/>
-                </a:solidFill>
-                <a:latin typeface="BIZ UDPGothic" pitchFamily="34" charset="0"/>
-                <a:ea typeface="BIZ UDPGothic" pitchFamily="34" charset="-122"/>
-                <a:cs typeface="BIZ UDPGothic" pitchFamily="34" charset="-120"/>
-              </a:rPr>
-              <a:t>　配当は求めず、現場支援と開発に回す</a:t>
-            </a:r>
-            <a:endParaRPr lang="en-US" sz="950" dirty="0"/>
-          </a:p>
-        </p:txBody>
-      </p:sp>
-      <p:sp>
-        <p:nvSpPr>
-          <p:cNvPr id="40" name="Shape 37"/>
-          <p:cNvSpPr/>
-          <p:nvPr/>
-        </p:nvSpPr>
-        <p:spPr>
-          <a:xfrm>
-            <a:off x="4526280" y="2697480"/>
-            <a:ext cx="274320" cy="274320"/>
-          </a:xfrm>
-          <a:prstGeom prst="rect">
-            <a:avLst/>
-          </a:prstGeom>
-          <a:solidFill>
-            <a:srgbClr val="2F6DB5"/>
-          </a:solidFill>
-          <a:ln/>
-        </p:spPr>
-      </p:sp>
-      <p:sp>
-        <p:nvSpPr>
-          <p:cNvPr id="41" name="Text 38"/>
-          <p:cNvSpPr txBox="1"/>
-          <p:nvPr/>
-        </p:nvSpPr>
-        <p:spPr>
-          <a:xfrm>
-            <a:off x="4526280" y="2697480"/>
-            <a:ext cx="274320" cy="274320"/>
-          </a:xfrm>
-          <a:prstGeom prst="rect">
-            <a:avLst/>
-          </a:prstGeom>
-          <a:noFill/>
-          <a:ln/>
-        </p:spPr>
-        <p:txBody>
-          <a:bodyPr wrap="square" lIns="0" tIns="0" rIns="0" bIns="0" rtlCol="0" anchor="ctr"/>
-          <a:lstStyle/>
-          <a:p>
-            <a:pPr algn="ctr" indent="0" marL="0">
-              <a:lnSpc>
-                <a:spcPct val="115000"/>
-              </a:lnSpc>
-              <a:buNone/>
-            </a:pPr>
-            <a:r>
-              <a:rPr lang="en-US" sz="1000" b="1" dirty="0">
-                <a:solidFill>
-                  <a:srgbClr val="FFFFFF"/>
-                </a:solidFill>
-                <a:latin typeface="BIZ UDPGothic" pitchFamily="34" charset="0"/>
-                <a:ea typeface="BIZ UDPGothic" pitchFamily="34" charset="-122"/>
-                <a:cs typeface="BIZ UDPGothic" pitchFamily="34" charset="-120"/>
-              </a:rPr>
-              <a:t>2</a:t>
-            </a:r>
-            <a:endParaRPr lang="en-US" sz="1000" dirty="0"/>
-          </a:p>
-        </p:txBody>
-      </p:sp>
-      <p:sp>
-        <p:nvSpPr>
-          <p:cNvPr id="42" name="Text 39"/>
-          <p:cNvSpPr txBox="1"/>
-          <p:nvPr/>
-        </p:nvSpPr>
-        <p:spPr>
-          <a:xfrm>
-            <a:off x="4873752" y="2651760"/>
-            <a:ext cx="3904488" cy="365760"/>
-          </a:xfrm>
-          <a:prstGeom prst="rect">
-            <a:avLst/>
-          </a:prstGeom>
-          <a:noFill/>
-          <a:ln/>
-        </p:spPr>
-        <p:txBody>
-          <a:bodyPr wrap="square" lIns="0" tIns="0" rIns="0" bIns="0" rtlCol="0" anchor="ctr"/>
-          <a:lstStyle/>
-          <a:p>
-            <a:pPr algn="l" indent="0" marL="0">
-              <a:lnSpc>
-                <a:spcPct val="115000"/>
-              </a:lnSpc>
-              <a:buNone/>
-            </a:pPr>
-            <a:r>
-              <a:rPr lang="en-US" sz="950" b="1" dirty="0">
-                <a:solidFill>
-                  <a:srgbClr val="1F2933"/>
-                </a:solidFill>
-                <a:latin typeface="BIZ UDPGothic" pitchFamily="34" charset="0"/>
-                <a:ea typeface="BIZ UDPGothic" pitchFamily="34" charset="-122"/>
-                <a:cs typeface="BIZ UDPGothic" pitchFamily="34" charset="-120"/>
-              </a:rPr>
-              <a:t>自己資金は見返りを求めずに出す</a:t>
-            </a:r>
-            <a:pPr algn="l" indent="0" marL="0">
-              <a:lnSpc>
-                <a:spcPct val="115000"/>
-              </a:lnSpc>
-              <a:buNone/>
-            </a:pPr>
-            <a:r>
-              <a:rPr lang="en-US" sz="850" dirty="0">
-                <a:solidFill>
-                  <a:srgbClr val="4A5563"/>
-                </a:solidFill>
-                <a:latin typeface="BIZ UDPGothic" pitchFamily="34" charset="0"/>
-                <a:ea typeface="BIZ UDPGothic" pitchFamily="34" charset="-122"/>
-                <a:cs typeface="BIZ UDPGothic" pitchFamily="34" charset="-120"/>
-              </a:rPr>
-              <a:t>　共感してくれる工事会社・職人・業界団体と一緒に育てる</a:t>
-            </a:r>
-            <a:endParaRPr lang="en-US" sz="950" dirty="0"/>
-          </a:p>
-        </p:txBody>
-      </p:sp>
-      <p:sp>
-        <p:nvSpPr>
-          <p:cNvPr id="43" name="Shape 40"/>
-          <p:cNvSpPr/>
-          <p:nvPr/>
-        </p:nvSpPr>
-        <p:spPr>
-          <a:xfrm>
-            <a:off x="4526280" y="3063240"/>
-            <a:ext cx="274320" cy="274320"/>
-          </a:xfrm>
-          <a:prstGeom prst="rect">
-            <a:avLst/>
-          </a:prstGeom>
-          <a:solidFill>
-            <a:srgbClr val="2F6DB5"/>
-          </a:solidFill>
-          <a:ln/>
-        </p:spPr>
-      </p:sp>
-      <p:sp>
-        <p:nvSpPr>
-          <p:cNvPr id="44" name="Text 41"/>
-          <p:cNvSpPr txBox="1"/>
-          <p:nvPr/>
-        </p:nvSpPr>
-        <p:spPr>
-          <a:xfrm>
-            <a:off x="4526280" y="3063240"/>
-            <a:ext cx="274320" cy="274320"/>
-          </a:xfrm>
-          <a:prstGeom prst="rect">
-            <a:avLst/>
-          </a:prstGeom>
-          <a:noFill/>
-          <a:ln/>
-        </p:spPr>
-        <p:txBody>
-          <a:bodyPr wrap="square" lIns="0" tIns="0" rIns="0" bIns="0" rtlCol="0" anchor="ctr"/>
-          <a:lstStyle/>
-          <a:p>
-            <a:pPr algn="ctr" indent="0" marL="0">
-              <a:lnSpc>
-                <a:spcPct val="115000"/>
-              </a:lnSpc>
-              <a:buNone/>
-            </a:pPr>
-            <a:r>
-              <a:rPr lang="en-US" sz="1000" b="1" dirty="0">
-                <a:solidFill>
-                  <a:srgbClr val="FFFFFF"/>
-                </a:solidFill>
-                <a:latin typeface="BIZ UDPGothic" pitchFamily="34" charset="0"/>
-                <a:ea typeface="BIZ UDPGothic" pitchFamily="34" charset="-122"/>
-                <a:cs typeface="BIZ UDPGothic" pitchFamily="34" charset="-120"/>
-              </a:rPr>
-              <a:t>3</a:t>
-            </a:r>
-            <a:endParaRPr lang="en-US" sz="1000" dirty="0"/>
-          </a:p>
-        </p:txBody>
-      </p:sp>
-      <p:sp>
-        <p:nvSpPr>
-          <p:cNvPr id="45" name="Text 42"/>
-          <p:cNvSpPr txBox="1"/>
-          <p:nvPr/>
-        </p:nvSpPr>
-        <p:spPr>
-          <a:xfrm>
-            <a:off x="4873752" y="3017520"/>
-            <a:ext cx="3904488" cy="365760"/>
+            <a:off x="4873752" y="2944368"/>
+            <a:ext cx="3904488" cy="384048"/>
           </a:xfrm>
           <a:prstGeom prst="rect">
             <a:avLst/>
@@ -22060,13 +22199,13 @@
       </p:sp>
       <p:sp>
         <p:nvSpPr>
-          <p:cNvPr id="46" name="Shape 43"/>
+          <p:cNvPr id="40" name="Shape 36"/>
           <p:cNvSpPr/>
           <p:nvPr/>
         </p:nvSpPr>
         <p:spPr>
           <a:xfrm>
-            <a:off x="4526280" y="3429000"/>
+            <a:off x="4526280" y="3383280"/>
             <a:ext cx="274320" cy="274320"/>
           </a:xfrm>
           <a:prstGeom prst="rect">
@@ -22080,13 +22219,13 @@
       </p:sp>
       <p:sp>
         <p:nvSpPr>
-          <p:cNvPr id="47" name="Text 44"/>
+          <p:cNvPr id="41" name="Text 37"/>
           <p:cNvSpPr txBox="1"/>
           <p:nvPr/>
         </p:nvSpPr>
         <p:spPr>
           <a:xfrm>
-            <a:off x="4526280" y="3429000"/>
+            <a:off x="4526280" y="3383280"/>
             <a:ext cx="274320" cy="274320"/>
           </a:xfrm>
           <a:prstGeom prst="rect">
@@ -22114,7 +22253,7 @@
                 <a:ea typeface="BIZ UDPGothic" pitchFamily="34" charset="-122"/>
                 <a:cs typeface="BIZ UDPGothic" pitchFamily="34" charset="-120"/>
               </a:rPr>
-              <a:t>4</a:t>
+              <a:t>2</a:t>
             </a:r>
             <a:endParaRPr lang="en-US" sz="1000" dirty="0"/>
           </a:p>
@@ -22122,14 +22261,14 @@
       </p:sp>
       <p:sp>
         <p:nvSpPr>
-          <p:cNvPr id="48" name="Text 45"/>
+          <p:cNvPr id="42" name="Text 38"/>
           <p:cNvSpPr txBox="1"/>
           <p:nvPr/>
         </p:nvSpPr>
         <p:spPr>
           <a:xfrm>
-            <a:off x="4873752" y="3383280"/>
-            <a:ext cx="3904488" cy="365760"/>
+            <a:off x="4873752" y="3328416"/>
+            <a:ext cx="3904488" cy="384048"/>
           </a:xfrm>
           <a:prstGeom prst="rect">
             <a:avLst/>
@@ -22181,7 +22320,7 @@
       </p:sp>
       <p:sp>
         <p:nvSpPr>
-          <p:cNvPr id="49" name="Shape 46"/>
+          <p:cNvPr id="43" name="Shape 39"/>
           <p:cNvSpPr/>
           <p:nvPr/>
         </p:nvSpPr>
@@ -22201,7 +22340,7 @@
       </p:sp>
       <p:sp>
         <p:nvSpPr>
-          <p:cNvPr id="50" name="Text 47"/>
+          <p:cNvPr id="44" name="Text 40"/>
           <p:cNvSpPr txBox="1"/>
           <p:nvPr/>
         </p:nvSpPr>
@@ -22238,7 +22377,7 @@
                 <a:ea typeface="BIZ UDPGothic" pitchFamily="34" charset="-122"/>
                 <a:cs typeface="BIZ UDPGothic" pitchFamily="34" charset="-120"/>
               </a:rPr>
-              <a:t>日本の現場の勘を、人に依存しない形で次の担い手へ残したい。</a:t>
+              <a:t>現場の勘を、人に依存しない形で次の担い手へ残したい。</a:t>
             </a:r>
             <a:endParaRPr lang="en-US" sz="1100" dirty="0"/>
           </a:p>
@@ -22269,7 +22408,7 @@
       </p:sp>
       <p:sp>
         <p:nvSpPr>
-          <p:cNvPr id="51" name="Text 48"/>
+          <p:cNvPr id="45" name="Text 41"/>
           <p:cNvSpPr txBox="1"/>
           <p:nvPr/>
         </p:nvSpPr>
@@ -22311,7 +22450,7 @@
       </p:sp>
       <p:sp>
         <p:nvSpPr>
-          <p:cNvPr id="52" name="Text 49"/>
+          <p:cNvPr id="46" name="Text 42"/>
           <p:cNvSpPr txBox="1"/>
           <p:nvPr/>
         </p:nvSpPr>
@@ -22345,7 +22484,7 @@
                 <a:ea typeface="BIZ UDPGothic" pitchFamily="34" charset="-122"/>
                 <a:cs typeface="BIZ UDPGothic" pitchFamily="34" charset="-120"/>
               </a:rPr>
-              <a:t>時間と価値は10年計画（10台）の延べ拠点数×1拠点の削減（年1,400時間・約500万円）。削減時間（1台1日35分）は仮説で、実証で測る</a:t>
+              <a:t>想いと10年で現場に戻る時間は p.2。撤退ラインの全体（1年目末・2年目末・3年目）は p.13</a:t>
             </a:r>
             <a:endParaRPr lang="en-US" sz="750" dirty="0"/>
           </a:p>
@@ -22564,7 +22703,7 @@
                 <a:ea typeface="BIZ UDPGothic" pitchFamily="34" charset="-122"/>
                 <a:cs typeface="BIZ UDPGothic" pitchFamily="34" charset="-120"/>
               </a:rPr>
-              <a:t>事業概要：AIグラスで記録し、書類と育成を自動化する</a:t>
+              <a:t>事業と想い：現場の勘が消えるのを止めたい</a:t>
             </a:r>
             <a:endParaRPr lang="en-US" sz="1850" dirty="0"/>
           </a:p>
@@ -22606,7 +22745,7 @@
                 <a:ea typeface="BIZ UDPGothic" pitchFamily="34" charset="-122"/>
                 <a:cs typeface="BIZ UDPGothic" pitchFamily="34" charset="-120"/>
               </a:rPr>
-              <a:t>職長がAIグラスを掛けて作業するだけで、写真台帳・日報・図面との照合・若手の教材までつくる</a:t>
+              <a:t>地中送電の現場で見てきたことが出発点。AIグラスで記録し、書類と育成を自動化する</a:t>
             </a:r>
             <a:endParaRPr lang="en-US" sz="1050" dirty="0"/>
           </a:p>
@@ -22644,319 +22783,7 @@
         <p:spPr>
           <a:xfrm>
             <a:off x="365760" y="1024128"/>
-            <a:ext cx="2395728" cy="1572768"/>
-          </a:xfrm>
-          <a:prstGeom prst="rect">
-            <a:avLst/>
-          </a:prstGeom>
-          <a:solidFill>
-            <a:srgbClr val="EAF0F6"/>
-          </a:solidFill>
-          <a:ln/>
-        </p:spPr>
-      </p:sp>
-      <p:sp>
-        <p:nvSpPr>
-          <p:cNvPr id="10" name="Text 7"/>
-          <p:cNvSpPr txBox="1"/>
-          <p:nvPr/>
-        </p:nvSpPr>
-        <p:spPr>
-          <a:xfrm>
-            <a:off x="475488" y="1097280"/>
-            <a:ext cx="2176272" cy="274320"/>
-          </a:xfrm>
-          <a:prstGeom prst="rect">
-            <a:avLst/>
-          </a:prstGeom>
-          <a:noFill/>
-          <a:ln/>
-        </p:spPr>
-        <p:txBody>
-          <a:bodyPr wrap="square" lIns="0" tIns="0" rIns="0" bIns="0" rtlCol="0" anchor="t"/>
-          <a:lstStyle/>
-          <a:p>
-            <a:pPr algn="l" indent="0" marL="0">
-              <a:lnSpc>
-                <a:spcPct val="115000"/>
-              </a:lnSpc>
-              <a:buNone/>
-            </a:pPr>
-            <a:r>
-              <a:rPr lang="en-US" sz="1150" b="1" dirty="0">
-                <a:solidFill>
-                  <a:srgbClr val="2F6DB5"/>
-                </a:solidFill>
-                <a:latin typeface="BIZ UDPGothic" pitchFamily="34" charset="0"/>
-                <a:ea typeface="BIZ UDPGothic" pitchFamily="34" charset="-122"/>
-                <a:cs typeface="BIZ UDPGothic" pitchFamily="34" charset="-120"/>
-              </a:rPr>
-              <a:t>何をするか</a:t>
-            </a:r>
-            <a:endParaRPr lang="en-US" sz="1150" dirty="0"/>
-          </a:p>
-        </p:txBody>
-      </p:sp>
-      <p:sp>
-        <p:nvSpPr>
-          <p:cNvPr id="11" name="Text 8"/>
-          <p:cNvSpPr txBox="1"/>
-          <p:nvPr/>
-        </p:nvSpPr>
-        <p:spPr>
-          <a:xfrm>
-            <a:off x="475488" y="1408176"/>
-            <a:ext cx="2176272" cy="1115568"/>
-          </a:xfrm>
-          <a:prstGeom prst="rect">
-            <a:avLst/>
-          </a:prstGeom>
-          <a:noFill/>
-          <a:ln/>
-        </p:spPr>
-        <p:txBody>
-          <a:bodyPr wrap="square" lIns="0" tIns="0" rIns="0" bIns="0" rtlCol="0" anchor="t"/>
-          <a:lstStyle/>
-          <a:p>
-            <a:pPr algn="l" indent="0" marL="0">
-              <a:lnSpc>
-                <a:spcPct val="115000"/>
-              </a:lnSpc>
-              <a:buNone/>
-            </a:pPr>
-            <a:r>
-              <a:rPr lang="en-US" sz="950" dirty="0">
-                <a:solidFill>
-                  <a:srgbClr val="1B365D"/>
-                </a:solidFill>
-                <a:latin typeface="BIZ UDPGothic" pitchFamily="34" charset="0"/>
-                <a:ea typeface="BIZ UDPGothic" pitchFamily="34" charset="-122"/>
-                <a:cs typeface="BIZ UDPGothic" pitchFamily="34" charset="-120"/>
-              </a:rPr>
-              <a:t>職長・施工管理者がAIグラスを掛けて作業するだけで、一人称の動画と会話を記録する。AIが写真台帳・日報をつくり、図面と照合し、教材にする</a:t>
-            </a:r>
-            <a:endParaRPr lang="en-US" sz="950" dirty="0"/>
-          </a:p>
-        </p:txBody>
-      </p:sp>
-      <p:sp>
-        <p:nvSpPr>
-          <p:cNvPr id="12" name="Shape 9"/>
-          <p:cNvSpPr/>
-          <p:nvPr/>
-        </p:nvSpPr>
-        <p:spPr>
-          <a:xfrm>
-            <a:off x="2871216" y="1024128"/>
-            <a:ext cx="2395728" cy="1572768"/>
-          </a:xfrm>
-          <a:prstGeom prst="rect">
-            <a:avLst/>
-          </a:prstGeom>
-          <a:solidFill>
-            <a:srgbClr val="EAF0F6"/>
-          </a:solidFill>
-          <a:ln/>
-        </p:spPr>
-      </p:sp>
-      <p:sp>
-        <p:nvSpPr>
-          <p:cNvPr id="13" name="Text 10"/>
-          <p:cNvSpPr txBox="1"/>
-          <p:nvPr/>
-        </p:nvSpPr>
-        <p:spPr>
-          <a:xfrm>
-            <a:off x="2980944" y="1097280"/>
-            <a:ext cx="2176272" cy="274320"/>
-          </a:xfrm>
-          <a:prstGeom prst="rect">
-            <a:avLst/>
-          </a:prstGeom>
-          <a:noFill/>
-          <a:ln/>
-        </p:spPr>
-        <p:txBody>
-          <a:bodyPr wrap="square" lIns="0" tIns="0" rIns="0" bIns="0" rtlCol="0" anchor="t"/>
-          <a:lstStyle/>
-          <a:p>
-            <a:pPr algn="l" indent="0" marL="0">
-              <a:lnSpc>
-                <a:spcPct val="115000"/>
-              </a:lnSpc>
-              <a:buNone/>
-            </a:pPr>
-            <a:r>
-              <a:rPr lang="en-US" sz="1150" b="1" dirty="0">
-                <a:solidFill>
-                  <a:srgbClr val="2F6DB5"/>
-                </a:solidFill>
-                <a:latin typeface="BIZ UDPGothic" pitchFamily="34" charset="0"/>
-                <a:ea typeface="BIZ UDPGothic" pitchFamily="34" charset="-122"/>
-                <a:cs typeface="BIZ UDPGothic" pitchFamily="34" charset="-120"/>
-              </a:rPr>
-              <a:t>既存サービスとの違い</a:t>
-            </a:r>
-            <a:endParaRPr lang="en-US" sz="1150" dirty="0"/>
-          </a:p>
-        </p:txBody>
-      </p:sp>
-      <p:sp>
-        <p:nvSpPr>
-          <p:cNvPr id="14" name="Text 11"/>
-          <p:cNvSpPr txBox="1"/>
-          <p:nvPr/>
-        </p:nvSpPr>
-        <p:spPr>
-          <a:xfrm>
-            <a:off x="2980944" y="1408176"/>
-            <a:ext cx="2176272" cy="1115568"/>
-          </a:xfrm>
-          <a:prstGeom prst="rect">
-            <a:avLst/>
-          </a:prstGeom>
-          <a:noFill/>
-          <a:ln/>
-        </p:spPr>
-        <p:txBody>
-          <a:bodyPr wrap="square" lIns="0" tIns="0" rIns="0" bIns="0" rtlCol="0" anchor="t"/>
-          <a:lstStyle/>
-          <a:p>
-            <a:pPr algn="l" indent="0" marL="0">
-              <a:lnSpc>
-                <a:spcPct val="115000"/>
-              </a:lnSpc>
-              <a:buNone/>
-            </a:pPr>
-            <a:r>
-              <a:rPr lang="en-US" sz="950" dirty="0">
-                <a:solidFill>
-                  <a:srgbClr val="1B365D"/>
-                </a:solidFill>
-                <a:latin typeface="BIZ UDPGothic" pitchFamily="34" charset="0"/>
-                <a:ea typeface="BIZ UDPGothic" pitchFamily="34" charset="-122"/>
-                <a:cs typeface="BIZ UDPGothic" pitchFamily="34" charset="-120"/>
-              </a:rPr>
-              <a:t>施工管理アプリは人が撮って入力する前提。当社は自動で記録し、照合・報告・教材までまとめて行う。中身は施工経験者が監修する</a:t>
-            </a:r>
-            <a:endParaRPr lang="en-US" sz="950" dirty="0"/>
-          </a:p>
-        </p:txBody>
-      </p:sp>
-      <p:sp>
-        <p:nvSpPr>
-          <p:cNvPr id="15" name="Shape 12"/>
-          <p:cNvSpPr/>
-          <p:nvPr/>
-        </p:nvSpPr>
-        <p:spPr>
-          <a:xfrm>
-            <a:off x="365760" y="2706624"/>
-            <a:ext cx="2395728" cy="1572768"/>
-          </a:xfrm>
-          <a:prstGeom prst="rect">
-            <a:avLst/>
-          </a:prstGeom>
-          <a:solidFill>
-            <a:srgbClr val="EAF0F6"/>
-          </a:solidFill>
-          <a:ln/>
-        </p:spPr>
-      </p:sp>
-      <p:sp>
-        <p:nvSpPr>
-          <p:cNvPr id="16" name="Text 13"/>
-          <p:cNvSpPr txBox="1"/>
-          <p:nvPr/>
-        </p:nvSpPr>
-        <p:spPr>
-          <a:xfrm>
-            <a:off x="475488" y="2779776"/>
-            <a:ext cx="2176272" cy="274320"/>
-          </a:xfrm>
-          <a:prstGeom prst="rect">
-            <a:avLst/>
-          </a:prstGeom>
-          <a:noFill/>
-          <a:ln/>
-        </p:spPr>
-        <p:txBody>
-          <a:bodyPr wrap="square" lIns="0" tIns="0" rIns="0" bIns="0" rtlCol="0" anchor="t"/>
-          <a:lstStyle/>
-          <a:p>
-            <a:pPr algn="l" indent="0" marL="0">
-              <a:lnSpc>
-                <a:spcPct val="115000"/>
-              </a:lnSpc>
-              <a:buNone/>
-            </a:pPr>
-            <a:r>
-              <a:rPr lang="en-US" sz="1150" b="1" dirty="0">
-                <a:solidFill>
-                  <a:srgbClr val="2F6DB5"/>
-                </a:solidFill>
-                <a:latin typeface="BIZ UDPGothic" pitchFamily="34" charset="0"/>
-                <a:ea typeface="BIZ UDPGothic" pitchFamily="34" charset="-122"/>
-                <a:cs typeface="BIZ UDPGothic" pitchFamily="34" charset="-120"/>
-              </a:rPr>
-              <a:t>誰の悩みか</a:t>
-            </a:r>
-            <a:endParaRPr lang="en-US" sz="1150" dirty="0"/>
-          </a:p>
-        </p:txBody>
-      </p:sp>
-      <p:sp>
-        <p:nvSpPr>
-          <p:cNvPr id="17" name="Text 14"/>
-          <p:cNvSpPr txBox="1"/>
-          <p:nvPr/>
-        </p:nvSpPr>
-        <p:spPr>
-          <a:xfrm>
-            <a:off x="475488" y="3090672"/>
-            <a:ext cx="2176272" cy="1115568"/>
-          </a:xfrm>
-          <a:prstGeom prst="rect">
-            <a:avLst/>
-          </a:prstGeom>
-          <a:noFill/>
-          <a:ln/>
-        </p:spPr>
-        <p:txBody>
-          <a:bodyPr wrap="square" lIns="0" tIns="0" rIns="0" bIns="0" rtlCol="0" anchor="t"/>
-          <a:lstStyle/>
-          <a:p>
-            <a:pPr algn="l" indent="0" marL="0">
-              <a:lnSpc>
-                <a:spcPct val="115000"/>
-              </a:lnSpc>
-              <a:buNone/>
-            </a:pPr>
-            <a:r>
-              <a:rPr lang="en-US" sz="950" dirty="0">
-                <a:solidFill>
-                  <a:srgbClr val="1B365D"/>
-                </a:solidFill>
-                <a:latin typeface="BIZ UDPGothic" pitchFamily="34" charset="0"/>
-                <a:ea typeface="BIZ UDPGothic" pitchFamily="34" charset="-122"/>
-                <a:cs typeface="BIZ UDPGothic" pitchFamily="34" charset="-120"/>
-              </a:rPr>
-              <a:t>関東の中堅電気工事会社。残業規制と高齢化で、写真台帳・報告書と若手の育成に回す時間がない</a:t>
-            </a:r>
-            <a:endParaRPr lang="en-US" sz="950" dirty="0"/>
-          </a:p>
-        </p:txBody>
-      </p:sp>
-      <p:sp>
-        <p:nvSpPr>
-          <p:cNvPr id="18" name="Shape 15"/>
-          <p:cNvSpPr/>
-          <p:nvPr/>
-        </p:nvSpPr>
-        <p:spPr>
-          <a:xfrm>
-            <a:off x="2871216" y="2706624"/>
-            <a:ext cx="2395728" cy="1572768"/>
+            <a:ext cx="4114800" cy="3429000"/>
           </a:xfrm>
           <a:prstGeom prst="rect">
             <a:avLst/>
@@ -22969,472 +22796,14 @@
       </p:sp>
       <p:sp>
         <p:nvSpPr>
-          <p:cNvPr id="19" name="Text 16"/>
+          <p:cNvPr id="10" name="Text 7"/>
           <p:cNvSpPr txBox="1"/>
           <p:nvPr/>
         </p:nvSpPr>
         <p:spPr>
           <a:xfrm>
-            <a:off x="2980944" y="2779776"/>
-            <a:ext cx="2176272" cy="274320"/>
-          </a:xfrm>
-          <a:prstGeom prst="rect">
-            <a:avLst/>
-          </a:prstGeom>
-          <a:noFill/>
-          <a:ln/>
-        </p:spPr>
-        <p:txBody>
-          <a:bodyPr wrap="square" lIns="0" tIns="0" rIns="0" bIns="0" rtlCol="0" anchor="t"/>
-          <a:lstStyle/>
-          <a:p>
-            <a:pPr algn="l" indent="0" marL="0">
-              <a:lnSpc>
-                <a:spcPct val="115000"/>
-              </a:lnSpc>
-              <a:buNone/>
-            </a:pPr>
-            <a:r>
-              <a:rPr lang="en-US" sz="1150" b="1" dirty="0">
-                <a:solidFill>
-                  <a:srgbClr val="F5C400"/>
-                </a:solidFill>
-                <a:latin typeface="BIZ UDPGothic" pitchFamily="34" charset="0"/>
-                <a:ea typeface="BIZ UDPGothic" pitchFamily="34" charset="-122"/>
-                <a:cs typeface="BIZ UDPGothic" pitchFamily="34" charset="-120"/>
-              </a:rPr>
-              <a:t>収益構造</a:t>
-            </a:r>
-            <a:endParaRPr lang="en-US" sz="1150" dirty="0"/>
-          </a:p>
-        </p:txBody>
-      </p:sp>
-      <p:sp>
-        <p:nvSpPr>
-          <p:cNvPr id="20" name="Text 17"/>
-          <p:cNvSpPr txBox="1"/>
-          <p:nvPr/>
-        </p:nvSpPr>
-        <p:spPr>
-          <a:xfrm>
-            <a:off x="2980944" y="3090672"/>
-            <a:ext cx="2176272" cy="1115568"/>
-          </a:xfrm>
-          <a:prstGeom prst="rect">
-            <a:avLst/>
-          </a:prstGeom>
-          <a:noFill/>
-          <a:ln/>
-        </p:spPr>
-        <p:txBody>
-          <a:bodyPr wrap="square" lIns="0" tIns="0" rIns="0" bIns="0" rtlCol="0" anchor="t"/>
-          <a:lstStyle/>
-          <a:p>
-            <a:pPr algn="l" indent="0" marL="0">
-              <a:lnSpc>
-                <a:spcPct val="115000"/>
-              </a:lnSpc>
-              <a:buNone/>
-            </a:pPr>
-            <a:r>
-              <a:rPr lang="en-US" sz="950" dirty="0">
-                <a:solidFill>
-                  <a:srgbClr val="FFFFFF"/>
-                </a:solidFill>
-                <a:latin typeface="BIZ UDPGothic" pitchFamily="34" charset="0"/>
-                <a:ea typeface="BIZ UDPGothic" pitchFamily="34" charset="-122"/>
-                <a:cs typeface="BIZ UDPGothic" pitchFamily="34" charset="-120"/>
-              </a:rPr>
-              <a:t>基盤 月5万円＋端末 月2万円×台数。10台で年300万円の利用料を毎年いただく。初年度のみ導入支援200万円</a:t>
-            </a:r>
-            <a:endParaRPr lang="en-US" sz="950" dirty="0"/>
-          </a:p>
-        </p:txBody>
-      </p:sp>
-      <p:sp>
-        <p:nvSpPr>
-          <p:cNvPr id="21" name="Text 18"/>
-          <p:cNvSpPr txBox="1"/>
-          <p:nvPr/>
-        </p:nvSpPr>
-        <p:spPr>
-          <a:xfrm>
-            <a:off x="5486400" y="1024128"/>
-            <a:ext cx="3291840" cy="237744"/>
-          </a:xfrm>
-          <a:prstGeom prst="rect">
-            <a:avLst/>
-          </a:prstGeom>
-          <a:noFill/>
-          <a:ln/>
-        </p:spPr>
-        <p:txBody>
-          <a:bodyPr wrap="square" lIns="0" tIns="0" rIns="0" bIns="0" rtlCol="0" anchor="t"/>
-          <a:lstStyle/>
-          <a:p>
-            <a:pPr algn="l" indent="0" marL="0">
-              <a:lnSpc>
-                <a:spcPct val="115000"/>
-              </a:lnSpc>
-              <a:buNone/>
-            </a:pPr>
-            <a:r>
-              <a:rPr lang="en-US" sz="1100" b="1" dirty="0">
-                <a:solidFill>
-                  <a:srgbClr val="1F2933"/>
-                </a:solidFill>
-                <a:latin typeface="BIZ UDPGothic" pitchFamily="34" charset="0"/>
-                <a:ea typeface="BIZ UDPGothic" pitchFamily="34" charset="-122"/>
-                <a:cs typeface="BIZ UDPGothic" pitchFamily="34" charset="-120"/>
-              </a:rPr>
-              <a:t>選んだ理由</a:t>
-            </a:r>
-            <a:endParaRPr lang="en-US" sz="1100" dirty="0"/>
-          </a:p>
-        </p:txBody>
-      </p:sp>
-      <p:sp>
-        <p:nvSpPr>
-          <p:cNvPr id="22" name="Shape 19"/>
-          <p:cNvSpPr/>
-          <p:nvPr/>
-        </p:nvSpPr>
-        <p:spPr>
-          <a:xfrm>
-            <a:off x="5486400" y="1353312"/>
-            <a:ext cx="566928" cy="438912"/>
-          </a:xfrm>
-          <a:prstGeom prst="rect">
-            <a:avLst/>
-          </a:prstGeom>
-          <a:solidFill>
-            <a:srgbClr val="1B365D"/>
-          </a:solidFill>
-          <a:ln/>
-        </p:spPr>
-      </p:sp>
-      <p:sp>
-        <p:nvSpPr>
-          <p:cNvPr id="23" name="Text 20"/>
-          <p:cNvSpPr txBox="1"/>
-          <p:nvPr/>
-        </p:nvSpPr>
-        <p:spPr>
-          <a:xfrm>
-            <a:off x="5486400" y="1353312"/>
-            <a:ext cx="566928" cy="438912"/>
-          </a:xfrm>
-          <a:prstGeom prst="rect">
-            <a:avLst/>
-          </a:prstGeom>
-          <a:noFill/>
-          <a:ln/>
-        </p:spPr>
-        <p:txBody>
-          <a:bodyPr wrap="square" lIns="0" tIns="0" rIns="0" bIns="0" rtlCol="0" anchor="ctr"/>
-          <a:lstStyle/>
-          <a:p>
-            <a:pPr algn="ctr" indent="0" marL="0">
-              <a:lnSpc>
-                <a:spcPct val="115000"/>
-              </a:lnSpc>
-              <a:buNone/>
-            </a:pPr>
-            <a:r>
-              <a:rPr lang="en-US" sz="1050" b="1" dirty="0">
-                <a:solidFill>
-                  <a:srgbClr val="FFFFFF"/>
-                </a:solidFill>
-                <a:latin typeface="BIZ UDPGothic" pitchFamily="34" charset="0"/>
-                <a:ea typeface="BIZ UDPGothic" pitchFamily="34" charset="-122"/>
-                <a:cs typeface="BIZ UDPGothic" pitchFamily="34" charset="-120"/>
-              </a:rPr>
-              <a:t>市場</a:t>
-            </a:r>
-            <a:endParaRPr lang="en-US" sz="1050" dirty="0"/>
-          </a:p>
-        </p:txBody>
-      </p:sp>
-      <p:sp>
-        <p:nvSpPr>
-          <p:cNvPr id="24" name="Text 21"/>
-          <p:cNvSpPr txBox="1"/>
-          <p:nvPr/>
-        </p:nvSpPr>
-        <p:spPr>
-          <a:xfrm>
-            <a:off x="6126480" y="1316736"/>
-            <a:ext cx="2651760" cy="512064"/>
-          </a:xfrm>
-          <a:prstGeom prst="rect">
-            <a:avLst/>
-          </a:prstGeom>
-          <a:noFill/>
-          <a:ln/>
-        </p:spPr>
-        <p:txBody>
-          <a:bodyPr wrap="square" lIns="0" tIns="0" rIns="0" bIns="0" rtlCol="0" anchor="ctr"/>
-          <a:lstStyle/>
-          <a:p>
-            <a:pPr algn="l" indent="0" marL="0">
-              <a:lnSpc>
-                <a:spcPct val="115000"/>
-              </a:lnSpc>
-              <a:buNone/>
-            </a:pPr>
-            <a:r>
-              <a:rPr lang="en-US" sz="950" dirty="0">
-                <a:solidFill>
-                  <a:srgbClr val="1F2933"/>
-                </a:solidFill>
-                <a:latin typeface="BIZ UDPGothic" pitchFamily="34" charset="0"/>
-                <a:ea typeface="BIZ UDPGothic" pitchFamily="34" charset="-122"/>
-                <a:cs typeface="BIZ UDPGothic" pitchFamily="34" charset="-120"/>
-              </a:rPr>
-              <a:t>55歳以上が36.7%、残業は月45時間まで。人を増やして解決できない</a:t>
-            </a:r>
-            <a:endParaRPr lang="en-US" sz="950" dirty="0"/>
-          </a:p>
-        </p:txBody>
-      </p:sp>
-      <p:sp>
-        <p:nvSpPr>
-          <p:cNvPr id="25" name="Shape 22"/>
-          <p:cNvSpPr/>
-          <p:nvPr/>
-        </p:nvSpPr>
-        <p:spPr>
-          <a:xfrm>
-            <a:off x="5486400" y="1901952"/>
-            <a:ext cx="566928" cy="438912"/>
-          </a:xfrm>
-          <a:prstGeom prst="rect">
-            <a:avLst/>
-          </a:prstGeom>
-          <a:solidFill>
-            <a:srgbClr val="1B365D"/>
-          </a:solidFill>
-          <a:ln/>
-        </p:spPr>
-      </p:sp>
-      <p:sp>
-        <p:nvSpPr>
-          <p:cNvPr id="26" name="Text 23"/>
-          <p:cNvSpPr txBox="1"/>
-          <p:nvPr/>
-        </p:nvSpPr>
-        <p:spPr>
-          <a:xfrm>
-            <a:off x="5486400" y="1901952"/>
-            <a:ext cx="566928" cy="438912"/>
-          </a:xfrm>
-          <a:prstGeom prst="rect">
-            <a:avLst/>
-          </a:prstGeom>
-          <a:noFill/>
-          <a:ln/>
-        </p:spPr>
-        <p:txBody>
-          <a:bodyPr wrap="square" lIns="0" tIns="0" rIns="0" bIns="0" rtlCol="0" anchor="ctr"/>
-          <a:lstStyle/>
-          <a:p>
-            <a:pPr algn="ctr" indent="0" marL="0">
-              <a:lnSpc>
-                <a:spcPct val="115000"/>
-              </a:lnSpc>
-              <a:buNone/>
-            </a:pPr>
-            <a:r>
-              <a:rPr lang="en-US" sz="1050" b="1" dirty="0">
-                <a:solidFill>
-                  <a:srgbClr val="FFFFFF"/>
-                </a:solidFill>
-                <a:latin typeface="BIZ UDPGothic" pitchFamily="34" charset="0"/>
-                <a:ea typeface="BIZ UDPGothic" pitchFamily="34" charset="-122"/>
-                <a:cs typeface="BIZ UDPGothic" pitchFamily="34" charset="-120"/>
-              </a:rPr>
-              <a:t>技術</a:t>
-            </a:r>
-            <a:endParaRPr lang="en-US" sz="1050" dirty="0"/>
-          </a:p>
-        </p:txBody>
-      </p:sp>
-      <p:sp>
-        <p:nvSpPr>
-          <p:cNvPr id="27" name="Text 24"/>
-          <p:cNvSpPr txBox="1"/>
-          <p:nvPr/>
-        </p:nvSpPr>
-        <p:spPr>
-          <a:xfrm>
-            <a:off x="6126480" y="1865376"/>
-            <a:ext cx="2651760" cy="512064"/>
-          </a:xfrm>
-          <a:prstGeom prst="rect">
-            <a:avLst/>
-          </a:prstGeom>
-          <a:noFill/>
-          <a:ln/>
-        </p:spPr>
-        <p:txBody>
-          <a:bodyPr wrap="square" lIns="0" tIns="0" rIns="0" bIns="0" rtlCol="0" anchor="ctr"/>
-          <a:lstStyle/>
-          <a:p>
-            <a:pPr algn="l" indent="0" marL="0">
-              <a:lnSpc>
-                <a:spcPct val="115000"/>
-              </a:lnSpc>
-              <a:buNone/>
-            </a:pPr>
-            <a:r>
-              <a:rPr lang="en-US" sz="950" dirty="0">
-                <a:solidFill>
-                  <a:srgbClr val="1F2933"/>
-                </a:solidFill>
-                <a:latin typeface="BIZ UDPGothic" pitchFamily="34" charset="0"/>
-                <a:ea typeface="BIZ UDPGothic" pitchFamily="34" charset="-122"/>
-                <a:cs typeface="BIZ UDPGothic" pitchFamily="34" charset="-120"/>
-              </a:rPr>
-              <a:t>映像を理解するAIと、約50gのAIグラスが実用レベルになった</a:t>
-            </a:r>
-            <a:endParaRPr lang="en-US" sz="950" dirty="0"/>
-          </a:p>
-        </p:txBody>
-      </p:sp>
-      <p:sp>
-        <p:nvSpPr>
-          <p:cNvPr id="28" name="Shape 25"/>
-          <p:cNvSpPr/>
-          <p:nvPr/>
-        </p:nvSpPr>
-        <p:spPr>
-          <a:xfrm>
-            <a:off x="5486400" y="2450592"/>
-            <a:ext cx="566928" cy="438912"/>
-          </a:xfrm>
-          <a:prstGeom prst="rect">
-            <a:avLst/>
-          </a:prstGeom>
-          <a:solidFill>
-            <a:srgbClr val="2F6DB5"/>
-          </a:solidFill>
-          <a:ln/>
-        </p:spPr>
-      </p:sp>
-      <p:sp>
-        <p:nvSpPr>
-          <p:cNvPr id="29" name="Text 26"/>
-          <p:cNvSpPr txBox="1"/>
-          <p:nvPr/>
-        </p:nvSpPr>
-        <p:spPr>
-          <a:xfrm>
-            <a:off x="5486400" y="2450592"/>
-            <a:ext cx="566928" cy="438912"/>
-          </a:xfrm>
-          <a:prstGeom prst="rect">
-            <a:avLst/>
-          </a:prstGeom>
-          <a:noFill/>
-          <a:ln/>
-        </p:spPr>
-        <p:txBody>
-          <a:bodyPr wrap="square" lIns="0" tIns="0" rIns="0" bIns="0" rtlCol="0" anchor="ctr"/>
-          <a:lstStyle/>
-          <a:p>
-            <a:pPr algn="ctr" indent="0" marL="0">
-              <a:lnSpc>
-                <a:spcPct val="115000"/>
-              </a:lnSpc>
-              <a:buNone/>
-            </a:pPr>
-            <a:r>
-              <a:rPr lang="en-US" sz="1050" b="1" dirty="0">
-                <a:solidFill>
-                  <a:srgbClr val="FFFFFF"/>
-                </a:solidFill>
-                <a:latin typeface="BIZ UDPGothic" pitchFamily="34" charset="0"/>
-                <a:ea typeface="BIZ UDPGothic" pitchFamily="34" charset="-122"/>
-                <a:cs typeface="BIZ UDPGothic" pitchFamily="34" charset="-120"/>
-              </a:rPr>
-              <a:t>自分</a:t>
-            </a:r>
-            <a:endParaRPr lang="en-US" sz="1050" dirty="0"/>
-          </a:p>
-        </p:txBody>
-      </p:sp>
-      <p:sp>
-        <p:nvSpPr>
-          <p:cNvPr id="30" name="Text 27"/>
-          <p:cNvSpPr txBox="1"/>
-          <p:nvPr/>
-        </p:nvSpPr>
-        <p:spPr>
-          <a:xfrm>
-            <a:off x="6126480" y="2414016"/>
-            <a:ext cx="2651760" cy="512064"/>
-          </a:xfrm>
-          <a:prstGeom prst="rect">
-            <a:avLst/>
-          </a:prstGeom>
-          <a:noFill/>
-          <a:ln/>
-        </p:spPr>
-        <p:txBody>
-          <a:bodyPr wrap="square" lIns="0" tIns="0" rIns="0" bIns="0" rtlCol="0" anchor="ctr"/>
-          <a:lstStyle/>
-          <a:p>
-            <a:pPr algn="l" indent="0" marL="0">
-              <a:lnSpc>
-                <a:spcPct val="115000"/>
-              </a:lnSpc>
-              <a:buNone/>
-            </a:pPr>
-            <a:r>
-              <a:rPr lang="en-US" sz="950" dirty="0">
-                <a:solidFill>
-                  <a:srgbClr val="1F2933"/>
-                </a:solidFill>
-                <a:latin typeface="BIZ UDPGothic" pitchFamily="34" charset="0"/>
-                <a:ea typeface="BIZ UDPGothic" pitchFamily="34" charset="-122"/>
-                <a:cs typeface="BIZ UDPGothic" pitchFamily="34" charset="-120"/>
-              </a:rPr>
-              <a:t>地中送電線の施工管理を5年。現場とAI実装の両方がわかる</a:t>
-            </a:r>
-            <a:endParaRPr lang="en-US" sz="950" dirty="0"/>
-          </a:p>
-        </p:txBody>
-      </p:sp>
-      <p:sp>
-        <p:nvSpPr>
-          <p:cNvPr id="31" name="Shape 28"/>
-          <p:cNvSpPr/>
-          <p:nvPr/>
-        </p:nvSpPr>
-        <p:spPr>
-          <a:xfrm>
-            <a:off x="5486400" y="2926080"/>
-            <a:ext cx="3291840" cy="1097280"/>
-          </a:xfrm>
-          <a:prstGeom prst="rect">
-            <a:avLst/>
-          </a:prstGeom>
-          <a:solidFill>
-            <a:srgbClr val="1B365D"/>
-          </a:solidFill>
-          <a:ln/>
-        </p:spPr>
-      </p:sp>
-      <p:sp>
-        <p:nvSpPr>
-          <p:cNvPr id="32" name="Text 29"/>
-          <p:cNvSpPr txBox="1"/>
-          <p:nvPr/>
-        </p:nvSpPr>
-        <p:spPr>
-          <a:xfrm>
-            <a:off x="5614416" y="2926080"/>
-            <a:ext cx="3035808" cy="1097280"/>
+            <a:off x="530352" y="1069848"/>
+            <a:ext cx="3785616" cy="3337560"/>
           </a:xfrm>
           <a:prstGeom prst="rect">
             <a:avLst/>
@@ -23475,8 +22844,20 @@
               </a:spcAft>
               <a:buNone/>
             </a:pPr>
+            <a:endParaRPr lang="en-US" sz="1000" dirty="0"/>
+          </a:p>
+          <a:p>
+            <a:pPr algn="l" indent="0" marL="0">
+              <a:lnSpc>
+                <a:spcPct val="115000"/>
+              </a:lnSpc>
+              <a:spcAft>
+                <a:spcPts val="200"/>
+              </a:spcAft>
+              <a:buNone/>
+            </a:pPr>
             <a:r>
-              <a:rPr lang="en-US" sz="1000" dirty="0">
+              <a:rPr lang="en-US" sz="1200" b="1" dirty="0">
                 <a:solidFill>
                   <a:srgbClr val="FFFFFF"/>
                 </a:solidFill>
@@ -23484,7 +22865,123 @@
                 <a:ea typeface="BIZ UDPGothic" pitchFamily="34" charset="-122"/>
                 <a:cs typeface="BIZ UDPGothic" pitchFamily="34" charset="-120"/>
               </a:rPr>
-              <a:t>　地中送電の現場で、ベテランの判断が手順書に残らないまま退職で消えるのを見てきた。その判断をデータで残し、次の担い手に渡したい</a:t>
+              <a:t>地中送電の現場で、ベテランの判断が手順書に残らないまま、退職で消えるのを見てきた。その判断をデータで残し、次の担い手に渡したい</a:t>
+            </a:r>
+            <a:endParaRPr lang="en-US" sz="1000" dirty="0"/>
+          </a:p>
+          <a:p>
+            <a:pPr algn="l" indent="0" marL="0">
+              <a:lnSpc>
+                <a:spcPct val="115000"/>
+              </a:lnSpc>
+              <a:spcAft>
+                <a:spcPts val="200"/>
+              </a:spcAft>
+              <a:buNone/>
+            </a:pPr>
+            <a:endParaRPr lang="en-US" sz="1000" dirty="0"/>
+          </a:p>
+          <a:p>
+            <a:pPr algn="l" indent="0" marL="0">
+              <a:lnSpc>
+                <a:spcPct val="115000"/>
+              </a:lnSpc>
+              <a:spcAft>
+                <a:spcPts val="200"/>
+              </a:spcAft>
+              <a:buNone/>
+            </a:pPr>
+            <a:r>
+              <a:rPr lang="en-US" sz="950" b="1" dirty="0">
+                <a:solidFill>
+                  <a:srgbClr val="F5C400"/>
+                </a:solidFill>
+                <a:latin typeface="BIZ UDPGothic" pitchFamily="34" charset="0"/>
+                <a:ea typeface="BIZ UDPGothic" pitchFamily="34" charset="-122"/>
+                <a:cs typeface="BIZ UDPGothic" pitchFamily="34" charset="-120"/>
+              </a:rPr>
+              <a:t>10年で現場に戻る時間</a:t>
+            </a:r>
+            <a:endParaRPr lang="en-US" sz="1000" dirty="0"/>
+          </a:p>
+          <a:p>
+            <a:pPr algn="l" indent="0" marL="0">
+              <a:lnSpc>
+                <a:spcPct val="115000"/>
+              </a:lnSpc>
+              <a:spcAft>
+                <a:spcPts val="200"/>
+              </a:spcAft>
+              <a:buNone/>
+            </a:pPr>
+            <a:r>
+              <a:rPr lang="en-US" sz="2200" b="1" dirty="0">
+                <a:solidFill>
+                  <a:srgbClr val="FFFFFF"/>
+                </a:solidFill>
+                <a:latin typeface="BIZ UDPGothic" pitchFamily="34" charset="0"/>
+                <a:ea typeface="BIZ UDPGothic" pitchFamily="34" charset="-122"/>
+                <a:cs typeface="BIZ UDPGothic" pitchFamily="34" charset="-120"/>
+              </a:rPr>
+              <a:t>約137万時間</a:t>
+            </a:r>
+            <a:endParaRPr lang="en-US" sz="1000" dirty="0"/>
+          </a:p>
+          <a:p>
+            <a:pPr algn="l" indent="0" marL="0">
+              <a:lnSpc>
+                <a:spcPct val="115000"/>
+              </a:lnSpc>
+              <a:spcAft>
+                <a:spcPts val="200"/>
+              </a:spcAft>
+              <a:buNone/>
+            </a:pPr>
+            <a:r>
+              <a:rPr lang="en-US" sz="850" dirty="0">
+                <a:solidFill>
+                  <a:srgbClr val="FFFFFF"/>
+                </a:solidFill>
+                <a:latin typeface="BIZ UDPGothic" pitchFamily="34" charset="0"/>
+                <a:ea typeface="BIZ UDPGothic" pitchFamily="34" charset="-122"/>
+                <a:cs typeface="BIZ UDPGothic" pitchFamily="34" charset="-120"/>
+              </a:rPr>
+              <a:t>書類に使っていた時間が、現場の仕事と若手の指導に戻る（10年計画の延べ拠点数×1拠点の削減）</a:t>
+            </a:r>
+            <a:endParaRPr lang="en-US" sz="1000" dirty="0"/>
+          </a:p>
+          <a:p>
+            <a:pPr algn="l" indent="0" marL="0">
+              <a:lnSpc>
+                <a:spcPct val="115000"/>
+              </a:lnSpc>
+              <a:spcAft>
+                <a:spcPts val="200"/>
+              </a:spcAft>
+              <a:buNone/>
+            </a:pPr>
+            <a:endParaRPr lang="en-US" sz="1000" dirty="0"/>
+          </a:p>
+          <a:p>
+            <a:pPr algn="l" indent="0" marL="0">
+              <a:lnSpc>
+                <a:spcPct val="115000"/>
+              </a:lnSpc>
+              <a:spcAft>
+                <a:spcPts val="200"/>
+              </a:spcAft>
+              <a:buNone/>
+            </a:pPr>
+            <a:r>
+              <a:rPr lang="en-US" sz="1000" b="1" dirty="0">
+                <a:solidFill>
+                  <a:srgbClr val="F5C400"/>
+                </a:solidFill>
+                <a:latin typeface="BIZ UDPGothic" pitchFamily="34" charset="0"/>
+                <a:ea typeface="BIZ UDPGothic" pitchFamily="34" charset="-122"/>
+                <a:cs typeface="BIZ UDPGothic" pitchFamily="34" charset="-120"/>
+              </a:rPr>
+              <a:t>利益は目的ではなく、事業を続けるための条件。配当は求めず、現場の支援と開発に回す</a:t>
             </a:r>
             <a:endParaRPr lang="en-US" sz="1000" dirty="0"/>
           </a:p>
@@ -23492,7 +22989,481 @@
       </p:sp>
       <p:sp>
         <p:nvSpPr>
-          <p:cNvPr id="33" name="Text 30"/>
+          <p:cNvPr id="11" name="Shape 8"/>
+          <p:cNvSpPr/>
+          <p:nvPr/>
+        </p:nvSpPr>
+        <p:spPr>
+          <a:xfrm>
+            <a:off x="4663440" y="1024128"/>
+            <a:ext cx="4114800" cy="1371600"/>
+          </a:xfrm>
+          <a:prstGeom prst="rect">
+            <a:avLst/>
+          </a:prstGeom>
+          <a:solidFill>
+            <a:srgbClr val="EAF0F6"/>
+          </a:solidFill>
+          <a:ln/>
+        </p:spPr>
+      </p:sp>
+      <p:sp>
+        <p:nvSpPr>
+          <p:cNvPr id="12" name="Text 9"/>
+          <p:cNvSpPr txBox="1"/>
+          <p:nvPr/>
+        </p:nvSpPr>
+        <p:spPr>
+          <a:xfrm>
+            <a:off x="4791456" y="1024128"/>
+            <a:ext cx="3858768" cy="1371600"/>
+          </a:xfrm>
+          <a:prstGeom prst="rect">
+            <a:avLst/>
+          </a:prstGeom>
+          <a:noFill/>
+          <a:ln/>
+        </p:spPr>
+        <p:txBody>
+          <a:bodyPr wrap="square" lIns="0" tIns="0" rIns="0" bIns="0" rtlCol="0" anchor="ctr"/>
+          <a:lstStyle/>
+          <a:p>
+            <a:pPr algn="l" indent="0" marL="0">
+              <a:lnSpc>
+                <a:spcPct val="115000"/>
+              </a:lnSpc>
+              <a:spcAft>
+                <a:spcPts val="300"/>
+              </a:spcAft>
+              <a:buNone/>
+            </a:pPr>
+            <a:r>
+              <a:rPr lang="en-US" sz="1000" b="1" dirty="0">
+                <a:solidFill>
+                  <a:srgbClr val="2F6DB5"/>
+                </a:solidFill>
+                <a:latin typeface="BIZ UDPGothic" pitchFamily="34" charset="0"/>
+                <a:ea typeface="BIZ UDPGothic" pitchFamily="34" charset="-122"/>
+                <a:cs typeface="BIZ UDPGothic" pitchFamily="34" charset="-120"/>
+              </a:rPr>
+              <a:t>事業を一文で</a:t>
+            </a:r>
+            <a:pPr algn="l" indent="0" marL="0">
+              <a:lnSpc>
+                <a:spcPct val="115000"/>
+              </a:lnSpc>
+              <a:spcAft>
+                <a:spcPts val="300"/>
+              </a:spcAft>
+              <a:buNone/>
+            </a:pPr>
+            <a:endParaRPr lang="en-US" sz="1000" dirty="0"/>
+          </a:p>
+          <a:p>
+            <a:pPr algn="l" indent="0" marL="0">
+              <a:lnSpc>
+                <a:spcPct val="115000"/>
+              </a:lnSpc>
+              <a:spcAft>
+                <a:spcPts val="300"/>
+              </a:spcAft>
+              <a:buNone/>
+            </a:pPr>
+            <a:r>
+              <a:rPr lang="en-US" sz="1100" b="1" dirty="0">
+                <a:solidFill>
+                  <a:srgbClr val="1F2933"/>
+                </a:solidFill>
+                <a:latin typeface="BIZ UDPGothic" pitchFamily="34" charset="0"/>
+                <a:ea typeface="BIZ UDPGothic" pitchFamily="34" charset="-122"/>
+                <a:cs typeface="BIZ UDPGothic" pitchFamily="34" charset="-120"/>
+              </a:rPr>
+              <a:t>職長がAIグラスを掛けて作業するだけで、写真台帳・日報・図面との照合・若手の教材までつくる</a:t>
+            </a:r>
+            <a:endParaRPr lang="en-US" sz="1000" dirty="0"/>
+          </a:p>
+          <a:p>
+            <a:pPr algn="l" indent="0" marL="0">
+              <a:lnSpc>
+                <a:spcPct val="115000"/>
+              </a:lnSpc>
+              <a:spcAft>
+                <a:spcPts val="300"/>
+              </a:spcAft>
+              <a:buNone/>
+            </a:pPr>
+            <a:r>
+              <a:rPr lang="en-US" sz="950" dirty="0">
+                <a:solidFill>
+                  <a:srgbClr val="4A5563"/>
+                </a:solidFill>
+                <a:latin typeface="BIZ UDPGothic" pitchFamily="34" charset="0"/>
+                <a:ea typeface="BIZ UDPGothic" pitchFamily="34" charset="-122"/>
+                <a:cs typeface="BIZ UDPGothic" pitchFamily="34" charset="-120"/>
+              </a:rPr>
+              <a:t>お客様は関東の中堅電気工事会社。残業規制と高齢化で、書類と育成に回す時間がない</a:t>
+            </a:r>
+            <a:endParaRPr lang="en-US" sz="1000" dirty="0"/>
+          </a:p>
+        </p:txBody>
+      </p:sp>
+      <p:sp>
+        <p:nvSpPr>
+          <p:cNvPr id="13" name="Text 10"/>
+          <p:cNvSpPr txBox="1"/>
+          <p:nvPr/>
+        </p:nvSpPr>
+        <p:spPr>
+          <a:xfrm>
+            <a:off x="4663440" y="2505456"/>
+            <a:ext cx="4114800" cy="237744"/>
+          </a:xfrm>
+          <a:prstGeom prst="rect">
+            <a:avLst/>
+          </a:prstGeom>
+          <a:noFill/>
+          <a:ln/>
+        </p:spPr>
+        <p:txBody>
+          <a:bodyPr wrap="square" lIns="0" tIns="0" rIns="0" bIns="0" rtlCol="0" anchor="t"/>
+          <a:lstStyle/>
+          <a:p>
+            <a:pPr algn="l" indent="0" marL="0">
+              <a:lnSpc>
+                <a:spcPct val="115000"/>
+              </a:lnSpc>
+              <a:buNone/>
+            </a:pPr>
+            <a:r>
+              <a:rPr lang="en-US" sz="1100" b="1" dirty="0">
+                <a:solidFill>
+                  <a:srgbClr val="1B365D"/>
+                </a:solidFill>
+                <a:latin typeface="BIZ UDPGothic" pitchFamily="34" charset="0"/>
+                <a:ea typeface="BIZ UDPGothic" pitchFamily="34" charset="-122"/>
+                <a:cs typeface="BIZ UDPGothic" pitchFamily="34" charset="-120"/>
+              </a:rPr>
+              <a:t>選んだ理由（3つ）</a:t>
+            </a:r>
+            <a:endParaRPr lang="en-US" sz="1100" dirty="0"/>
+          </a:p>
+        </p:txBody>
+      </p:sp>
+      <p:sp>
+        <p:nvSpPr>
+          <p:cNvPr id="14" name="Shape 11"/>
+          <p:cNvSpPr/>
+          <p:nvPr/>
+        </p:nvSpPr>
+        <p:spPr>
+          <a:xfrm>
+            <a:off x="4663440" y="2843784"/>
+            <a:ext cx="566928" cy="438912"/>
+          </a:xfrm>
+          <a:prstGeom prst="rect">
+            <a:avLst/>
+          </a:prstGeom>
+          <a:solidFill>
+            <a:srgbClr val="1B365D"/>
+          </a:solidFill>
+          <a:ln/>
+        </p:spPr>
+      </p:sp>
+      <p:sp>
+        <p:nvSpPr>
+          <p:cNvPr id="15" name="Text 12"/>
+          <p:cNvSpPr txBox="1"/>
+          <p:nvPr/>
+        </p:nvSpPr>
+        <p:spPr>
+          <a:xfrm>
+            <a:off x="4663440" y="2843784"/>
+            <a:ext cx="566928" cy="438912"/>
+          </a:xfrm>
+          <a:prstGeom prst="rect">
+            <a:avLst/>
+          </a:prstGeom>
+          <a:noFill/>
+          <a:ln/>
+        </p:spPr>
+        <p:txBody>
+          <a:bodyPr wrap="square" lIns="0" tIns="0" rIns="0" bIns="0" rtlCol="0" anchor="ctr"/>
+          <a:lstStyle/>
+          <a:p>
+            <a:pPr algn="ctr" indent="0" marL="0">
+              <a:lnSpc>
+                <a:spcPct val="115000"/>
+              </a:lnSpc>
+              <a:buNone/>
+            </a:pPr>
+            <a:r>
+              <a:rPr lang="en-US" sz="1050" b="1" dirty="0">
+                <a:solidFill>
+                  <a:srgbClr val="FFFFFF"/>
+                </a:solidFill>
+                <a:latin typeface="BIZ UDPGothic" pitchFamily="34" charset="0"/>
+                <a:ea typeface="BIZ UDPGothic" pitchFamily="34" charset="-122"/>
+                <a:cs typeface="BIZ UDPGothic" pitchFamily="34" charset="-120"/>
+              </a:rPr>
+              <a:t>市場</a:t>
+            </a:r>
+            <a:endParaRPr lang="en-US" sz="1050" dirty="0"/>
+          </a:p>
+        </p:txBody>
+      </p:sp>
+      <p:sp>
+        <p:nvSpPr>
+          <p:cNvPr id="16" name="Text 13"/>
+          <p:cNvSpPr txBox="1"/>
+          <p:nvPr/>
+        </p:nvSpPr>
+        <p:spPr>
+          <a:xfrm>
+            <a:off x="5321808" y="2807208"/>
+            <a:ext cx="3456432" cy="512064"/>
+          </a:xfrm>
+          <a:prstGeom prst="rect">
+            <a:avLst/>
+          </a:prstGeom>
+          <a:noFill/>
+          <a:ln/>
+        </p:spPr>
+        <p:txBody>
+          <a:bodyPr wrap="square" lIns="0" tIns="0" rIns="0" bIns="0" rtlCol="0" anchor="ctr"/>
+          <a:lstStyle/>
+          <a:p>
+            <a:pPr algn="l" indent="0" marL="0">
+              <a:lnSpc>
+                <a:spcPct val="115000"/>
+              </a:lnSpc>
+              <a:buNone/>
+            </a:pPr>
+            <a:r>
+              <a:rPr lang="en-US" sz="950" dirty="0">
+                <a:solidFill>
+                  <a:srgbClr val="1F2933"/>
+                </a:solidFill>
+                <a:latin typeface="BIZ UDPGothic" pitchFamily="34" charset="0"/>
+                <a:ea typeface="BIZ UDPGothic" pitchFamily="34" charset="-122"/>
+                <a:cs typeface="BIZ UDPGothic" pitchFamily="34" charset="-120"/>
+              </a:rPr>
+              <a:t>55歳以上が36.7%、残業は月45時間まで。人を増やして解決できない</a:t>
+            </a:r>
+            <a:endParaRPr lang="en-US" sz="950" dirty="0"/>
+          </a:p>
+        </p:txBody>
+      </p:sp>
+      <p:sp>
+        <p:nvSpPr>
+          <p:cNvPr id="17" name="Shape 14"/>
+          <p:cNvSpPr/>
+          <p:nvPr/>
+        </p:nvSpPr>
+        <p:spPr>
+          <a:xfrm>
+            <a:off x="4663440" y="3392424"/>
+            <a:ext cx="566928" cy="438912"/>
+          </a:xfrm>
+          <a:prstGeom prst="rect">
+            <a:avLst/>
+          </a:prstGeom>
+          <a:solidFill>
+            <a:srgbClr val="1B365D"/>
+          </a:solidFill>
+          <a:ln/>
+        </p:spPr>
+      </p:sp>
+      <p:sp>
+        <p:nvSpPr>
+          <p:cNvPr id="18" name="Text 15"/>
+          <p:cNvSpPr txBox="1"/>
+          <p:nvPr/>
+        </p:nvSpPr>
+        <p:spPr>
+          <a:xfrm>
+            <a:off x="4663440" y="3392424"/>
+            <a:ext cx="566928" cy="438912"/>
+          </a:xfrm>
+          <a:prstGeom prst="rect">
+            <a:avLst/>
+          </a:prstGeom>
+          <a:noFill/>
+          <a:ln/>
+        </p:spPr>
+        <p:txBody>
+          <a:bodyPr wrap="square" lIns="0" tIns="0" rIns="0" bIns="0" rtlCol="0" anchor="ctr"/>
+          <a:lstStyle/>
+          <a:p>
+            <a:pPr algn="ctr" indent="0" marL="0">
+              <a:lnSpc>
+                <a:spcPct val="115000"/>
+              </a:lnSpc>
+              <a:buNone/>
+            </a:pPr>
+            <a:r>
+              <a:rPr lang="en-US" sz="1050" b="1" dirty="0">
+                <a:solidFill>
+                  <a:srgbClr val="FFFFFF"/>
+                </a:solidFill>
+                <a:latin typeface="BIZ UDPGothic" pitchFamily="34" charset="0"/>
+                <a:ea typeface="BIZ UDPGothic" pitchFamily="34" charset="-122"/>
+                <a:cs typeface="BIZ UDPGothic" pitchFamily="34" charset="-120"/>
+              </a:rPr>
+              <a:t>技術</a:t>
+            </a:r>
+            <a:endParaRPr lang="en-US" sz="1050" dirty="0"/>
+          </a:p>
+        </p:txBody>
+      </p:sp>
+      <p:sp>
+        <p:nvSpPr>
+          <p:cNvPr id="19" name="Text 16"/>
+          <p:cNvSpPr txBox="1"/>
+          <p:nvPr/>
+        </p:nvSpPr>
+        <p:spPr>
+          <a:xfrm>
+            <a:off x="5321808" y="3355848"/>
+            <a:ext cx="3456432" cy="512064"/>
+          </a:xfrm>
+          <a:prstGeom prst="rect">
+            <a:avLst/>
+          </a:prstGeom>
+          <a:noFill/>
+          <a:ln/>
+        </p:spPr>
+        <p:txBody>
+          <a:bodyPr wrap="square" lIns="0" tIns="0" rIns="0" bIns="0" rtlCol="0" anchor="ctr"/>
+          <a:lstStyle/>
+          <a:p>
+            <a:pPr algn="l" indent="0" marL="0">
+              <a:lnSpc>
+                <a:spcPct val="115000"/>
+              </a:lnSpc>
+              <a:buNone/>
+            </a:pPr>
+            <a:r>
+              <a:rPr lang="en-US" sz="950" dirty="0">
+                <a:solidFill>
+                  <a:srgbClr val="1F2933"/>
+                </a:solidFill>
+                <a:latin typeface="BIZ UDPGothic" pitchFamily="34" charset="0"/>
+                <a:ea typeface="BIZ UDPGothic" pitchFamily="34" charset="-122"/>
+                <a:cs typeface="BIZ UDPGothic" pitchFamily="34" charset="-120"/>
+              </a:rPr>
+              <a:t>映像を理解するAIと、約50gのAIグラスが実用レベルになった</a:t>
+            </a:r>
+            <a:endParaRPr lang="en-US" sz="950" dirty="0"/>
+          </a:p>
+        </p:txBody>
+      </p:sp>
+      <p:sp>
+        <p:nvSpPr>
+          <p:cNvPr id="20" name="Shape 17"/>
+          <p:cNvSpPr/>
+          <p:nvPr/>
+        </p:nvSpPr>
+        <p:spPr>
+          <a:xfrm>
+            <a:off x="4663440" y="3941064"/>
+            <a:ext cx="566928" cy="438912"/>
+          </a:xfrm>
+          <a:prstGeom prst="rect">
+            <a:avLst/>
+          </a:prstGeom>
+          <a:solidFill>
+            <a:srgbClr val="2F6DB5"/>
+          </a:solidFill>
+          <a:ln/>
+        </p:spPr>
+      </p:sp>
+      <p:sp>
+        <p:nvSpPr>
+          <p:cNvPr id="21" name="Text 18"/>
+          <p:cNvSpPr txBox="1"/>
+          <p:nvPr/>
+        </p:nvSpPr>
+        <p:spPr>
+          <a:xfrm>
+            <a:off x="4663440" y="3941064"/>
+            <a:ext cx="566928" cy="438912"/>
+          </a:xfrm>
+          <a:prstGeom prst="rect">
+            <a:avLst/>
+          </a:prstGeom>
+          <a:noFill/>
+          <a:ln/>
+        </p:spPr>
+        <p:txBody>
+          <a:bodyPr wrap="square" lIns="0" tIns="0" rIns="0" bIns="0" rtlCol="0" anchor="ctr"/>
+          <a:lstStyle/>
+          <a:p>
+            <a:pPr algn="ctr" indent="0" marL="0">
+              <a:lnSpc>
+                <a:spcPct val="115000"/>
+              </a:lnSpc>
+              <a:buNone/>
+            </a:pPr>
+            <a:r>
+              <a:rPr lang="en-US" sz="1050" b="1" dirty="0">
+                <a:solidFill>
+                  <a:srgbClr val="FFFFFF"/>
+                </a:solidFill>
+                <a:latin typeface="BIZ UDPGothic" pitchFamily="34" charset="0"/>
+                <a:ea typeface="BIZ UDPGothic" pitchFamily="34" charset="-122"/>
+                <a:cs typeface="BIZ UDPGothic" pitchFamily="34" charset="-120"/>
+              </a:rPr>
+              <a:t>自分</a:t>
+            </a:r>
+            <a:endParaRPr lang="en-US" sz="1050" dirty="0"/>
+          </a:p>
+        </p:txBody>
+      </p:sp>
+      <p:sp>
+        <p:nvSpPr>
+          <p:cNvPr id="22" name="Text 19"/>
+          <p:cNvSpPr txBox="1"/>
+          <p:nvPr/>
+        </p:nvSpPr>
+        <p:spPr>
+          <a:xfrm>
+            <a:off x="5321808" y="3904488"/>
+            <a:ext cx="3456432" cy="512064"/>
+          </a:xfrm>
+          <a:prstGeom prst="rect">
+            <a:avLst/>
+          </a:prstGeom>
+          <a:noFill/>
+          <a:ln/>
+        </p:spPr>
+        <p:txBody>
+          <a:bodyPr wrap="square" lIns="0" tIns="0" rIns="0" bIns="0" rtlCol="0" anchor="ctr"/>
+          <a:lstStyle/>
+          <a:p>
+            <a:pPr algn="l" indent="0" marL="0">
+              <a:lnSpc>
+                <a:spcPct val="115000"/>
+              </a:lnSpc>
+              <a:buNone/>
+            </a:pPr>
+            <a:r>
+              <a:rPr lang="en-US" sz="950" dirty="0">
+                <a:solidFill>
+                  <a:srgbClr val="1F2933"/>
+                </a:solidFill>
+                <a:latin typeface="BIZ UDPGothic" pitchFamily="34" charset="0"/>
+                <a:ea typeface="BIZ UDPGothic" pitchFamily="34" charset="-122"/>
+                <a:cs typeface="BIZ UDPGothic" pitchFamily="34" charset="-120"/>
+              </a:rPr>
+              <a:t>地中送電線の施工管理を5年。現場とAI実装の両方がわかる</a:t>
+            </a:r>
+            <a:endParaRPr lang="en-US" sz="950" dirty="0"/>
+          </a:p>
+        </p:txBody>
+      </p:sp>
+      <p:sp>
+        <p:nvSpPr>
+          <p:cNvPr id="23" name="Text 20"/>
           <p:cNvSpPr txBox="1"/>
           <p:nvPr/>
         </p:nvSpPr>
@@ -23526,7 +23497,7 @@
                 <a:ea typeface="BIZ UDPGothic" pitchFamily="34" charset="-122"/>
                 <a:cs typeface="BIZ UDPGothic" pitchFamily="34" charset="-120"/>
               </a:rPr>
-              <a:t>最初の顧客：関東の中堅電気工事会社（施工管理者30人以上）。成長期以降に電線・素材の工場へ広げる</a:t>
+              <a:t>最初の顧客：関東の中堅電気工事会社（施工管理者30人以上）。収益構造は p.11、他社との違いは p.6</a:t>
             </a:r>
             <a:endParaRPr lang="en-US" sz="750" dirty="0"/>
           </a:p>
@@ -25087,7 +25058,7 @@
                 <a:ea typeface="BIZ UDPGothic" pitchFamily="34" charset="-122"/>
                 <a:cs typeface="BIZ UDPGothic" pitchFamily="34" charset="-120"/>
               </a:rPr>
-              <a:t>解決策：作業を自動で記録し、3つの形で渡す</a:t>
+              <a:t>解決策：掛けて働くだけで、記録・整理・引き継ぎまで</a:t>
             </a:r>
             <a:endParaRPr lang="en-US" sz="1850" dirty="0"/>
           </a:p>
@@ -25129,7 +25100,7 @@
                 <a:ea typeface="BIZ UDPGothic" pitchFamily="34" charset="-122"/>
                 <a:cs typeface="BIZ UDPGothic" pitchFamily="34" charset="-120"/>
               </a:rPr>
-              <a:t>デモ（架空のケーブル接続工事）：若手の作業を記録し、図面との8mmの差を見つけ、報告書と教材にする</a:t>
+              <a:t>図面と違う所をその場で教え、書類まで作る「記録係」。電気工事を知らなくても、この3段階で見てください</a:t>
             </a:r>
             <a:endParaRPr lang="en-US" sz="1050" dirty="0"/>
           </a:p>
@@ -25160,7 +25131,7 @@
       </p:sp>
       <p:pic>
         <p:nvPicPr>
-          <p:cNvPr id="9" name="Image 0" descr="/home/user/-ai-commute-audio-/deck/assets/shot-glass.png">    </p:cNvPr>
+          <p:cNvPr id="9" name="Image 0" descr="/home/user/-ai-commute-audio-/deck/assets/shot-overview-large.png">    </p:cNvPr>
           <p:cNvPicPr>
             <a:picLocks noChangeAspect="1"/>
           </p:cNvPicPr>
@@ -25175,7 +25146,7 @@
         <p:spPr>
           <a:xfrm>
             <a:off x="365760" y="1005840"/>
-            <a:ext cx="4572000" cy="1919395"/>
+            <a:ext cx="4800600" cy="2021305"/>
           </a:xfrm>
           <a:prstGeom prst="rect">
             <a:avLst/>
@@ -25184,14 +25155,56 @@
       </p:pic>
       <p:sp>
         <p:nvSpPr>
-          <p:cNvPr id="10" name="Shape 6"/>
+          <p:cNvPr id="10" name="Text 6"/>
+          <p:cNvSpPr txBox="1"/>
+          <p:nvPr/>
+        </p:nvSpPr>
+        <p:spPr>
+          <a:xfrm>
+            <a:off x="365760" y="3082009"/>
+            <a:ext cx="4800600" cy="237744"/>
+          </a:xfrm>
+          <a:prstGeom prst="rect">
+            <a:avLst/>
+          </a:prstGeom>
+          <a:noFill/>
+          <a:ln/>
+        </p:spPr>
+        <p:txBody>
+          <a:bodyPr wrap="square" lIns="0" tIns="0" rIns="0" bIns="0" rtlCol="0" anchor="t"/>
+          <a:lstStyle/>
+          <a:p>
+            <a:pPr algn="l" indent="0" marL="0">
+              <a:lnSpc>
+                <a:spcPct val="115000"/>
+              </a:lnSpc>
+              <a:buNone/>
+            </a:pPr>
+            <a:r>
+              <a:rPr lang="en-US" sz="1050" b="1" dirty="0">
+                <a:solidFill>
+                  <a:srgbClr val="1B365D"/>
+                </a:solidFill>
+                <a:latin typeface="BIZ UDPGothic" pitchFamily="34" charset="0"/>
+                <a:ea typeface="BIZ UDPGothic" pitchFamily="34" charset="-122"/>
+                <a:cs typeface="BIZ UDPGothic" pitchFamily="34" charset="-120"/>
+              </a:rPr>
+              <a:t>例（デモ）：ケーブルをつなぐ作業</a:t>
+            </a:r>
+            <a:endParaRPr lang="en-US" sz="1050" dirty="0"/>
+          </a:p>
+        </p:txBody>
+      </p:sp>
+      <p:sp>
+        <p:nvSpPr>
+          <p:cNvPr id="11" name="Shape 7"/>
           <p:cNvSpPr/>
           <p:nvPr/>
         </p:nvSpPr>
         <p:spPr>
           <a:xfrm>
-            <a:off x="365760" y="3044107"/>
-            <a:ext cx="457200" cy="228600"/>
+            <a:off x="365760" y="3383761"/>
+            <a:ext cx="713232" cy="237744"/>
           </a:xfrm>
           <a:prstGeom prst="rect">
             <a:avLst/>
@@ -25204,14 +25217,14 @@
       </p:sp>
       <p:sp>
         <p:nvSpPr>
-          <p:cNvPr id="11" name="Text 7"/>
+          <p:cNvPr id="12" name="Text 8"/>
           <p:cNvSpPr txBox="1"/>
           <p:nvPr/>
         </p:nvSpPr>
         <p:spPr>
           <a:xfrm>
-            <a:off x="365760" y="3044107"/>
-            <a:ext cx="457200" cy="228600"/>
+            <a:off x="365760" y="3383761"/>
+            <a:ext cx="713232" cy="237744"/>
           </a:xfrm>
           <a:prstGeom prst="rect">
             <a:avLst/>
@@ -25238,7 +25251,7 @@
                 <a:ea typeface="BIZ UDPGothic" pitchFamily="34" charset="-122"/>
                 <a:cs typeface="BIZ UDPGothic" pitchFamily="34" charset="-120"/>
               </a:rPr>
-              <a:t>検出</a:t>
+              <a:t>見つける</a:t>
             </a:r>
             <a:endParaRPr lang="en-US" sz="900" dirty="0"/>
           </a:p>
@@ -25246,14 +25259,14 @@
       </p:sp>
       <p:sp>
         <p:nvSpPr>
-          <p:cNvPr id="12" name="Text 8"/>
+          <p:cNvPr id="13" name="Text 9"/>
           <p:cNvSpPr txBox="1"/>
           <p:nvPr/>
         </p:nvSpPr>
         <p:spPr>
           <a:xfrm>
-            <a:off x="914400" y="3016675"/>
-            <a:ext cx="4023360" cy="283464"/>
+            <a:off x="1170432" y="3356329"/>
+            <a:ext cx="3995928" cy="292608"/>
           </a:xfrm>
           <a:prstGeom prst="rect">
             <a:avLst/>
@@ -25280,7 +25293,7 @@
                 <a:ea typeface="BIZ UDPGothic" pitchFamily="34" charset="-122"/>
                 <a:cs typeface="BIZ UDPGothic" pitchFamily="34" charset="-120"/>
               </a:rPr>
-              <a:t>半導電層の端部 実測112mm／図面120mm（8mm不足）</a:t>
+              <a:t>図面は120mm、実物は112mm。8mm短いことをその場で知らせる</a:t>
             </a:r>
             <a:endParaRPr lang="en-US" sz="950" dirty="0"/>
           </a:p>
@@ -25288,14 +25301,14 @@
       </p:sp>
       <p:sp>
         <p:nvSpPr>
-          <p:cNvPr id="13" name="Shape 9"/>
+          <p:cNvPr id="14" name="Shape 10"/>
           <p:cNvSpPr/>
           <p:nvPr/>
         </p:nvSpPr>
         <p:spPr>
           <a:xfrm>
-            <a:off x="365760" y="3336715"/>
-            <a:ext cx="457200" cy="228600"/>
+            <a:off x="365760" y="3685513"/>
+            <a:ext cx="713232" cy="237744"/>
           </a:xfrm>
           <a:prstGeom prst="rect">
             <a:avLst/>
@@ -25308,14 +25321,14 @@
       </p:sp>
       <p:sp>
         <p:nvSpPr>
-          <p:cNvPr id="14" name="Text 10"/>
+          <p:cNvPr id="15" name="Text 11"/>
           <p:cNvSpPr txBox="1"/>
           <p:nvPr/>
         </p:nvSpPr>
         <p:spPr>
           <a:xfrm>
-            <a:off x="365760" y="3336715"/>
-            <a:ext cx="457200" cy="228600"/>
+            <a:off x="365760" y="3685513"/>
+            <a:ext cx="713232" cy="237744"/>
           </a:xfrm>
           <a:prstGeom prst="rect">
             <a:avLst/>
@@ -25342,7 +25355,7 @@
                 <a:ea typeface="BIZ UDPGothic" pitchFamily="34" charset="-122"/>
                 <a:cs typeface="BIZ UDPGothic" pitchFamily="34" charset="-120"/>
               </a:rPr>
-              <a:t>是正</a:t>
+              <a:t>直す</a:t>
             </a:r>
             <a:endParaRPr lang="en-US" sz="900" dirty="0"/>
           </a:p>
@@ -25350,14 +25363,14 @@
       </p:sp>
       <p:sp>
         <p:nvSpPr>
-          <p:cNvPr id="15" name="Text 11"/>
+          <p:cNvPr id="16" name="Text 12"/>
           <p:cNvSpPr txBox="1"/>
           <p:nvPr/>
         </p:nvSpPr>
         <p:spPr>
           <a:xfrm>
-            <a:off x="914400" y="3309283"/>
-            <a:ext cx="4023360" cy="283464"/>
+            <a:off x="1170432" y="3658081"/>
+            <a:ext cx="3995928" cy="292608"/>
           </a:xfrm>
           <a:prstGeom prst="rect">
             <a:avLst/>
@@ -25384,7 +25397,7 @@
                 <a:ea typeface="BIZ UDPGothic" pitchFamily="34" charset="-122"/>
                 <a:cs typeface="BIZ UDPGothic" pitchFamily="34" charset="-120"/>
               </a:rPr>
-              <a:t>遠隔の熟練者が「テープ基準で測り直す」と指示。判断として記録</a:t>
+              <a:t>離れた所にいるベテランが「測り直せ」と指示。その判断も記録する</a:t>
             </a:r>
             <a:endParaRPr lang="en-US" sz="950" dirty="0"/>
           </a:p>
@@ -25392,14 +25405,14 @@
       </p:sp>
       <p:sp>
         <p:nvSpPr>
-          <p:cNvPr id="16" name="Shape 12"/>
+          <p:cNvPr id="17" name="Shape 13"/>
           <p:cNvSpPr/>
           <p:nvPr/>
         </p:nvSpPr>
         <p:spPr>
           <a:xfrm>
-            <a:off x="365760" y="3629323"/>
-            <a:ext cx="457200" cy="228600"/>
+            <a:off x="365760" y="3987265"/>
+            <a:ext cx="713232" cy="237744"/>
           </a:xfrm>
           <a:prstGeom prst="rect">
             <a:avLst/>
@@ -25412,14 +25425,14 @@
       </p:sp>
       <p:sp>
         <p:nvSpPr>
-          <p:cNvPr id="17" name="Text 13"/>
+          <p:cNvPr id="18" name="Text 14"/>
           <p:cNvSpPr txBox="1"/>
           <p:nvPr/>
         </p:nvSpPr>
         <p:spPr>
           <a:xfrm>
-            <a:off x="365760" y="3629323"/>
-            <a:ext cx="457200" cy="228600"/>
+            <a:off x="365760" y="3987265"/>
+            <a:ext cx="713232" cy="237744"/>
           </a:xfrm>
           <a:prstGeom prst="rect">
             <a:avLst/>
@@ -25446,7 +25459,7 @@
                 <a:ea typeface="BIZ UDPGothic" pitchFamily="34" charset="-122"/>
                 <a:cs typeface="BIZ UDPGothic" pitchFamily="34" charset="-120"/>
               </a:rPr>
-              <a:t>報告</a:t>
+              <a:t>まとめる</a:t>
             </a:r>
             <a:endParaRPr lang="en-US" sz="900" dirty="0"/>
           </a:p>
@@ -25454,14 +25467,14 @@
       </p:sp>
       <p:sp>
         <p:nvSpPr>
-          <p:cNvPr id="18" name="Text 14"/>
+          <p:cNvPr id="19" name="Text 15"/>
           <p:cNvSpPr txBox="1"/>
           <p:nvPr/>
         </p:nvSpPr>
         <p:spPr>
           <a:xfrm>
-            <a:off x="914400" y="3601891"/>
-            <a:ext cx="4023360" cy="283464"/>
+            <a:off x="1170432" y="3959833"/>
+            <a:ext cx="3995928" cy="292608"/>
           </a:xfrm>
           <a:prstGeom prst="rect">
             <a:avLst/>
@@ -25488,22 +25501,46 @@
                 <a:ea typeface="BIZ UDPGothic" pitchFamily="34" charset="-122"/>
                 <a:cs typeface="BIZ UDPGothic" pitchFamily="34" charset="-120"/>
               </a:rPr>
-              <a:t>手順ごとに写真を自動割当。作業者の報告書作成は0分</a:t>
+              <a:t>写真は手順ごとに報告書へ。作業者が書く時間は0分</a:t>
             </a:r>
             <a:endParaRPr lang="en-US" sz="950" dirty="0"/>
           </a:p>
         </p:txBody>
       </p:sp>
-      <p:sp>
-        <p:nvSpPr>
-          <p:cNvPr id="19" name="Text 15"/>
+      <p:pic>
+        <p:nvPicPr>
+          <p:cNvPr id="20" name="Image 1" descr="/home/user/-ai-commute-audio-/deck/assets/shot-glass.png">    </p:cNvPr>
+          <p:cNvPicPr>
+            <a:picLocks noChangeAspect="1"/>
+          </p:cNvPicPr>
+          <p:nvPr/>
+        </p:nvPicPr>
+        <p:blipFill>
+          <a:blip r:embed="rId2"/>
+          <a:stretch>
+            <a:fillRect/>
+          </a:stretch>
+        </p:blipFill>
+        <p:spPr>
+          <a:xfrm>
+            <a:off x="5349240" y="1005840"/>
+            <a:ext cx="3429000" cy="1439547"/>
+          </a:xfrm>
+          <a:prstGeom prst="rect">
+            <a:avLst/>
+          </a:prstGeom>
+        </p:spPr>
+      </p:pic>
+      <p:sp>
+        <p:nvSpPr>
+          <p:cNvPr id="21" name="Text 16"/>
           <p:cNvSpPr txBox="1"/>
           <p:nvPr/>
         </p:nvSpPr>
         <p:spPr>
           <a:xfrm>
-            <a:off x="5120640" y="1005840"/>
-            <a:ext cx="3657600" cy="237744"/>
+            <a:off x="5349240" y="2463675"/>
+            <a:ext cx="3429000" cy="201168"/>
           </a:xfrm>
           <a:prstGeom prst="rect">
             <a:avLst/>
@@ -25522,276 +25559,30 @@
               <a:buNone/>
             </a:pPr>
             <a:r>
-              <a:rPr lang="en-US" sz="1100" b="1" dirty="0">
+              <a:rPr lang="en-US" sz="800" dirty="0">
                 <a:solidFill>
-                  <a:srgbClr val="1F2933"/>
+                  <a:srgbClr val="4A5563"/>
                 </a:solidFill>
                 <a:latin typeface="BIZ UDPGothic" pitchFamily="34" charset="0"/>
                 <a:ea typeface="BIZ UDPGothic" pitchFamily="34" charset="-122"/>
                 <a:cs typeface="BIZ UDPGothic" pitchFamily="34" charset="-120"/>
               </a:rPr>
-              <a:t>渡す先は3つ</a:t>
+              <a:t>デモ画面：AIグラスに映る表示（架空の工事）</a:t>
             </a:r>
-            <a:endParaRPr lang="en-US" sz="1100" dirty="0"/>
+            <a:endParaRPr lang="en-US" sz="800" dirty="0"/>
           </a:p>
         </p:txBody>
       </p:sp>
       <p:sp>
         <p:nvSpPr>
-          <p:cNvPr id="20" name="Shape 16"/>
+          <p:cNvPr id="22" name="Shape 17"/>
           <p:cNvSpPr/>
           <p:nvPr/>
         </p:nvSpPr>
         <p:spPr>
           <a:xfrm>
-            <a:off x="5120640" y="1280160"/>
-            <a:ext cx="3657600" cy="0"/>
-          </a:xfrm>
-          <a:prstGeom prst="line">
-            <a:avLst/>
-          </a:prstGeom>
-          <a:noFill/>
-          <a:ln w="9525">
-            <a:solidFill>
-              <a:srgbClr val="B8C4D0"/>
-            </a:solidFill>
-            <a:prstDash val="solid"/>
-          </a:ln>
-        </p:spPr>
-      </p:sp>
-      <p:sp>
-        <p:nvSpPr>
-          <p:cNvPr id="21" name="Text 17"/>
-          <p:cNvSpPr txBox="1"/>
-          <p:nvPr/>
-        </p:nvSpPr>
-        <p:spPr>
-          <a:xfrm>
-            <a:off x="5120640" y="1298448"/>
-            <a:ext cx="3657600" cy="365760"/>
-          </a:xfrm>
-          <a:prstGeom prst="rect">
-            <a:avLst/>
-          </a:prstGeom>
-          <a:noFill/>
-          <a:ln/>
-        </p:spPr>
-        <p:txBody>
-          <a:bodyPr wrap="square" lIns="0" tIns="0" rIns="0" bIns="0" rtlCol="0" anchor="ctr"/>
-          <a:lstStyle/>
-          <a:p>
-            <a:pPr algn="l" indent="0" marL="0">
-              <a:lnSpc>
-                <a:spcPct val="115000"/>
-              </a:lnSpc>
-              <a:buNone/>
-            </a:pPr>
-            <a:r>
-              <a:rPr lang="en-US" sz="950" b="1" dirty="0">
-                <a:solidFill>
-                  <a:srgbClr val="2F6DB5"/>
-                </a:solidFill>
-                <a:latin typeface="BIZ UDPGothic" pitchFamily="34" charset="0"/>
-                <a:ea typeface="BIZ UDPGothic" pitchFamily="34" charset="-122"/>
-                <a:cs typeface="BIZ UDPGothic" pitchFamily="34" charset="-120"/>
-              </a:rPr>
-              <a:t>若手へ　</a:t>
-            </a:r>
-            <a:pPr algn="l" indent="0" marL="0">
-              <a:lnSpc>
-                <a:spcPct val="115000"/>
-              </a:lnSpc>
-              <a:buNone/>
-            </a:pPr>
-            <a:r>
-              <a:rPr lang="en-US" sz="950" dirty="0">
-                <a:solidFill>
-                  <a:srgbClr val="1F2933"/>
-                </a:solidFill>
-                <a:latin typeface="BIZ UDPGothic" pitchFamily="34" charset="0"/>
-                <a:ea typeface="BIZ UDPGothic" pitchFamily="34" charset="-122"/>
-                <a:cs typeface="BIZ UDPGothic" pitchFamily="34" charset="-120"/>
-              </a:rPr>
-              <a:t>図面・手順を現物に重ね、差異をその場で表示</a:t>
-            </a:r>
-            <a:endParaRPr lang="en-US" sz="950" dirty="0"/>
-          </a:p>
-        </p:txBody>
-      </p:sp>
-      <p:sp>
-        <p:nvSpPr>
-          <p:cNvPr id="22" name="Shape 18"/>
-          <p:cNvSpPr/>
-          <p:nvPr/>
-        </p:nvSpPr>
-        <p:spPr>
-          <a:xfrm>
-            <a:off x="5120640" y="1664208"/>
-            <a:ext cx="3657600" cy="0"/>
-          </a:xfrm>
-          <a:prstGeom prst="line">
-            <a:avLst/>
-          </a:prstGeom>
-          <a:noFill/>
-          <a:ln w="9525">
-            <a:solidFill>
-              <a:srgbClr val="B8C4D0"/>
-            </a:solidFill>
-            <a:prstDash val="solid"/>
-          </a:ln>
-        </p:spPr>
-      </p:sp>
-      <p:sp>
-        <p:nvSpPr>
-          <p:cNvPr id="23" name="Text 19"/>
-          <p:cNvSpPr txBox="1"/>
-          <p:nvPr/>
-        </p:nvSpPr>
-        <p:spPr>
-          <a:xfrm>
-            <a:off x="5120640" y="1682496"/>
-            <a:ext cx="3657600" cy="365760"/>
-          </a:xfrm>
-          <a:prstGeom prst="rect">
-            <a:avLst/>
-          </a:prstGeom>
-          <a:noFill/>
-          <a:ln/>
-        </p:spPr>
-        <p:txBody>
-          <a:bodyPr wrap="square" lIns="0" tIns="0" rIns="0" bIns="0" rtlCol="0" anchor="ctr"/>
-          <a:lstStyle/>
-          <a:p>
-            <a:pPr algn="l" indent="0" marL="0">
-              <a:lnSpc>
-                <a:spcPct val="115000"/>
-              </a:lnSpc>
-              <a:buNone/>
-            </a:pPr>
-            <a:r>
-              <a:rPr lang="en-US" sz="950" b="1" dirty="0">
-                <a:solidFill>
-                  <a:srgbClr val="2F6DB5"/>
-                </a:solidFill>
-                <a:latin typeface="BIZ UDPGothic" pitchFamily="34" charset="0"/>
-                <a:ea typeface="BIZ UDPGothic" pitchFamily="34" charset="-122"/>
-                <a:cs typeface="BIZ UDPGothic" pitchFamily="34" charset="-120"/>
-              </a:rPr>
-              <a:t>管理者へ　</a:t>
-            </a:r>
-            <a:pPr algn="l" indent="0" marL="0">
-              <a:lnSpc>
-                <a:spcPct val="115000"/>
-              </a:lnSpc>
-              <a:buNone/>
-            </a:pPr>
-            <a:r>
-              <a:rPr lang="en-US" sz="950" dirty="0">
-                <a:solidFill>
-                  <a:srgbClr val="1F2933"/>
-                </a:solidFill>
-                <a:latin typeface="BIZ UDPGothic" pitchFamily="34" charset="0"/>
-                <a:ea typeface="BIZ UDPGothic" pitchFamily="34" charset="-122"/>
-                <a:cs typeface="BIZ UDPGothic" pitchFamily="34" charset="-120"/>
-              </a:rPr>
-              <a:t>写真を抜き出し、当日の写真台帳・日報を自動作成</a:t>
-            </a:r>
-            <a:endParaRPr lang="en-US" sz="950" dirty="0"/>
-          </a:p>
-        </p:txBody>
-      </p:sp>
-      <p:sp>
-        <p:nvSpPr>
-          <p:cNvPr id="24" name="Shape 20"/>
-          <p:cNvSpPr/>
-          <p:nvPr/>
-        </p:nvSpPr>
-        <p:spPr>
-          <a:xfrm>
-            <a:off x="5120640" y="2048256"/>
-            <a:ext cx="3657600" cy="0"/>
-          </a:xfrm>
-          <a:prstGeom prst="line">
-            <a:avLst/>
-          </a:prstGeom>
-          <a:noFill/>
-          <a:ln w="9525">
-            <a:solidFill>
-              <a:srgbClr val="B8C4D0"/>
-            </a:solidFill>
-            <a:prstDash val="solid"/>
-          </a:ln>
-        </p:spPr>
-      </p:sp>
-      <p:sp>
-        <p:nvSpPr>
-          <p:cNvPr id="25" name="Text 21"/>
-          <p:cNvSpPr txBox="1"/>
-          <p:nvPr/>
-        </p:nvSpPr>
-        <p:spPr>
-          <a:xfrm>
-            <a:off x="5120640" y="2066544"/>
-            <a:ext cx="3657600" cy="365760"/>
-          </a:xfrm>
-          <a:prstGeom prst="rect">
-            <a:avLst/>
-          </a:prstGeom>
-          <a:noFill/>
-          <a:ln/>
-        </p:spPr>
-        <p:txBody>
-          <a:bodyPr wrap="square" lIns="0" tIns="0" rIns="0" bIns="0" rtlCol="0" anchor="ctr"/>
-          <a:lstStyle/>
-          <a:p>
-            <a:pPr algn="l" indent="0" marL="0">
-              <a:lnSpc>
-                <a:spcPct val="115000"/>
-              </a:lnSpc>
-              <a:buNone/>
-            </a:pPr>
-            <a:r>
-              <a:rPr lang="en-US" sz="950" b="1" dirty="0">
-                <a:solidFill>
-                  <a:srgbClr val="2F6DB5"/>
-                </a:solidFill>
-                <a:latin typeface="BIZ UDPGothic" pitchFamily="34" charset="0"/>
-                <a:ea typeface="BIZ UDPGothic" pitchFamily="34" charset="-122"/>
-                <a:cs typeface="BIZ UDPGothic" pitchFamily="34" charset="-120"/>
-              </a:rPr>
-              <a:t>次の担い手へ　</a:t>
-            </a:r>
-            <a:pPr algn="l" indent="0" marL="0">
-              <a:lnSpc>
-                <a:spcPct val="115000"/>
-              </a:lnSpc>
-              <a:buNone/>
-            </a:pPr>
-            <a:r>
-              <a:rPr lang="en-US" sz="950" dirty="0">
-                <a:solidFill>
-                  <a:srgbClr val="1F2933"/>
-                </a:solidFill>
-                <a:latin typeface="BIZ UDPGothic" pitchFamily="34" charset="0"/>
-                <a:ea typeface="BIZ UDPGothic" pitchFamily="34" charset="-122"/>
-                <a:cs typeface="BIZ UDPGothic" pitchFamily="34" charset="-120"/>
-              </a:rPr>
-              <a:t>ベテランの判断を、動画・音声・研修資料の教材に</a:t>
-            </a:r>
-            <a:endParaRPr lang="en-US" sz="950" dirty="0"/>
-          </a:p>
-        </p:txBody>
-      </p:sp>
-      <p:sp>
-        <p:nvSpPr>
-          <p:cNvPr id="26" name="Shape 22"/>
-          <p:cNvSpPr/>
-          <p:nvPr/>
-        </p:nvSpPr>
-        <p:spPr>
-          <a:xfrm>
-            <a:off x="5120640" y="2423160"/>
-            <a:ext cx="3657600" cy="2029968"/>
+            <a:off x="5349240" y="2719707"/>
+            <a:ext cx="3429000" cy="1733421"/>
           </a:xfrm>
           <a:prstGeom prst="rect">
             <a:avLst/>
@@ -25804,14 +25595,14 @@
       </p:sp>
       <p:sp>
         <p:nvSpPr>
-          <p:cNvPr id="27" name="Text 23"/>
+          <p:cNvPr id="23" name="Text 18"/>
           <p:cNvSpPr txBox="1"/>
           <p:nvPr/>
         </p:nvSpPr>
         <p:spPr>
           <a:xfrm>
-            <a:off x="5248656" y="2468880"/>
-            <a:ext cx="3401568" cy="1938528"/>
+            <a:off x="5477256" y="2719707"/>
+            <a:ext cx="3172968" cy="1733421"/>
           </a:xfrm>
           <a:prstGeom prst="rect">
             <a:avLst/>
@@ -25828,7 +25619,7 @@
                 <a:spcPct val="115000"/>
               </a:lnSpc>
               <a:spcAft>
-                <a:spcPts val="200"/>
+                <a:spcPts val="300"/>
               </a:spcAft>
               <a:buNone/>
             </a:pPr>
@@ -25841,14 +25632,14 @@
                 <a:ea typeface="BIZ UDPGothic" pitchFamily="34" charset="-122"/>
                 <a:cs typeface="BIZ UDPGothic" pitchFamily="34" charset="-120"/>
               </a:rPr>
-              <a:t>他社がすぐに真似できない理由（3つ）</a:t>
+              <a:t>他社がすぐに真似できない理由</a:t>
             </a:r>
             <a:pPr algn="l" indent="0" marL="0">
               <a:lnSpc>
                 <a:spcPct val="115000"/>
               </a:lnSpc>
               <a:spcAft>
-                <a:spcPts val="200"/>
+                <a:spcPts val="300"/>
               </a:spcAft>
               <a:buNone/>
             </a:pPr>
@@ -25860,12 +25651,12 @@
                 <a:spcPct val="115000"/>
               </a:lnSpc>
               <a:spcAft>
-                <a:spcPts val="200"/>
+                <a:spcPts val="300"/>
               </a:spcAft>
               <a:buNone/>
             </a:pPr>
             <a:r>
-              <a:rPr lang="en-US" sz="950" b="1" dirty="0">
+              <a:rPr lang="en-US" sz="950" dirty="0">
                 <a:solidFill>
                   <a:srgbClr val="FFFFFF"/>
                 </a:solidFill>
@@ -25873,7 +25664,7 @@
                 <a:ea typeface="BIZ UDPGothic" pitchFamily="34" charset="-122"/>
                 <a:cs typeface="BIZ UDPGothic" pitchFamily="34" charset="-120"/>
               </a:rPr>
-              <a:t>1. 記録は使うほど貯まる</a:t>
+              <a:t>1. 記録は使うほど貯まり、後から来た会社に移せない</a:t>
             </a:r>
             <a:endParaRPr lang="en-US" sz="950" dirty="0"/>
           </a:p>
@@ -25883,12 +25674,12 @@
                 <a:spcPct val="115000"/>
               </a:lnSpc>
               <a:spcAft>
-                <a:spcPts val="200"/>
+                <a:spcPts val="300"/>
               </a:spcAft>
               <a:buNone/>
             </a:pPr>
             <a:r>
-              <a:rPr lang="en-US" sz="850" dirty="0">
+              <a:rPr lang="en-US" sz="950" dirty="0">
                 <a:solidFill>
                   <a:srgbClr val="FFFFFF"/>
                 </a:solidFill>
@@ -25896,7 +25687,7 @@
                 <a:ea typeface="BIZ UDPGothic" pitchFamily="34" charset="-122"/>
                 <a:cs typeface="BIZ UDPGothic" pitchFamily="34" charset="-120"/>
               </a:rPr>
-              <a:t>図面に残らない現場処置の記録は、後から来た会社に移せない</a:t>
+              <a:t>2. 大事な場面を判断できるのは施工経験者だけ</a:t>
             </a:r>
             <a:endParaRPr lang="en-US" sz="950" dirty="0"/>
           </a:p>
@@ -25906,12 +25697,12 @@
                 <a:spcPct val="115000"/>
               </a:lnSpc>
               <a:spcAft>
-                <a:spcPts val="200"/>
+                <a:spcPts val="300"/>
               </a:spcAft>
               <a:buNone/>
             </a:pPr>
             <a:r>
-              <a:rPr lang="en-US" sz="950" b="1" dirty="0">
+              <a:rPr lang="en-US" sz="950" dirty="0">
                 <a:solidFill>
                   <a:srgbClr val="FFFFFF"/>
                 </a:solidFill>
@@ -25919,76 +25710,7 @@
                 <a:ea typeface="BIZ UDPGothic" pitchFamily="34" charset="-122"/>
                 <a:cs typeface="BIZ UDPGothic" pitchFamily="34" charset="-120"/>
               </a:rPr>
-              <a:t>2. 大事な場面の判断は施工経験者にしかできない</a:t>
-            </a:r>
-            <a:endParaRPr lang="en-US" sz="950" dirty="0"/>
-          </a:p>
-          <a:p>
-            <a:pPr algn="l" indent="0" marL="0">
-              <a:lnSpc>
-                <a:spcPct val="115000"/>
-              </a:lnSpc>
-              <a:spcAft>
-                <a:spcPts val="200"/>
-              </a:spcAft>
-              <a:buNone/>
-            </a:pPr>
-            <a:r>
-              <a:rPr lang="en-US" sz="850" dirty="0">
-                <a:solidFill>
-                  <a:srgbClr val="FFFFFF"/>
-                </a:solidFill>
-                <a:latin typeface="BIZ UDPGothic" pitchFamily="34" charset="0"/>
-                <a:ea typeface="BIZ UDPGothic" pitchFamily="34" charset="-122"/>
-                <a:cs typeface="BIZ UDPGothic" pitchFamily="34" charset="-120"/>
-              </a:rPr>
-              <a:t>現場監修が映像に印を付け、その印でAIを学習させる</a:t>
-            </a:r>
-            <a:endParaRPr lang="en-US" sz="950" dirty="0"/>
-          </a:p>
-          <a:p>
-            <a:pPr algn="l" indent="0" marL="0">
-              <a:lnSpc>
-                <a:spcPct val="115000"/>
-              </a:lnSpc>
-              <a:spcAft>
-                <a:spcPts val="200"/>
-              </a:spcAft>
-              <a:buNone/>
-            </a:pPr>
-            <a:r>
-              <a:rPr lang="en-US" sz="950" b="1" dirty="0">
-                <a:solidFill>
-                  <a:srgbClr val="FFFFFF"/>
-                </a:solidFill>
-                <a:latin typeface="BIZ UDPGothic" pitchFamily="34" charset="0"/>
-                <a:ea typeface="BIZ UDPGothic" pitchFamily="34" charset="-122"/>
-                <a:cs typeface="BIZ UDPGothic" pitchFamily="34" charset="-120"/>
-              </a:rPr>
-              <a:t>3. 電気工事の型を先に揃える</a:t>
-            </a:r>
-            <a:endParaRPr lang="en-US" sz="950" dirty="0"/>
-          </a:p>
-          <a:p>
-            <a:pPr algn="l" indent="0" marL="0">
-              <a:lnSpc>
-                <a:spcPct val="115000"/>
-              </a:lnSpc>
-              <a:spcAft>
-                <a:spcPts val="200"/>
-              </a:spcAft>
-              <a:buNone/>
-            </a:pPr>
-            <a:r>
-              <a:rPr lang="en-US" sz="850" dirty="0">
-                <a:solidFill>
-                  <a:srgbClr val="FFFFFF"/>
-                </a:solidFill>
-                <a:latin typeface="BIZ UDPGothic" pitchFamily="34" charset="0"/>
-                <a:ea typeface="BIZ UDPGothic" pitchFamily="34" charset="-122"/>
-                <a:cs typeface="BIZ UDPGothic" pitchFamily="34" charset="-120"/>
-              </a:rPr>
-              <a:t>工種ごとの手順と、発注者ごとの報告書の書式</a:t>
+              <a:t>3. 電気工事の手順と報告書の型を先に揃える</a:t>
             </a:r>
             <a:endParaRPr lang="en-US" sz="950" dirty="0"/>
           </a:p>
@@ -25996,7 +25718,7 @@
       </p:sp>
       <p:sp>
         <p:nvSpPr>
-          <p:cNvPr id="28" name="Text 24"/>
+          <p:cNvPr id="24" name="Text 19"/>
           <p:cNvSpPr txBox="1"/>
           <p:nvPr/>
         </p:nvSpPr>
@@ -26030,7 +25752,7 @@
                 <a:ea typeface="BIZ UDPGothic" pitchFamily="34" charset="-122"/>
                 <a:cs typeface="BIZ UDPGothic" pitchFamily="34" charset="-120"/>
               </a:rPr>
-              <a:t>デモアプリは claude.ai 上で再生できる（作業の再生・1件ずつ送り・全体像）。寸法・人物はすべて架空</a:t>
+              <a:t>寸法・人物はすべて架空。デモアプリは claude.ai 上で再生できる（作業の再生・1件ずつ送り・全体像）</a:t>
             </a:r>
             <a:endParaRPr lang="en-US" sz="750" dirty="0"/>
           </a:p>
@@ -33027,7 +32749,7 @@
                 <a:ea typeface="BIZ UDPGothic" pitchFamily="34" charset="-122"/>
                 <a:cs typeface="BIZ UDPGothic" pitchFamily="34" charset="-120"/>
               </a:rPr>
-              <a:t>経営理念：現場の勘を、次の担い手へ。</a:t>
+              <a:t>経営理念：現場の勘を次の担い手へ</a:t>
             </a:r>
             <a:endParaRPr lang="en-US" sz="1850" dirty="0"/>
           </a:p>
@@ -33180,7 +32902,7 @@
                 <a:ea typeface="BIZ UDPGothic" pitchFamily="34" charset="-122"/>
                 <a:cs typeface="BIZ UDPGothic" pitchFamily="34" charset="-120"/>
               </a:rPr>
-              <a:t>現場の勘を、</a:t>
+              <a:t>現場の勘を</a:t>
             </a:r>
             <a:endParaRPr lang="en-US" sz="1100" dirty="0"/>
           </a:p>
@@ -33203,7 +32925,7 @@
                 <a:ea typeface="BIZ UDPGothic" pitchFamily="34" charset="-122"/>
                 <a:cs typeface="BIZ UDPGothic" pitchFamily="34" charset="-120"/>
               </a:rPr>
-              <a:t>次の担い手へ。</a:t>
+              <a:t>次の担い手へ</a:t>
             </a:r>
             <a:endParaRPr lang="en-US" sz="1100" dirty="0"/>
           </a:p>
@@ -34450,7 +34172,7 @@
                 <a:ea typeface="BIZ UDPGothic" pitchFamily="34" charset="-122"/>
                 <a:cs typeface="BIZ UDPGothic" pitchFamily="34" charset="-120"/>
               </a:rPr>
-              <a:t>市場とターゲット：約141億円。最初は関東の中堅に絞る</a:t>
+              <a:t>市場とターゲット：約141億円（推定）。まず関東の中堅</a:t>
             </a:r>
             <a:endParaRPr lang="en-US" sz="1850" dirty="0"/>
           </a:p>
@@ -35153,7 +34875,7 @@
                           <a:ea typeface="BIZ UDPGothic" pitchFamily="34" charset="-122"/>
                           <a:cs typeface="BIZ UDPGothic" pitchFamily="34" charset="-120"/>
                         </a:rPr>
-                        <a:t>約141億円</a:t>
+                        <a:t>約141億円（推定）</a:t>
                       </a:r>
                       <a:endParaRPr lang="en-US" sz="900" dirty="0">
                         <a:latin typeface="BIZ UDPGothic" charset="0"/>
@@ -35347,7 +35069,7 @@
                 <a:ea typeface="BIZ UDPGothic" pitchFamily="34" charset="-122"/>
                 <a:cs typeface="BIZ UDPGothic" pitchFamily="34" charset="-120"/>
               </a:rPr>
-              <a:t>小規模は書類が少なく元が取れにくいので外す。大手は支店5拠点分</a:t>
+              <a:t>小規模は1拠点10台が要らないので、まず外す（少人数向けの軽いプランは成長期の候補）。大手は支店5拠点分</a:t>
             </a:r>
             <a:endParaRPr lang="en-US" sz="900" dirty="0"/>
           </a:p>

--- a/deck/カンツギ_事業計画書_16枚版.pptx
+++ b/deck/カンツギ_事業計画書_16枚版.pptx
@@ -5540,7 +5540,7 @@
         <p:spPr>
           <a:xfrm>
             <a:off x="2103120" y="2496312"/>
-            <a:ext cx="1354550" cy="219456"/>
+            <a:ext cx="2331720" cy="219456"/>
           </a:xfrm>
           <a:prstGeom prst="rect">
             <a:avLst/>
@@ -5559,7 +5559,7 @@
         </p:nvSpPr>
         <p:spPr>
           <a:xfrm>
-            <a:off x="3503390" y="2441448"/>
+            <a:off x="4480560" y="2441448"/>
             <a:ext cx="822960" cy="329184"/>
           </a:xfrm>
           <a:prstGeom prst="rect">
@@ -5629,6 +5629,110 @@
                 <a:ea typeface="BIZ UDPGothic" pitchFamily="34" charset="-122"/>
                 <a:cs typeface="BIZ UDPGothic" pitchFamily="34" charset="-120"/>
               </a:rPr>
+              <a:t>使うのが年200日なら</a:t>
+            </a:r>
+            <a:endParaRPr lang="en-US" sz="950" dirty="0"/>
+          </a:p>
+        </p:txBody>
+      </p:sp>
+      <p:sp>
+        <p:nvSpPr>
+          <p:cNvPr id="16" name="Shape 13"/>
+          <p:cNvSpPr/>
+          <p:nvPr/>
+        </p:nvSpPr>
+        <p:spPr>
+          <a:xfrm>
+            <a:off x="2103120" y="2898648"/>
+            <a:ext cx="1943100" cy="219456"/>
+          </a:xfrm>
+          <a:prstGeom prst="rect">
+            <a:avLst/>
+          </a:prstGeom>
+          <a:solidFill>
+            <a:srgbClr val="7B8794"/>
+          </a:solidFill>
+          <a:ln/>
+        </p:spPr>
+      </p:sp>
+      <p:sp>
+        <p:nvSpPr>
+          <p:cNvPr id="17" name="Text 14"/>
+          <p:cNvSpPr txBox="1"/>
+          <p:nvPr/>
+        </p:nvSpPr>
+        <p:spPr>
+          <a:xfrm>
+            <a:off x="4091940" y="2843784"/>
+            <a:ext cx="822960" cy="329184"/>
+          </a:xfrm>
+          <a:prstGeom prst="rect">
+            <a:avLst/>
+          </a:prstGeom>
+          <a:noFill/>
+          <a:ln/>
+        </p:spPr>
+        <p:txBody>
+          <a:bodyPr wrap="square" lIns="0" tIns="0" rIns="0" bIns="0" rtlCol="0" anchor="ctr"/>
+          <a:lstStyle/>
+          <a:p>
+            <a:pPr algn="l" indent="0" marL="0">
+              <a:lnSpc>
+                <a:spcPct val="115000"/>
+              </a:lnSpc>
+              <a:buNone/>
+            </a:pPr>
+            <a:r>
+              <a:rPr lang="en-US" sz="1000" b="1" dirty="0">
+                <a:solidFill>
+                  <a:srgbClr val="1F2933"/>
+                </a:solidFill>
+                <a:latin typeface="BIZ UDPGothic" pitchFamily="34" charset="0"/>
+                <a:ea typeface="BIZ UDPGothic" pitchFamily="34" charset="-122"/>
+                <a:cs typeface="BIZ UDPGothic" pitchFamily="34" charset="-120"/>
+              </a:rPr>
+              <a:t>416万円</a:t>
+            </a:r>
+            <a:endParaRPr lang="en-US" sz="1000" dirty="0"/>
+          </a:p>
+        </p:txBody>
+      </p:sp>
+      <p:sp>
+        <p:nvSpPr>
+          <p:cNvPr id="18" name="Text 15"/>
+          <p:cNvSpPr txBox="1"/>
+          <p:nvPr/>
+        </p:nvSpPr>
+        <p:spPr>
+          <a:xfrm>
+            <a:off x="365760" y="3246120"/>
+            <a:ext cx="1691640" cy="329184"/>
+          </a:xfrm>
+          <a:prstGeom prst="rect">
+            <a:avLst/>
+          </a:prstGeom>
+          <a:noFill/>
+          <a:ln/>
+        </p:spPr>
+        <p:txBody>
+          <a:bodyPr wrap="square" lIns="0" tIns="0" rIns="0" bIns="0" rtlCol="0" anchor="ctr"/>
+          <a:lstStyle/>
+          <a:p>
+            <a:pPr algn="l" indent="0" marL="0">
+              <a:lnSpc>
+                <a:spcPct val="115000"/>
+              </a:lnSpc>
+              <a:buNone/>
+            </a:pPr>
+            <a:r>
+              <a:rPr lang="en-US" sz="950" b="1" dirty="0">
+                <a:solidFill>
+                  <a:srgbClr val="1F2933"/>
+                </a:solidFill>
+                <a:latin typeface="BIZ UDPGothic" pitchFamily="34" charset="0"/>
+                <a:ea typeface="BIZ UDPGothic" pitchFamily="34" charset="-122"/>
+                <a:cs typeface="BIZ UDPGothic" pitchFamily="34" charset="-120"/>
+              </a:rPr>
               <a:t>お客様の支払い</a:t>
             </a:r>
             <a:endParaRPr lang="en-US" sz="950" dirty="0"/>
@@ -5637,14 +5741,14 @@
       </p:sp>
       <p:sp>
         <p:nvSpPr>
-          <p:cNvPr id="16" name="Shape 13"/>
+          <p:cNvPr id="19" name="Shape 16"/>
           <p:cNvSpPr/>
           <p:nvPr/>
         </p:nvSpPr>
         <p:spPr>
           <a:xfrm>
-            <a:off x="2103120" y="2898648"/>
-            <a:ext cx="900299" cy="219456"/>
+            <a:off x="2103120" y="3300984"/>
+            <a:ext cx="1549773" cy="219456"/>
           </a:xfrm>
           <a:prstGeom prst="rect">
             <a:avLst/>
@@ -5657,13 +5761,13 @@
       </p:sp>
       <p:sp>
         <p:nvSpPr>
-          <p:cNvPr id="17" name="Text 14"/>
+          <p:cNvPr id="20" name="Text 17"/>
           <p:cNvSpPr txBox="1"/>
           <p:nvPr/>
         </p:nvSpPr>
         <p:spPr>
           <a:xfrm>
-            <a:off x="3049139" y="2843784"/>
+            <a:off x="3698613" y="3246120"/>
             <a:ext cx="822960" cy="329184"/>
           </a:xfrm>
           <a:prstGeom prst="rect">
@@ -5699,110 +5803,6 @@
       </p:sp>
       <p:sp>
         <p:nvSpPr>
-          <p:cNvPr id="18" name="Text 15"/>
-          <p:cNvSpPr txBox="1"/>
-          <p:nvPr/>
-        </p:nvSpPr>
-        <p:spPr>
-          <a:xfrm>
-            <a:off x="365760" y="3246120"/>
-            <a:ext cx="1691640" cy="329184"/>
-          </a:xfrm>
-          <a:prstGeom prst="rect">
-            <a:avLst/>
-          </a:prstGeom>
-          <a:noFill/>
-          <a:ln/>
-        </p:spPr>
-        <p:txBody>
-          <a:bodyPr wrap="square" lIns="0" tIns="0" rIns="0" bIns="0" rtlCol="0" anchor="ctr"/>
-          <a:lstStyle/>
-          <a:p>
-            <a:pPr algn="l" indent="0" marL="0">
-              <a:lnSpc>
-                <a:spcPct val="115000"/>
-              </a:lnSpc>
-              <a:buNone/>
-            </a:pPr>
-            <a:r>
-              <a:rPr lang="en-US" sz="950" b="1" dirty="0">
-                <a:solidFill>
-                  <a:srgbClr val="1F2933"/>
-                </a:solidFill>
-                <a:latin typeface="BIZ UDPGothic" pitchFamily="34" charset="0"/>
-                <a:ea typeface="BIZ UDPGothic" pitchFamily="34" charset="-122"/>
-                <a:cs typeface="BIZ UDPGothic" pitchFamily="34" charset="-120"/>
-              </a:rPr>
-              <a:t>手戻り削減を含む場合</a:t>
-            </a:r>
-            <a:endParaRPr lang="en-US" sz="950" dirty="0"/>
-          </a:p>
-        </p:txBody>
-      </p:sp>
-      <p:sp>
-        <p:nvSpPr>
-          <p:cNvPr id="19" name="Shape 16"/>
-          <p:cNvSpPr/>
-          <p:nvPr/>
-        </p:nvSpPr>
-        <p:spPr>
-          <a:xfrm>
-            <a:off x="2103120" y="3300984"/>
-            <a:ext cx="2331720" cy="219456"/>
-          </a:xfrm>
-          <a:prstGeom prst="rect">
-            <a:avLst/>
-          </a:prstGeom>
-          <a:solidFill>
-            <a:srgbClr val="7B8794"/>
-          </a:solidFill>
-          <a:ln/>
-        </p:spPr>
-      </p:sp>
-      <p:sp>
-        <p:nvSpPr>
-          <p:cNvPr id="20" name="Text 17"/>
-          <p:cNvSpPr txBox="1"/>
-          <p:nvPr/>
-        </p:nvSpPr>
-        <p:spPr>
-          <a:xfrm>
-            <a:off x="4480560" y="3246120"/>
-            <a:ext cx="822960" cy="329184"/>
-          </a:xfrm>
-          <a:prstGeom prst="rect">
-            <a:avLst/>
-          </a:prstGeom>
-          <a:noFill/>
-          <a:ln/>
-        </p:spPr>
-        <p:txBody>
-          <a:bodyPr wrap="square" lIns="0" tIns="0" rIns="0" bIns="0" rtlCol="0" anchor="ctr"/>
-          <a:lstStyle/>
-          <a:p>
-            <a:pPr algn="l" indent="0" marL="0">
-              <a:lnSpc>
-                <a:spcPct val="115000"/>
-              </a:lnSpc>
-              <a:buNone/>
-            </a:pPr>
-            <a:r>
-              <a:rPr lang="en-US" sz="1000" b="1" dirty="0">
-                <a:solidFill>
-                  <a:srgbClr val="1F2933"/>
-                </a:solidFill>
-                <a:latin typeface="BIZ UDPGothic" pitchFamily="34" charset="0"/>
-                <a:ea typeface="BIZ UDPGothic" pitchFamily="34" charset="-122"/>
-                <a:cs typeface="BIZ UDPGothic" pitchFamily="34" charset="-120"/>
-              </a:rPr>
-              <a:t>859万円</a:t>
-            </a:r>
-            <a:endParaRPr lang="en-US" sz="1000" dirty="0"/>
-          </a:p>
-        </p:txBody>
-      </p:sp>
-      <p:sp>
-        <p:nvSpPr>
           <p:cNvPr id="21" name="Text 18"/>
           <p:cNvSpPr txBox="1"/>
           <p:nvPr/>
@@ -5837,7 +5837,7 @@
                 <a:ea typeface="BIZ UDPGothic" pitchFamily="34" charset="-122"/>
                 <a:cs typeface="BIZ UDPGothic" pitchFamily="34" charset="-120"/>
               </a:rPr>
-              <a:t>支払い＝利用料300万円＋AIグラスのリース約32万円。手戻り＝完成工事高30億円×2%×対象工種30%×削減20%（上振れ・計画外）</a:t>
+              <a:t>支払い＝利用料300万円＋AIグラスのリース約32万円。手戻りの削減は会社ごとに違い、測る手間も見合わないので数えない</a:t>
             </a:r>
             <a:endParaRPr lang="en-US" sz="850" dirty="0"/>
           </a:p>
@@ -6415,7 +6415,7 @@
                           <a:ea typeface="BIZ UDPGothic" pitchFamily="34" charset="-122"/>
                           <a:cs typeface="BIZ UDPGothic" pitchFamily="34" charset="-120"/>
                         </a:rPr>
-                        <a:t>手戻り削減を含む倍率</a:t>
+                        <a:t>年200日でも</a:t>
                       </a:r>
                       <a:endParaRPr lang="en-US" sz="950" dirty="0">
                         <a:latin typeface="BIZ UDPGothic" charset="0"/>
@@ -6465,7 +6465,7 @@
                           <a:ea typeface="BIZ UDPGothic" pitchFamily="34" charset="-122"/>
                           <a:cs typeface="BIZ UDPGothic" pitchFamily="34" charset="-120"/>
                         </a:rPr>
-                        <a:t>約2.6倍</a:t>
+                        <a:t>約1.25倍</a:t>
                       </a:r>
                       <a:endParaRPr lang="en-US" sz="950" dirty="0">
                         <a:latin typeface="BIZ UDPGothic" charset="0"/>
